--- a/EQV-Ecofitness-Aldeia.pptx
+++ b/EQV-Ecofitness-Aldeia.pptx
@@ -2491,7 +2491,7 @@
                 <a:ea typeface="Arial" pitchFamily="34" charset="-122"/>
                 <a:cs typeface="Arial" pitchFamily="34" charset="-120"/>
               </a:rPr>
-              <a:t>R$ 30.000</a:t>
+              <a:t>R$ 40.174</a:t>
             </a:r>
             <a:endParaRPr lang="en-US" sz="3000" dirty="0"/>
           </a:p>
@@ -2602,7 +2602,7 @@
                 <a:ea typeface="Arial" pitchFamily="34" charset="-122"/>
                 <a:cs typeface="Arial" pitchFamily="34" charset="-120"/>
               </a:rPr>
-              <a:t>R$ 14.826</a:t>
+              <a:t>R$ 25.000</a:t>
             </a:r>
             <a:endParaRPr lang="en-US" sz="4400" dirty="0"/>
           </a:p>
@@ -2711,7 +2711,7 @@
                 <a:ea typeface="Arial" pitchFamily="34" charset="-122"/>
                 <a:cs typeface="Arial" pitchFamily="34" charset="-120"/>
               </a:rPr>
-              <a:t>12x R$ 1.402</a:t>
+              <a:t>12x R$ 2.363</a:t>
             </a:r>
             <a:endParaRPr lang="en-US" sz="3000" dirty="0"/>
           </a:p>

--- a/EQV-Ecofitness-Aldeia.pptx
+++ b/EQV-Ecofitness-Aldeia.pptx
@@ -17,7 +17,7 @@
     <p:sldId id="265" r:id="rId16"/>
     <p:sldId id="266" r:id="rId17"/>
   </p:sldIdLst>
-  <p:sldSz cx="6858000" cy="3857625" type="screen4x3"/>
+  <p:sldSz cx="12191695" cy="6858000" type="screen4x3"/>
   <p:notesSz cx="6858000" cy="9144000"/>
   <p:defaultTextStyle>
     <a:defPPr>
@@ -3098,30 +3098,390 @@
         <p:nvPr/>
       </p:nvGrpSpPr>
       <p:grpSpPr/>
-      <p:pic>
-        <p:nvPicPr>
-          <p:cNvPr id="2" name="Picture 1" descr="slide_01.png"/>
-          <p:cNvPicPr>
-            <a:picLocks noChangeAspect="1"/>
-          </p:cNvPicPr>
-          <p:nvPr/>
-        </p:nvPicPr>
-        <p:blipFill>
-          <a:blip r:embed="rId2"/>
-          <a:stretch>
-            <a:fillRect/>
-          </a:stretch>
-        </p:blipFill>
+      <p:sp>
+        <p:nvSpPr>
+          <p:cNvPr id="2" name="Rectangle 1"/>
+          <p:cNvSpPr/>
+          <p:nvPr/>
+        </p:nvSpPr>
         <p:spPr>
           <a:xfrm>
             <a:off x="0" y="0"/>
-            <a:ext cx="6858000" cy="3857625"/>
-          </a:xfrm>
-          <a:prstGeom prst="rect">
-            <a:avLst/>
-          </a:prstGeom>
-        </p:spPr>
-      </p:pic>
+            <a:ext cx="12191695" cy="6858000"/>
+          </a:xfrm>
+          <a:prstGeom prst="rect">
+            <a:avLst/>
+          </a:prstGeom>
+          <a:solidFill>
+            <a:srgbClr val="0D0D0D"/>
+          </a:solidFill>
+          <a:ln>
+            <a:noFill/>
+          </a:ln>
+        </p:spPr>
+        <p:style>
+          <a:lnRef idx="1">
+            <a:schemeClr val="accent1"/>
+          </a:lnRef>
+          <a:fillRef idx="3">
+            <a:schemeClr val="accent1"/>
+          </a:fillRef>
+          <a:effectRef idx="2">
+            <a:schemeClr val="accent1"/>
+          </a:effectRef>
+          <a:fontRef idx="minor">
+            <a:schemeClr val="lt1"/>
+          </a:fontRef>
+        </p:style>
+        <p:txBody>
+          <a:bodyPr rtlCol="0" anchor="ctr"/>
+          <a:lstStyle/>
+          <a:p>
+            <a:pPr algn="ctr"/>
+          </a:p>
+        </p:txBody>
+      </p:sp>
+      <p:sp>
+        <p:nvSpPr>
+          <p:cNvPr id="3" name="Oval 2"/>
+          <p:cNvSpPr/>
+          <p:nvPr/>
+        </p:nvSpPr>
+        <p:spPr>
+          <a:xfrm>
+            <a:off x="-1828800" y="-1371600"/>
+            <a:ext cx="4572000" cy="4572000"/>
+          </a:xfrm>
+          <a:prstGeom prst="ellipse">
+            <a:avLst/>
+          </a:prstGeom>
+          <a:solidFill>
+            <a:srgbClr val="3C0909"/>
+          </a:solidFill>
+          <a:ln>
+            <a:noFill/>
+          </a:ln>
+        </p:spPr>
+        <p:style>
+          <a:lnRef idx="1">
+            <a:schemeClr val="accent1"/>
+          </a:lnRef>
+          <a:fillRef idx="3">
+            <a:schemeClr val="accent1"/>
+          </a:fillRef>
+          <a:effectRef idx="2">
+            <a:schemeClr val="accent1"/>
+          </a:effectRef>
+          <a:fontRef idx="minor">
+            <a:schemeClr val="lt1"/>
+          </a:fontRef>
+        </p:style>
+        <p:txBody>
+          <a:bodyPr rtlCol="0" anchor="ctr"/>
+          <a:lstStyle/>
+          <a:p>
+            <a:pPr algn="ctr"/>
+          </a:p>
+        </p:txBody>
+      </p:sp>
+      <p:sp>
+        <p:nvSpPr>
+          <p:cNvPr id="4" name="Oval 3"/>
+          <p:cNvSpPr/>
+          <p:nvPr/>
+        </p:nvSpPr>
+        <p:spPr>
+          <a:xfrm>
+            <a:off x="9144000" y="3657600"/>
+            <a:ext cx="4114800" cy="4114800"/>
+          </a:xfrm>
+          <a:prstGeom prst="ellipse">
+            <a:avLst/>
+          </a:prstGeom>
+          <a:solidFill>
+            <a:srgbClr val="3C0909"/>
+          </a:solidFill>
+          <a:ln>
+            <a:noFill/>
+          </a:ln>
+        </p:spPr>
+        <p:style>
+          <a:lnRef idx="1">
+            <a:schemeClr val="accent1"/>
+          </a:lnRef>
+          <a:fillRef idx="3">
+            <a:schemeClr val="accent1"/>
+          </a:fillRef>
+          <a:effectRef idx="2">
+            <a:schemeClr val="accent1"/>
+          </a:effectRef>
+          <a:fontRef idx="minor">
+            <a:schemeClr val="lt1"/>
+          </a:fontRef>
+        </p:style>
+        <p:txBody>
+          <a:bodyPr rtlCol="0" anchor="ctr"/>
+          <a:lstStyle/>
+          <a:p>
+            <a:pPr algn="ctr"/>
+          </a:p>
+        </p:txBody>
+      </p:sp>
+      <p:sp>
+        <p:nvSpPr>
+          <p:cNvPr id="5" name="TextBox 4"/>
+          <p:cNvSpPr txBox="1"/>
+          <p:nvPr/>
+        </p:nvSpPr>
+        <p:spPr>
+          <a:xfrm>
+            <a:off x="457200" y="1645920"/>
+            <a:ext cx="11247120" cy="365760"/>
+          </a:xfrm>
+          <a:prstGeom prst="rect">
+            <a:avLst/>
+          </a:prstGeom>
+          <a:noFill/>
+        </p:spPr>
+        <p:txBody>
+          <a:bodyPr wrap="square">
+            <a:spAutoFit/>
+          </a:bodyPr>
+          <a:lstStyle/>
+          <a:p>
+            <a:pPr algn="ctr"/>
+            <a:r>
+              <a:rPr sz="1400" b="1">
+                <a:solidFill>
+                  <a:srgbClr val="CC0000"/>
+                </a:solidFill>
+                <a:latin typeface="Arial"/>
+              </a:rPr>
+              <a:t>V4 COMPANY APRESENTA</a:t>
+            </a:r>
+          </a:p>
+        </p:txBody>
+      </p:sp>
+      <p:sp>
+        <p:nvSpPr>
+          <p:cNvPr id="6" name="TextBox 5"/>
+          <p:cNvSpPr txBox="1"/>
+          <p:nvPr/>
+        </p:nvSpPr>
+        <p:spPr>
+          <a:xfrm>
+            <a:off x="457200" y="2103120"/>
+            <a:ext cx="11247120" cy="822960"/>
+          </a:xfrm>
+          <a:prstGeom prst="rect">
+            <a:avLst/>
+          </a:prstGeom>
+          <a:noFill/>
+        </p:spPr>
+        <p:txBody>
+          <a:bodyPr wrap="square">
+            <a:spAutoFit/>
+          </a:bodyPr>
+          <a:lstStyle/>
+          <a:p>
+            <a:pPr algn="ctr"/>
+            <a:r>
+              <a:rPr sz="5400" b="1">
+                <a:solidFill>
+                  <a:srgbClr val="FFFFFF"/>
+                </a:solidFill>
+                <a:latin typeface="Arial"/>
+              </a:rPr>
+              <a:t>EMPRESA</a:t>
+            </a:r>
+          </a:p>
+        </p:txBody>
+      </p:sp>
+      <p:sp>
+        <p:nvSpPr>
+          <p:cNvPr id="7" name="TextBox 6"/>
+          <p:cNvSpPr txBox="1"/>
+          <p:nvPr/>
+        </p:nvSpPr>
+        <p:spPr>
+          <a:xfrm>
+            <a:off x="457200" y="2834640"/>
+            <a:ext cx="11247120" cy="822960"/>
+          </a:xfrm>
+          <a:prstGeom prst="rect">
+            <a:avLst/>
+          </a:prstGeom>
+          <a:noFill/>
+        </p:spPr>
+        <p:txBody>
+          <a:bodyPr wrap="square">
+            <a:spAutoFit/>
+          </a:bodyPr>
+          <a:lstStyle/>
+          <a:p>
+            <a:pPr algn="ctr"/>
+            <a:r>
+              <a:rPr sz="5400" b="1">
+                <a:solidFill>
+                  <a:srgbClr val="CC0000"/>
+                </a:solidFill>
+                <a:latin typeface="Arial"/>
+              </a:rPr>
+              <a:t>QUE VENDE</a:t>
+            </a:r>
+          </a:p>
+        </p:txBody>
+      </p:sp>
+      <p:sp>
+        <p:nvSpPr>
+          <p:cNvPr id="8" name="TextBox 7"/>
+          <p:cNvSpPr txBox="1"/>
+          <p:nvPr/>
+        </p:nvSpPr>
+        <p:spPr>
+          <a:xfrm>
+            <a:off x="457200" y="3749039"/>
+            <a:ext cx="11247120" cy="365760"/>
+          </a:xfrm>
+          <a:prstGeom prst="rect">
+            <a:avLst/>
+          </a:prstGeom>
+          <a:noFill/>
+        </p:spPr>
+        <p:txBody>
+          <a:bodyPr wrap="square">
+            <a:spAutoFit/>
+          </a:bodyPr>
+          <a:lstStyle/>
+          <a:p>
+            <a:pPr algn="ctr"/>
+            <a:r>
+              <a:rPr sz="1600" b="0">
+                <a:solidFill>
+                  <a:srgbClr val="C2C2C2"/>
+                </a:solidFill>
+                <a:latin typeface="Arial"/>
+              </a:rPr>
+              <a:t>Estrutura o negócio. Treina o time. Acompanha a execução.</a:t>
+            </a:r>
+          </a:p>
+        </p:txBody>
+      </p:sp>
+      <p:sp>
+        <p:nvSpPr>
+          <p:cNvPr id="9" name="Rounded Rectangle 8"/>
+          <p:cNvSpPr/>
+          <p:nvPr/>
+        </p:nvSpPr>
+        <p:spPr>
+          <a:xfrm>
+            <a:off x="4114800" y="4297680"/>
+            <a:ext cx="3931920" cy="502920"/>
+          </a:xfrm>
+          <a:prstGeom prst="roundRect">
+            <a:avLst/>
+          </a:prstGeom>
+          <a:solidFill>
+            <a:srgbClr val="2A0A0A"/>
+          </a:solidFill>
+          <a:ln>
+            <a:solidFill>
+              <a:srgbClr val="CC0000"/>
+            </a:solidFill>
+          </a:ln>
+        </p:spPr>
+        <p:style>
+          <a:lnRef idx="1">
+            <a:schemeClr val="accent1"/>
+          </a:lnRef>
+          <a:fillRef idx="3">
+            <a:schemeClr val="accent1"/>
+          </a:fillRef>
+          <a:effectRef idx="2">
+            <a:schemeClr val="accent1"/>
+          </a:effectRef>
+          <a:fontRef idx="minor">
+            <a:schemeClr val="lt1"/>
+          </a:fontRef>
+        </p:style>
+        <p:txBody>
+          <a:bodyPr rtlCol="0" anchor="ctr"/>
+          <a:lstStyle/>
+          <a:p>
+            <a:pPr algn="ctr"/>
+          </a:p>
+        </p:txBody>
+      </p:sp>
+      <p:sp>
+        <p:nvSpPr>
+          <p:cNvPr id="10" name="TextBox 9"/>
+          <p:cNvSpPr txBox="1"/>
+          <p:nvPr/>
+        </p:nvSpPr>
+        <p:spPr>
+          <a:xfrm>
+            <a:off x="4114800" y="4370832"/>
+            <a:ext cx="3931920" cy="365760"/>
+          </a:xfrm>
+          <a:prstGeom prst="rect">
+            <a:avLst/>
+          </a:prstGeom>
+          <a:noFill/>
+        </p:spPr>
+        <p:txBody>
+          <a:bodyPr wrap="square">
+            <a:spAutoFit/>
+          </a:bodyPr>
+          <a:lstStyle/>
+          <a:p>
+            <a:pPr algn="ctr"/>
+            <a:r>
+              <a:rPr sz="1400" b="1">
+                <a:solidFill>
+                  <a:srgbClr val="FFFFFF"/>
+                </a:solidFill>
+                <a:latin typeface="Arial"/>
+              </a:rPr>
+              <a:t>ECOFITNESS ALDEIA</a:t>
+            </a:r>
+          </a:p>
+        </p:txBody>
+      </p:sp>
+      <p:sp>
+        <p:nvSpPr>
+          <p:cNvPr id="11" name="TextBox 10"/>
+          <p:cNvSpPr txBox="1"/>
+          <p:nvPr/>
+        </p:nvSpPr>
+        <p:spPr>
+          <a:xfrm>
+            <a:off x="457200" y="6309360"/>
+            <a:ext cx="11247120" cy="274320"/>
+          </a:xfrm>
+          <a:prstGeom prst="rect">
+            <a:avLst/>
+          </a:prstGeom>
+          <a:noFill/>
+        </p:spPr>
+        <p:txBody>
+          <a:bodyPr wrap="square">
+            <a:spAutoFit/>
+          </a:bodyPr>
+          <a:lstStyle/>
+          <a:p>
+            <a:pPr algn="ctr"/>
+            <a:r>
+              <a:rPr sz="1000" b="0">
+                <a:solidFill>
+                  <a:srgbClr val="C2C2C2"/>
+                </a:solidFill>
+                <a:latin typeface="Arial"/>
+              </a:rPr>
+              <a:t>V4 COMPANY  ·  EMPRESA QUE VENDE  ·  2026</a:t>
+            </a:r>
+          </a:p>
+        </p:txBody>
+      </p:sp>
     </p:spTree>
   </p:cSld>
   <p:clrMapOvr>
@@ -3140,30 +3500,793 @@
         <p:nvPr/>
       </p:nvGrpSpPr>
       <p:grpSpPr/>
-      <p:pic>
-        <p:nvPicPr>
-          <p:cNvPr id="2" name="Picture 1" descr="slide_10.png"/>
-          <p:cNvPicPr>
-            <a:picLocks noChangeAspect="1"/>
-          </p:cNvPicPr>
-          <p:nvPr/>
-        </p:nvPicPr>
-        <p:blipFill>
-          <a:blip r:embed="rId2"/>
-          <a:stretch>
-            <a:fillRect/>
-          </a:stretch>
-        </p:blipFill>
+      <p:sp>
+        <p:nvSpPr>
+          <p:cNvPr id="2" name="Rectangle 1"/>
+          <p:cNvSpPr/>
+          <p:nvPr/>
+        </p:nvSpPr>
         <p:spPr>
           <a:xfrm>
             <a:off x="0" y="0"/>
-            <a:ext cx="6858000" cy="3857625"/>
-          </a:xfrm>
-          <a:prstGeom prst="rect">
-            <a:avLst/>
-          </a:prstGeom>
-        </p:spPr>
-      </p:pic>
+            <a:ext cx="12191695" cy="6858000"/>
+          </a:xfrm>
+          <a:prstGeom prst="rect">
+            <a:avLst/>
+          </a:prstGeom>
+          <a:solidFill>
+            <a:srgbClr val="0D0D0D"/>
+          </a:solidFill>
+          <a:ln>
+            <a:noFill/>
+          </a:ln>
+        </p:spPr>
+        <p:style>
+          <a:lnRef idx="1">
+            <a:schemeClr val="accent1"/>
+          </a:lnRef>
+          <a:fillRef idx="3">
+            <a:schemeClr val="accent1"/>
+          </a:fillRef>
+          <a:effectRef idx="2">
+            <a:schemeClr val="accent1"/>
+          </a:effectRef>
+          <a:fontRef idx="minor">
+            <a:schemeClr val="lt1"/>
+          </a:fontRef>
+        </p:style>
+        <p:txBody>
+          <a:bodyPr rtlCol="0" anchor="ctr"/>
+          <a:lstStyle/>
+          <a:p>
+            <a:pPr algn="ctr"/>
+          </a:p>
+        </p:txBody>
+      </p:sp>
+      <p:sp>
+        <p:nvSpPr>
+          <p:cNvPr id="3" name="Oval 2"/>
+          <p:cNvSpPr/>
+          <p:nvPr/>
+        </p:nvSpPr>
+        <p:spPr>
+          <a:xfrm>
+            <a:off x="-1828800" y="-1371600"/>
+            <a:ext cx="4572000" cy="4572000"/>
+          </a:xfrm>
+          <a:prstGeom prst="ellipse">
+            <a:avLst/>
+          </a:prstGeom>
+          <a:solidFill>
+            <a:srgbClr val="3C0909"/>
+          </a:solidFill>
+          <a:ln>
+            <a:noFill/>
+          </a:ln>
+        </p:spPr>
+        <p:style>
+          <a:lnRef idx="1">
+            <a:schemeClr val="accent1"/>
+          </a:lnRef>
+          <a:fillRef idx="3">
+            <a:schemeClr val="accent1"/>
+          </a:fillRef>
+          <a:effectRef idx="2">
+            <a:schemeClr val="accent1"/>
+          </a:effectRef>
+          <a:fontRef idx="minor">
+            <a:schemeClr val="lt1"/>
+          </a:fontRef>
+        </p:style>
+        <p:txBody>
+          <a:bodyPr rtlCol="0" anchor="ctr"/>
+          <a:lstStyle/>
+          <a:p>
+            <a:pPr algn="ctr"/>
+          </a:p>
+        </p:txBody>
+      </p:sp>
+      <p:sp>
+        <p:nvSpPr>
+          <p:cNvPr id="4" name="Oval 3"/>
+          <p:cNvSpPr/>
+          <p:nvPr/>
+        </p:nvSpPr>
+        <p:spPr>
+          <a:xfrm>
+            <a:off x="9144000" y="3657600"/>
+            <a:ext cx="4114800" cy="4114800"/>
+          </a:xfrm>
+          <a:prstGeom prst="ellipse">
+            <a:avLst/>
+          </a:prstGeom>
+          <a:solidFill>
+            <a:srgbClr val="3C0909"/>
+          </a:solidFill>
+          <a:ln>
+            <a:noFill/>
+          </a:ln>
+        </p:spPr>
+        <p:style>
+          <a:lnRef idx="1">
+            <a:schemeClr val="accent1"/>
+          </a:lnRef>
+          <a:fillRef idx="3">
+            <a:schemeClr val="accent1"/>
+          </a:fillRef>
+          <a:effectRef idx="2">
+            <a:schemeClr val="accent1"/>
+          </a:effectRef>
+          <a:fontRef idx="minor">
+            <a:schemeClr val="lt1"/>
+          </a:fontRef>
+        </p:style>
+        <p:txBody>
+          <a:bodyPr rtlCol="0" anchor="ctr"/>
+          <a:lstStyle/>
+          <a:p>
+            <a:pPr algn="ctr"/>
+          </a:p>
+        </p:txBody>
+      </p:sp>
+      <p:sp>
+        <p:nvSpPr>
+          <p:cNvPr id="5" name="TextBox 4"/>
+          <p:cNvSpPr txBox="1"/>
+          <p:nvPr/>
+        </p:nvSpPr>
+        <p:spPr>
+          <a:xfrm>
+            <a:off x="457200" y="320040"/>
+            <a:ext cx="10972800" cy="457200"/>
+          </a:xfrm>
+          <a:prstGeom prst="rect">
+            <a:avLst/>
+          </a:prstGeom>
+          <a:noFill/>
+        </p:spPr>
+        <p:txBody>
+          <a:bodyPr wrap="square">
+            <a:spAutoFit/>
+          </a:bodyPr>
+          <a:lstStyle/>
+          <a:p>
+            <a:pPr algn="l"/>
+            <a:r>
+              <a:rPr sz="2800" b="1">
+                <a:solidFill>
+                  <a:srgbClr val="FFFFFF"/>
+                </a:solidFill>
+                <a:latin typeface="Arial"/>
+              </a:rPr>
+              <a:t>INVESTIMENTO</a:t>
+            </a:r>
+          </a:p>
+        </p:txBody>
+      </p:sp>
+      <p:sp>
+        <p:nvSpPr>
+          <p:cNvPr id="6" name="TextBox 5"/>
+          <p:cNvSpPr txBox="1"/>
+          <p:nvPr/>
+        </p:nvSpPr>
+        <p:spPr>
+          <a:xfrm>
+            <a:off x="457200" y="868680"/>
+            <a:ext cx="10972800" cy="320040"/>
+          </a:xfrm>
+          <a:prstGeom prst="rect">
+            <a:avLst/>
+          </a:prstGeom>
+          <a:noFill/>
+        </p:spPr>
+        <p:txBody>
+          <a:bodyPr wrap="square">
+            <a:spAutoFit/>
+          </a:bodyPr>
+          <a:lstStyle/>
+          <a:p>
+            <a:pPr algn="l"/>
+            <a:r>
+              <a:rPr sz="1400" b="0">
+                <a:solidFill>
+                  <a:srgbClr val="C2C2C2"/>
+                </a:solidFill>
+                <a:latin typeface="Arial"/>
+              </a:rPr>
+              <a:t>Política de preço — Ecofitness Aldeia (formato semestral)</a:t>
+            </a:r>
+          </a:p>
+        </p:txBody>
+      </p:sp>
+      <p:sp>
+        <p:nvSpPr>
+          <p:cNvPr id="7" name="Rounded Rectangle 6"/>
+          <p:cNvSpPr/>
+          <p:nvPr/>
+        </p:nvSpPr>
+        <p:spPr>
+          <a:xfrm>
+            <a:off x="457200" y="1463040"/>
+            <a:ext cx="5669280" cy="4206240"/>
+          </a:xfrm>
+          <a:prstGeom prst="roundRect">
+            <a:avLst/>
+          </a:prstGeom>
+          <a:solidFill>
+            <a:srgbClr val="1F1F1F"/>
+          </a:solidFill>
+          <a:ln>
+            <a:solidFill>
+              <a:srgbClr val="4A1010"/>
+            </a:solidFill>
+          </a:ln>
+        </p:spPr>
+        <p:style>
+          <a:lnRef idx="1">
+            <a:schemeClr val="accent1"/>
+          </a:lnRef>
+          <a:fillRef idx="3">
+            <a:schemeClr val="accent1"/>
+          </a:fillRef>
+          <a:effectRef idx="2">
+            <a:schemeClr val="accent1"/>
+          </a:effectRef>
+          <a:fontRef idx="minor">
+            <a:schemeClr val="lt1"/>
+          </a:fontRef>
+        </p:style>
+        <p:txBody>
+          <a:bodyPr rtlCol="0" anchor="ctr"/>
+          <a:lstStyle/>
+          <a:p>
+            <a:pPr algn="ctr"/>
+          </a:p>
+        </p:txBody>
+      </p:sp>
+      <p:sp>
+        <p:nvSpPr>
+          <p:cNvPr id="8" name="TextBox 7"/>
+          <p:cNvSpPr txBox="1"/>
+          <p:nvPr/>
+        </p:nvSpPr>
+        <p:spPr>
+          <a:xfrm>
+            <a:off x="731520" y="1737360"/>
+            <a:ext cx="3474720" cy="320040"/>
+          </a:xfrm>
+          <a:prstGeom prst="rect">
+            <a:avLst/>
+          </a:prstGeom>
+          <a:noFill/>
+        </p:spPr>
+        <p:txBody>
+          <a:bodyPr wrap="square">
+            <a:spAutoFit/>
+          </a:bodyPr>
+          <a:lstStyle/>
+          <a:p>
+            <a:pPr algn="l"/>
+            <a:r>
+              <a:rPr sz="1300" b="0">
+                <a:solidFill>
+                  <a:srgbClr val="C2C2C2"/>
+                </a:solidFill>
+                <a:latin typeface="Arial"/>
+              </a:rPr>
+              <a:t>Estruturação Estratégica (EE)</a:t>
+            </a:r>
+          </a:p>
+        </p:txBody>
+      </p:sp>
+      <p:sp>
+        <p:nvSpPr>
+          <p:cNvPr id="9" name="TextBox 8"/>
+          <p:cNvSpPr txBox="1"/>
+          <p:nvPr/>
+        </p:nvSpPr>
+        <p:spPr>
+          <a:xfrm>
+            <a:off x="4114800" y="1737360"/>
+            <a:ext cx="1828800" cy="365760"/>
+          </a:xfrm>
+          <a:prstGeom prst="rect">
+            <a:avLst/>
+          </a:prstGeom>
+          <a:noFill/>
+        </p:spPr>
+        <p:txBody>
+          <a:bodyPr wrap="square">
+            <a:spAutoFit/>
+          </a:bodyPr>
+          <a:lstStyle/>
+          <a:p>
+            <a:pPr algn="r"/>
+            <a:r>
+              <a:rPr sz="2000" b="1">
+                <a:solidFill>
+                  <a:srgbClr val="FFFFFF"/>
+                </a:solidFill>
+                <a:latin typeface="Arial"/>
+              </a:rPr>
+              <a:t>R$ 15.174,00</a:t>
+            </a:r>
+          </a:p>
+        </p:txBody>
+      </p:sp>
+      <p:sp>
+        <p:nvSpPr>
+          <p:cNvPr id="10" name="TextBox 9"/>
+          <p:cNvSpPr txBox="1"/>
+          <p:nvPr/>
+        </p:nvSpPr>
+        <p:spPr>
+          <a:xfrm>
+            <a:off x="731520" y="2651760"/>
+            <a:ext cx="3474720" cy="320040"/>
+          </a:xfrm>
+          <a:prstGeom prst="rect">
+            <a:avLst/>
+          </a:prstGeom>
+          <a:noFill/>
+        </p:spPr>
+        <p:txBody>
+          <a:bodyPr wrap="square">
+            <a:spAutoFit/>
+          </a:bodyPr>
+          <a:lstStyle/>
+          <a:p>
+            <a:pPr algn="l"/>
+            <a:r>
+              <a:rPr sz="1300" b="0">
+                <a:solidFill>
+                  <a:srgbClr val="C2C2C2"/>
+                </a:solidFill>
+                <a:latin typeface="Arial"/>
+              </a:rPr>
+              <a:t>Cashback EE na compra do EQV</a:t>
+            </a:r>
+          </a:p>
+        </p:txBody>
+      </p:sp>
+      <p:sp>
+        <p:nvSpPr>
+          <p:cNvPr id="11" name="TextBox 10"/>
+          <p:cNvSpPr txBox="1"/>
+          <p:nvPr/>
+        </p:nvSpPr>
+        <p:spPr>
+          <a:xfrm>
+            <a:off x="4114800" y="2651760"/>
+            <a:ext cx="1828800" cy="365760"/>
+          </a:xfrm>
+          <a:prstGeom prst="rect">
+            <a:avLst/>
+          </a:prstGeom>
+          <a:noFill/>
+        </p:spPr>
+        <p:txBody>
+          <a:bodyPr wrap="square">
+            <a:spAutoFit/>
+          </a:bodyPr>
+          <a:lstStyle/>
+          <a:p>
+            <a:pPr algn="r"/>
+            <a:r>
+              <a:rPr sz="2000" b="1">
+                <a:solidFill>
+                  <a:srgbClr val="CC0000"/>
+                </a:solidFill>
+                <a:latin typeface="Arial"/>
+              </a:rPr>
+              <a:t>– R$ 15.174,00</a:t>
+            </a:r>
+          </a:p>
+        </p:txBody>
+      </p:sp>
+      <p:sp>
+        <p:nvSpPr>
+          <p:cNvPr id="12" name="TextBox 11"/>
+          <p:cNvSpPr txBox="1"/>
+          <p:nvPr/>
+        </p:nvSpPr>
+        <p:spPr>
+          <a:xfrm>
+            <a:off x="731520" y="3566160"/>
+            <a:ext cx="3474720" cy="320040"/>
+          </a:xfrm>
+          <a:prstGeom prst="rect">
+            <a:avLst/>
+          </a:prstGeom>
+          <a:noFill/>
+        </p:spPr>
+        <p:txBody>
+          <a:bodyPr wrap="square">
+            <a:spAutoFit/>
+          </a:bodyPr>
+          <a:lstStyle/>
+          <a:p>
+            <a:pPr algn="l"/>
+            <a:r>
+              <a:rPr sz="1300" b="0">
+                <a:solidFill>
+                  <a:srgbClr val="C2C2C2"/>
+                </a:solidFill>
+                <a:latin typeface="Arial"/>
+              </a:rPr>
+              <a:t>Empresa que Vende (semestral)</a:t>
+            </a:r>
+          </a:p>
+        </p:txBody>
+      </p:sp>
+      <p:sp>
+        <p:nvSpPr>
+          <p:cNvPr id="13" name="TextBox 12"/>
+          <p:cNvSpPr txBox="1"/>
+          <p:nvPr/>
+        </p:nvSpPr>
+        <p:spPr>
+          <a:xfrm>
+            <a:off x="4114800" y="3566160"/>
+            <a:ext cx="1828800" cy="365760"/>
+          </a:xfrm>
+          <a:prstGeom prst="rect">
+            <a:avLst/>
+          </a:prstGeom>
+          <a:noFill/>
+        </p:spPr>
+        <p:txBody>
+          <a:bodyPr wrap="square">
+            <a:spAutoFit/>
+          </a:bodyPr>
+          <a:lstStyle/>
+          <a:p>
+            <a:pPr algn="r"/>
+            <a:r>
+              <a:rPr sz="2000" b="1">
+                <a:solidFill>
+                  <a:srgbClr val="FFFFFF"/>
+                </a:solidFill>
+                <a:latin typeface="Arial"/>
+              </a:rPr>
+              <a:t>R$ 35.174</a:t>
+            </a:r>
+          </a:p>
+        </p:txBody>
+      </p:sp>
+      <p:sp>
+        <p:nvSpPr>
+          <p:cNvPr id="14" name="TextBox 13"/>
+          <p:cNvSpPr txBox="1"/>
+          <p:nvPr/>
+        </p:nvSpPr>
+        <p:spPr>
+          <a:xfrm>
+            <a:off x="731520" y="4754880"/>
+            <a:ext cx="5120640" cy="640080"/>
+          </a:xfrm>
+          <a:prstGeom prst="rect">
+            <a:avLst/>
+          </a:prstGeom>
+          <a:noFill/>
+        </p:spPr>
+        <p:txBody>
+          <a:bodyPr wrap="square">
+            <a:spAutoFit/>
+          </a:bodyPr>
+          <a:lstStyle/>
+          <a:p>
+            <a:pPr algn="l"/>
+            <a:r>
+              <a:rPr sz="1200" b="0">
+                <a:solidFill>
+                  <a:srgbClr val="C2C2C2"/>
+                </a:solidFill>
+                <a:latin typeface="Arial"/>
+              </a:rPr>
+              <a:t>LP · Tracking · WhatsApp já inclusos nos entregáveis — sem linha de preço separada.</a:t>
+            </a:r>
+          </a:p>
+        </p:txBody>
+      </p:sp>
+      <p:sp>
+        <p:nvSpPr>
+          <p:cNvPr id="15" name="Rounded Rectangle 14"/>
+          <p:cNvSpPr/>
+          <p:nvPr/>
+        </p:nvSpPr>
+        <p:spPr>
+          <a:xfrm>
+            <a:off x="6492240" y="1463040"/>
+            <a:ext cx="5029200" cy="1828800"/>
+          </a:xfrm>
+          <a:prstGeom prst="roundRect">
+            <a:avLst/>
+          </a:prstGeom>
+          <a:solidFill>
+            <a:srgbClr val="CC0000"/>
+          </a:solidFill>
+          <a:ln>
+            <a:noFill/>
+          </a:ln>
+        </p:spPr>
+        <p:style>
+          <a:lnRef idx="1">
+            <a:schemeClr val="accent1"/>
+          </a:lnRef>
+          <a:fillRef idx="3">
+            <a:schemeClr val="accent1"/>
+          </a:fillRef>
+          <a:effectRef idx="2">
+            <a:schemeClr val="accent1"/>
+          </a:effectRef>
+          <a:fontRef idx="minor">
+            <a:schemeClr val="lt1"/>
+          </a:fontRef>
+        </p:style>
+        <p:txBody>
+          <a:bodyPr rtlCol="0" anchor="ctr"/>
+          <a:lstStyle/>
+          <a:p>
+            <a:pPr algn="ctr"/>
+          </a:p>
+        </p:txBody>
+      </p:sp>
+      <p:sp>
+        <p:nvSpPr>
+          <p:cNvPr id="16" name="TextBox 15"/>
+          <p:cNvSpPr txBox="1"/>
+          <p:nvPr/>
+        </p:nvSpPr>
+        <p:spPr>
+          <a:xfrm>
+            <a:off x="6675120" y="1645920"/>
+            <a:ext cx="4663440" cy="320040"/>
+          </a:xfrm>
+          <a:prstGeom prst="rect">
+            <a:avLst/>
+          </a:prstGeom>
+          <a:noFill/>
+        </p:spPr>
+        <p:txBody>
+          <a:bodyPr wrap="square">
+            <a:spAutoFit/>
+          </a:bodyPr>
+          <a:lstStyle/>
+          <a:p>
+            <a:pPr algn="l"/>
+            <a:r>
+              <a:rPr sz="1200" b="1">
+                <a:solidFill>
+                  <a:srgbClr val="FFFFFF"/>
+                </a:solidFill>
+                <a:latin typeface="Arial"/>
+              </a:rPr>
+              <a:t>À VISTA (COM CASHBACK EE)</a:t>
+            </a:r>
+          </a:p>
+        </p:txBody>
+      </p:sp>
+      <p:sp>
+        <p:nvSpPr>
+          <p:cNvPr id="17" name="TextBox 16"/>
+          <p:cNvSpPr txBox="1"/>
+          <p:nvPr/>
+        </p:nvSpPr>
+        <p:spPr>
+          <a:xfrm>
+            <a:off x="6675120" y="2103120"/>
+            <a:ext cx="4663440" cy="640080"/>
+          </a:xfrm>
+          <a:prstGeom prst="rect">
+            <a:avLst/>
+          </a:prstGeom>
+          <a:noFill/>
+        </p:spPr>
+        <p:txBody>
+          <a:bodyPr wrap="square">
+            <a:spAutoFit/>
+          </a:bodyPr>
+          <a:lstStyle/>
+          <a:p>
+            <a:pPr algn="l"/>
+            <a:r>
+              <a:rPr sz="4000" b="1">
+                <a:solidFill>
+                  <a:srgbClr val="FFFFFF"/>
+                </a:solidFill>
+                <a:latin typeface="Arial"/>
+              </a:rPr>
+              <a:t>R$ 20.000</a:t>
+            </a:r>
+          </a:p>
+        </p:txBody>
+      </p:sp>
+      <p:sp>
+        <p:nvSpPr>
+          <p:cNvPr id="18" name="TextBox 17"/>
+          <p:cNvSpPr txBox="1"/>
+          <p:nvPr/>
+        </p:nvSpPr>
+        <p:spPr>
+          <a:xfrm>
+            <a:off x="6675120" y="2834640"/>
+            <a:ext cx="4663440" cy="274320"/>
+          </a:xfrm>
+          <a:prstGeom prst="rect">
+            <a:avLst/>
+          </a:prstGeom>
+          <a:noFill/>
+        </p:spPr>
+        <p:txBody>
+          <a:bodyPr wrap="square">
+            <a:spAutoFit/>
+          </a:bodyPr>
+          <a:lstStyle/>
+          <a:p>
+            <a:pPr algn="l"/>
+            <a:r>
+              <a:rPr sz="1200" b="0">
+                <a:solidFill>
+                  <a:srgbClr val="FFFFFF"/>
+                </a:solidFill>
+                <a:latin typeface="Arial"/>
+              </a:rPr>
+              <a:t>EQV R$ 35.174 − cashback EE R$ 15.174</a:t>
+            </a:r>
+          </a:p>
+        </p:txBody>
+      </p:sp>
+      <p:sp>
+        <p:nvSpPr>
+          <p:cNvPr id="19" name="Rounded Rectangle 18"/>
+          <p:cNvSpPr/>
+          <p:nvPr/>
+        </p:nvSpPr>
+        <p:spPr>
+          <a:xfrm>
+            <a:off x="6492240" y="3566160"/>
+            <a:ext cx="5029200" cy="1828800"/>
+          </a:xfrm>
+          <a:prstGeom prst="roundRect">
+            <a:avLst/>
+          </a:prstGeom>
+          <a:solidFill>
+            <a:srgbClr val="1F1F1F"/>
+          </a:solidFill>
+          <a:ln>
+            <a:solidFill>
+              <a:srgbClr val="4A1010"/>
+            </a:solidFill>
+          </a:ln>
+        </p:spPr>
+        <p:style>
+          <a:lnRef idx="1">
+            <a:schemeClr val="accent1"/>
+          </a:lnRef>
+          <a:fillRef idx="3">
+            <a:schemeClr val="accent1"/>
+          </a:fillRef>
+          <a:effectRef idx="2">
+            <a:schemeClr val="accent1"/>
+          </a:effectRef>
+          <a:fontRef idx="minor">
+            <a:schemeClr val="lt1"/>
+          </a:fontRef>
+        </p:style>
+        <p:txBody>
+          <a:bodyPr rtlCol="0" anchor="ctr"/>
+          <a:lstStyle/>
+          <a:p>
+            <a:pPr algn="ctr"/>
+          </a:p>
+        </p:txBody>
+      </p:sp>
+      <p:sp>
+        <p:nvSpPr>
+          <p:cNvPr id="20" name="TextBox 19"/>
+          <p:cNvSpPr txBox="1"/>
+          <p:nvPr/>
+        </p:nvSpPr>
+        <p:spPr>
+          <a:xfrm>
+            <a:off x="6675120" y="3794760"/>
+            <a:ext cx="4663440" cy="320040"/>
+          </a:xfrm>
+          <a:prstGeom prst="rect">
+            <a:avLst/>
+          </a:prstGeom>
+          <a:noFill/>
+        </p:spPr>
+        <p:txBody>
+          <a:bodyPr wrap="square">
+            <a:spAutoFit/>
+          </a:bodyPr>
+          <a:lstStyle/>
+          <a:p>
+            <a:pPr algn="l"/>
+            <a:r>
+              <a:rPr sz="1200" b="1">
+                <a:solidFill>
+                  <a:srgbClr val="C2C2C2"/>
+                </a:solidFill>
+                <a:latin typeface="Arial"/>
+              </a:rPr>
+              <a:t>PARCELADO</a:t>
+            </a:r>
+          </a:p>
+        </p:txBody>
+      </p:sp>
+      <p:sp>
+        <p:nvSpPr>
+          <p:cNvPr id="21" name="TextBox 20"/>
+          <p:cNvSpPr txBox="1"/>
+          <p:nvPr/>
+        </p:nvSpPr>
+        <p:spPr>
+          <a:xfrm>
+            <a:off x="6675120" y="4206240"/>
+            <a:ext cx="4663440" cy="548640"/>
+          </a:xfrm>
+          <a:prstGeom prst="rect">
+            <a:avLst/>
+          </a:prstGeom>
+          <a:noFill/>
+        </p:spPr>
+        <p:txBody>
+          <a:bodyPr wrap="square">
+            <a:spAutoFit/>
+          </a:bodyPr>
+          <a:lstStyle/>
+          <a:p>
+            <a:pPr algn="l"/>
+            <a:r>
+              <a:rPr sz="3200" b="1">
+                <a:solidFill>
+                  <a:srgbClr val="FFFFFF"/>
+                </a:solidFill>
+                <a:latin typeface="Arial"/>
+              </a:rPr>
+              <a:t>6x R$ 3.333,33</a:t>
+            </a:r>
+          </a:p>
+        </p:txBody>
+      </p:sp>
+      <p:sp>
+        <p:nvSpPr>
+          <p:cNvPr id="22" name="TextBox 21"/>
+          <p:cNvSpPr txBox="1"/>
+          <p:nvPr/>
+        </p:nvSpPr>
+        <p:spPr>
+          <a:xfrm>
+            <a:off x="6675120" y="4892040"/>
+            <a:ext cx="4663440" cy="274320"/>
+          </a:xfrm>
+          <a:prstGeom prst="rect">
+            <a:avLst/>
+          </a:prstGeom>
+          <a:noFill/>
+        </p:spPr>
+        <p:txBody>
+          <a:bodyPr wrap="square">
+            <a:spAutoFit/>
+          </a:bodyPr>
+          <a:lstStyle/>
+          <a:p>
+            <a:pPr algn="l"/>
+            <a:r>
+              <a:rPr sz="1200" b="0">
+                <a:solidFill>
+                  <a:srgbClr val="C2C2C2"/>
+                </a:solidFill>
+                <a:latin typeface="Arial"/>
+              </a:rPr>
+              <a:t>Total R$ 20.000 · entregáveis inclusos</a:t>
+            </a:r>
+          </a:p>
+        </p:txBody>
+      </p:sp>
     </p:spTree>
   </p:cSld>
   <p:clrMapOvr>
@@ -3182,30 +4305,356 @@
         <p:nvPr/>
       </p:nvGrpSpPr>
       <p:grpSpPr/>
-      <p:pic>
-        <p:nvPicPr>
-          <p:cNvPr id="2" name="Picture 1" descr="slide_11.png"/>
-          <p:cNvPicPr>
-            <a:picLocks noChangeAspect="1"/>
-          </p:cNvPicPr>
-          <p:nvPr/>
-        </p:nvPicPr>
-        <p:blipFill>
-          <a:blip r:embed="rId2"/>
-          <a:stretch>
-            <a:fillRect/>
-          </a:stretch>
-        </p:blipFill>
+      <p:sp>
+        <p:nvSpPr>
+          <p:cNvPr id="2" name="Rectangle 1"/>
+          <p:cNvSpPr/>
+          <p:nvPr/>
+        </p:nvSpPr>
         <p:spPr>
           <a:xfrm>
             <a:off x="0" y="0"/>
-            <a:ext cx="6858000" cy="3857625"/>
-          </a:xfrm>
-          <a:prstGeom prst="rect">
-            <a:avLst/>
-          </a:prstGeom>
-        </p:spPr>
-      </p:pic>
+            <a:ext cx="12191695" cy="6858000"/>
+          </a:xfrm>
+          <a:prstGeom prst="rect">
+            <a:avLst/>
+          </a:prstGeom>
+          <a:solidFill>
+            <a:srgbClr val="0D0D0D"/>
+          </a:solidFill>
+          <a:ln>
+            <a:noFill/>
+          </a:ln>
+        </p:spPr>
+        <p:style>
+          <a:lnRef idx="1">
+            <a:schemeClr val="accent1"/>
+          </a:lnRef>
+          <a:fillRef idx="3">
+            <a:schemeClr val="accent1"/>
+          </a:fillRef>
+          <a:effectRef idx="2">
+            <a:schemeClr val="accent1"/>
+          </a:effectRef>
+          <a:fontRef idx="minor">
+            <a:schemeClr val="lt1"/>
+          </a:fontRef>
+        </p:style>
+        <p:txBody>
+          <a:bodyPr rtlCol="0" anchor="ctr"/>
+          <a:lstStyle/>
+          <a:p>
+            <a:pPr algn="ctr"/>
+          </a:p>
+        </p:txBody>
+      </p:sp>
+      <p:sp>
+        <p:nvSpPr>
+          <p:cNvPr id="3" name="Oval 2"/>
+          <p:cNvSpPr/>
+          <p:nvPr/>
+        </p:nvSpPr>
+        <p:spPr>
+          <a:xfrm>
+            <a:off x="-1828800" y="-1371600"/>
+            <a:ext cx="4572000" cy="4572000"/>
+          </a:xfrm>
+          <a:prstGeom prst="ellipse">
+            <a:avLst/>
+          </a:prstGeom>
+          <a:solidFill>
+            <a:srgbClr val="3C0909"/>
+          </a:solidFill>
+          <a:ln>
+            <a:noFill/>
+          </a:ln>
+        </p:spPr>
+        <p:style>
+          <a:lnRef idx="1">
+            <a:schemeClr val="accent1"/>
+          </a:lnRef>
+          <a:fillRef idx="3">
+            <a:schemeClr val="accent1"/>
+          </a:fillRef>
+          <a:effectRef idx="2">
+            <a:schemeClr val="accent1"/>
+          </a:effectRef>
+          <a:fontRef idx="minor">
+            <a:schemeClr val="lt1"/>
+          </a:fontRef>
+        </p:style>
+        <p:txBody>
+          <a:bodyPr rtlCol="0" anchor="ctr"/>
+          <a:lstStyle/>
+          <a:p>
+            <a:pPr algn="ctr"/>
+          </a:p>
+        </p:txBody>
+      </p:sp>
+      <p:sp>
+        <p:nvSpPr>
+          <p:cNvPr id="4" name="Oval 3"/>
+          <p:cNvSpPr/>
+          <p:nvPr/>
+        </p:nvSpPr>
+        <p:spPr>
+          <a:xfrm>
+            <a:off x="9144000" y="3657600"/>
+            <a:ext cx="4114800" cy="4114800"/>
+          </a:xfrm>
+          <a:prstGeom prst="ellipse">
+            <a:avLst/>
+          </a:prstGeom>
+          <a:solidFill>
+            <a:srgbClr val="3C0909"/>
+          </a:solidFill>
+          <a:ln>
+            <a:noFill/>
+          </a:ln>
+        </p:spPr>
+        <p:style>
+          <a:lnRef idx="1">
+            <a:schemeClr val="accent1"/>
+          </a:lnRef>
+          <a:fillRef idx="3">
+            <a:schemeClr val="accent1"/>
+          </a:fillRef>
+          <a:effectRef idx="2">
+            <a:schemeClr val="accent1"/>
+          </a:effectRef>
+          <a:fontRef idx="minor">
+            <a:schemeClr val="lt1"/>
+          </a:fontRef>
+        </p:style>
+        <p:txBody>
+          <a:bodyPr rtlCol="0" anchor="ctr"/>
+          <a:lstStyle/>
+          <a:p>
+            <a:pPr algn="ctr"/>
+          </a:p>
+        </p:txBody>
+      </p:sp>
+      <p:sp>
+        <p:nvSpPr>
+          <p:cNvPr id="5" name="TextBox 4"/>
+          <p:cNvSpPr txBox="1"/>
+          <p:nvPr/>
+        </p:nvSpPr>
+        <p:spPr>
+          <a:xfrm>
+            <a:off x="731520" y="1645920"/>
+            <a:ext cx="7315200" cy="1645920"/>
+          </a:xfrm>
+          <a:prstGeom prst="rect">
+            <a:avLst/>
+          </a:prstGeom>
+          <a:noFill/>
+        </p:spPr>
+        <p:txBody>
+          <a:bodyPr wrap="square">
+            <a:spAutoFit/>
+          </a:bodyPr>
+          <a:lstStyle/>
+          <a:p>
+            <a:pPr algn="l"/>
+            <a:r>
+              <a:rPr sz="4800" b="1">
+                <a:solidFill>
+                  <a:srgbClr val="FFFFFF"/>
+                </a:solidFill>
+                <a:latin typeface="Arial"/>
+              </a:rPr>
+              <a:t>PRÓXIMO
+PASSO</a:t>
+            </a:r>
+          </a:p>
+        </p:txBody>
+      </p:sp>
+      <p:sp>
+        <p:nvSpPr>
+          <p:cNvPr id="6" name="TextBox 5"/>
+          <p:cNvSpPr txBox="1"/>
+          <p:nvPr/>
+        </p:nvSpPr>
+        <p:spPr>
+          <a:xfrm>
+            <a:off x="731520" y="3566160"/>
+            <a:ext cx="9144000" cy="457200"/>
+          </a:xfrm>
+          <a:prstGeom prst="rect">
+            <a:avLst/>
+          </a:prstGeom>
+          <a:noFill/>
+        </p:spPr>
+        <p:txBody>
+          <a:bodyPr wrap="square">
+            <a:spAutoFit/>
+          </a:bodyPr>
+          <a:lstStyle/>
+          <a:p>
+            <a:pPr algn="l"/>
+            <a:r>
+              <a:rPr sz="1800" b="0">
+                <a:solidFill>
+                  <a:srgbClr val="C2C2C2"/>
+                </a:solidFill>
+                <a:latin typeface="Arial"/>
+              </a:rPr>
+              <a:t>Qualifique a Ecofitness Aldeia para o Empresa que Vende.</a:t>
+            </a:r>
+          </a:p>
+        </p:txBody>
+      </p:sp>
+      <p:sp>
+        <p:nvSpPr>
+          <p:cNvPr id="7" name="Rounded Rectangle 6"/>
+          <p:cNvSpPr/>
+          <p:nvPr/>
+        </p:nvSpPr>
+        <p:spPr>
+          <a:xfrm>
+            <a:off x="731520" y="4297680"/>
+            <a:ext cx="5029200" cy="1280160"/>
+          </a:xfrm>
+          <a:prstGeom prst="roundRect">
+            <a:avLst/>
+          </a:prstGeom>
+          <a:solidFill>
+            <a:srgbClr val="2A0A0A"/>
+          </a:solidFill>
+          <a:ln>
+            <a:solidFill>
+              <a:srgbClr val="CC0000"/>
+            </a:solidFill>
+          </a:ln>
+        </p:spPr>
+        <p:style>
+          <a:lnRef idx="1">
+            <a:schemeClr val="accent1"/>
+          </a:lnRef>
+          <a:fillRef idx="3">
+            <a:schemeClr val="accent1"/>
+          </a:fillRef>
+          <a:effectRef idx="2">
+            <a:schemeClr val="accent1"/>
+          </a:effectRef>
+          <a:fontRef idx="minor">
+            <a:schemeClr val="lt1"/>
+          </a:fontRef>
+        </p:style>
+        <p:txBody>
+          <a:bodyPr rtlCol="0" anchor="ctr"/>
+          <a:lstStyle/>
+          <a:p>
+            <a:pPr algn="ctr"/>
+          </a:p>
+        </p:txBody>
+      </p:sp>
+      <p:sp>
+        <p:nvSpPr>
+          <p:cNvPr id="8" name="TextBox 7"/>
+          <p:cNvSpPr txBox="1"/>
+          <p:nvPr/>
+        </p:nvSpPr>
+        <p:spPr>
+          <a:xfrm>
+            <a:off x="914400" y="4480560"/>
+            <a:ext cx="4663440" cy="365760"/>
+          </a:xfrm>
+          <a:prstGeom prst="rect">
+            <a:avLst/>
+          </a:prstGeom>
+          <a:noFill/>
+        </p:spPr>
+        <p:txBody>
+          <a:bodyPr wrap="square">
+            <a:spAutoFit/>
+          </a:bodyPr>
+          <a:lstStyle/>
+          <a:p>
+            <a:pPr algn="l"/>
+            <a:r>
+              <a:rPr sz="1600" b="1">
+                <a:solidFill>
+                  <a:srgbClr val="FFFFFF"/>
+                </a:solidFill>
+                <a:latin typeface="Arial"/>
+              </a:rPr>
+              <a:t>Fale com um especialista V4</a:t>
+            </a:r>
+          </a:p>
+        </p:txBody>
+      </p:sp>
+      <p:sp>
+        <p:nvSpPr>
+          <p:cNvPr id="9" name="TextBox 8"/>
+          <p:cNvSpPr txBox="1"/>
+          <p:nvPr/>
+        </p:nvSpPr>
+        <p:spPr>
+          <a:xfrm>
+            <a:off x="914400" y="4937760"/>
+            <a:ext cx="4663440" cy="320040"/>
+          </a:xfrm>
+          <a:prstGeom prst="rect">
+            <a:avLst/>
+          </a:prstGeom>
+          <a:noFill/>
+        </p:spPr>
+        <p:txBody>
+          <a:bodyPr wrap="square">
+            <a:spAutoFit/>
+          </a:bodyPr>
+          <a:lstStyle/>
+          <a:p>
+            <a:pPr algn="l"/>
+            <a:r>
+              <a:rPr sz="1400" b="0">
+                <a:solidFill>
+                  <a:srgbClr val="C2C2C2"/>
+                </a:solidFill>
+                <a:latin typeface="Arial"/>
+              </a:rPr>
+              <a:t>v4.empresaquevende.com.br</a:t>
+            </a:r>
+          </a:p>
+        </p:txBody>
+      </p:sp>
+      <p:sp>
+        <p:nvSpPr>
+          <p:cNvPr id="10" name="TextBox 9"/>
+          <p:cNvSpPr txBox="1"/>
+          <p:nvPr/>
+        </p:nvSpPr>
+        <p:spPr>
+          <a:xfrm>
+            <a:off x="457200" y="6309360"/>
+            <a:ext cx="11247120" cy="274320"/>
+          </a:xfrm>
+          <a:prstGeom prst="rect">
+            <a:avLst/>
+          </a:prstGeom>
+          <a:noFill/>
+        </p:spPr>
+        <p:txBody>
+          <a:bodyPr wrap="square">
+            <a:spAutoFit/>
+          </a:bodyPr>
+          <a:lstStyle/>
+          <a:p>
+            <a:pPr algn="ctr"/>
+            <a:r>
+              <a:rPr sz="1000" b="0">
+                <a:solidFill>
+                  <a:srgbClr val="C2C2C2"/>
+                </a:solidFill>
+                <a:latin typeface="Arial"/>
+              </a:rPr>
+              <a:t>V4 COMPANY  ·  ECOFITNESS ALDEIA  ·  2026</a:t>
+            </a:r>
+          </a:p>
+        </p:txBody>
+      </p:sp>
     </p:spTree>
   </p:cSld>
   <p:clrMapOvr>
@@ -3224,30 +4673,289 @@
         <p:nvPr/>
       </p:nvGrpSpPr>
       <p:grpSpPr/>
-      <p:pic>
-        <p:nvPicPr>
-          <p:cNvPr id="2" name="Picture 1" descr="slide_02.png"/>
-          <p:cNvPicPr>
-            <a:picLocks noChangeAspect="1"/>
-          </p:cNvPicPr>
-          <p:nvPr/>
-        </p:nvPicPr>
-        <p:blipFill>
-          <a:blip r:embed="rId2"/>
-          <a:stretch>
-            <a:fillRect/>
-          </a:stretch>
-        </p:blipFill>
+      <p:sp>
+        <p:nvSpPr>
+          <p:cNvPr id="2" name="Rectangle 1"/>
+          <p:cNvSpPr/>
+          <p:nvPr/>
+        </p:nvSpPr>
         <p:spPr>
           <a:xfrm>
             <a:off x="0" y="0"/>
-            <a:ext cx="6858000" cy="3857625"/>
-          </a:xfrm>
-          <a:prstGeom prst="rect">
-            <a:avLst/>
-          </a:prstGeom>
-        </p:spPr>
-      </p:pic>
+            <a:ext cx="12191695" cy="6858000"/>
+          </a:xfrm>
+          <a:prstGeom prst="rect">
+            <a:avLst/>
+          </a:prstGeom>
+          <a:solidFill>
+            <a:srgbClr val="0D0D0D"/>
+          </a:solidFill>
+          <a:ln>
+            <a:noFill/>
+          </a:ln>
+        </p:spPr>
+        <p:style>
+          <a:lnRef idx="1">
+            <a:schemeClr val="accent1"/>
+          </a:lnRef>
+          <a:fillRef idx="3">
+            <a:schemeClr val="accent1"/>
+          </a:fillRef>
+          <a:effectRef idx="2">
+            <a:schemeClr val="accent1"/>
+          </a:effectRef>
+          <a:fontRef idx="minor">
+            <a:schemeClr val="lt1"/>
+          </a:fontRef>
+        </p:style>
+        <p:txBody>
+          <a:bodyPr rtlCol="0" anchor="ctr"/>
+          <a:lstStyle/>
+          <a:p>
+            <a:pPr algn="ctr"/>
+          </a:p>
+        </p:txBody>
+      </p:sp>
+      <p:sp>
+        <p:nvSpPr>
+          <p:cNvPr id="3" name="Oval 2"/>
+          <p:cNvSpPr/>
+          <p:nvPr/>
+        </p:nvSpPr>
+        <p:spPr>
+          <a:xfrm>
+            <a:off x="-1828800" y="-1371600"/>
+            <a:ext cx="4572000" cy="4572000"/>
+          </a:xfrm>
+          <a:prstGeom prst="ellipse">
+            <a:avLst/>
+          </a:prstGeom>
+          <a:solidFill>
+            <a:srgbClr val="3C0909"/>
+          </a:solidFill>
+          <a:ln>
+            <a:noFill/>
+          </a:ln>
+        </p:spPr>
+        <p:style>
+          <a:lnRef idx="1">
+            <a:schemeClr val="accent1"/>
+          </a:lnRef>
+          <a:fillRef idx="3">
+            <a:schemeClr val="accent1"/>
+          </a:fillRef>
+          <a:effectRef idx="2">
+            <a:schemeClr val="accent1"/>
+          </a:effectRef>
+          <a:fontRef idx="minor">
+            <a:schemeClr val="lt1"/>
+          </a:fontRef>
+        </p:style>
+        <p:txBody>
+          <a:bodyPr rtlCol="0" anchor="ctr"/>
+          <a:lstStyle/>
+          <a:p>
+            <a:pPr algn="ctr"/>
+          </a:p>
+        </p:txBody>
+      </p:sp>
+      <p:sp>
+        <p:nvSpPr>
+          <p:cNvPr id="4" name="Oval 3"/>
+          <p:cNvSpPr/>
+          <p:nvPr/>
+        </p:nvSpPr>
+        <p:spPr>
+          <a:xfrm>
+            <a:off x="9144000" y="3657600"/>
+            <a:ext cx="4114800" cy="4114800"/>
+          </a:xfrm>
+          <a:prstGeom prst="ellipse">
+            <a:avLst/>
+          </a:prstGeom>
+          <a:solidFill>
+            <a:srgbClr val="3C0909"/>
+          </a:solidFill>
+          <a:ln>
+            <a:noFill/>
+          </a:ln>
+        </p:spPr>
+        <p:style>
+          <a:lnRef idx="1">
+            <a:schemeClr val="accent1"/>
+          </a:lnRef>
+          <a:fillRef idx="3">
+            <a:schemeClr val="accent1"/>
+          </a:fillRef>
+          <a:effectRef idx="2">
+            <a:schemeClr val="accent1"/>
+          </a:effectRef>
+          <a:fontRef idx="minor">
+            <a:schemeClr val="lt1"/>
+          </a:fontRef>
+        </p:style>
+        <p:txBody>
+          <a:bodyPr rtlCol="0" anchor="ctr"/>
+          <a:lstStyle/>
+          <a:p>
+            <a:pPr algn="ctr"/>
+          </a:p>
+        </p:txBody>
+      </p:sp>
+      <p:sp>
+        <p:nvSpPr>
+          <p:cNvPr id="5" name="TextBox 4"/>
+          <p:cNvSpPr txBox="1"/>
+          <p:nvPr/>
+        </p:nvSpPr>
+        <p:spPr>
+          <a:xfrm>
+            <a:off x="640080" y="457200"/>
+            <a:ext cx="4572000" cy="274320"/>
+          </a:xfrm>
+          <a:prstGeom prst="rect">
+            <a:avLst/>
+          </a:prstGeom>
+          <a:noFill/>
+        </p:spPr>
+        <p:txBody>
+          <a:bodyPr wrap="square">
+            <a:spAutoFit/>
+          </a:bodyPr>
+          <a:lstStyle/>
+          <a:p>
+            <a:pPr algn="l"/>
+            <a:r>
+              <a:rPr sz="1200" b="1">
+                <a:solidFill>
+                  <a:srgbClr val="CC0000"/>
+                </a:solidFill>
+                <a:latin typeface="Arial"/>
+              </a:rPr>
+              <a:t>O PROBLEMA</a:t>
+            </a:r>
+          </a:p>
+        </p:txBody>
+      </p:sp>
+      <p:sp>
+        <p:nvSpPr>
+          <p:cNvPr id="6" name="TextBox 5"/>
+          <p:cNvSpPr txBox="1"/>
+          <p:nvPr/>
+        </p:nvSpPr>
+        <p:spPr>
+          <a:xfrm>
+            <a:off x="640080" y="1645920"/>
+            <a:ext cx="9144000" cy="1280160"/>
+          </a:xfrm>
+          <a:prstGeom prst="rect">
+            <a:avLst/>
+          </a:prstGeom>
+          <a:noFill/>
+        </p:spPr>
+        <p:txBody>
+          <a:bodyPr wrap="square">
+            <a:spAutoFit/>
+          </a:bodyPr>
+          <a:lstStyle/>
+          <a:p>
+            <a:pPr algn="l"/>
+            <a:r>
+              <a:rPr sz="2800" b="1">
+                <a:solidFill>
+                  <a:srgbClr val="FFFFFF"/>
+                </a:solidFill>
+                <a:latin typeface="Arial"/>
+              </a:rPr>
+              <a:t>Você trabalha muito.
+Mas a receita ainda não é previsível.</a:t>
+            </a:r>
+          </a:p>
+        </p:txBody>
+      </p:sp>
+      <p:sp>
+        <p:nvSpPr>
+          <p:cNvPr id="7" name="TextBox 6"/>
+          <p:cNvSpPr txBox="1"/>
+          <p:nvPr/>
+        </p:nvSpPr>
+        <p:spPr>
+          <a:xfrm>
+            <a:off x="640080" y="3200400"/>
+            <a:ext cx="10058400" cy="2286000"/>
+          </a:xfrm>
+          <a:prstGeom prst="rect">
+            <a:avLst/>
+          </a:prstGeom>
+          <a:noFill/>
+        </p:spPr>
+        <p:txBody>
+          <a:bodyPr wrap="square">
+            <a:spAutoFit/>
+          </a:bodyPr>
+          <a:lstStyle/>
+          <a:p>
+            <a:pPr algn="l"/>
+            <a:r>
+              <a:rPr sz="1600" b="0">
+                <a:solidFill>
+                  <a:srgbClr val="C2C2C2"/>
+                </a:solidFill>
+                <a:latin typeface="Arial"/>
+              </a:rPr>
+              <a:t>Vendas oscilam todo mês — sem processo, sem previsibilidade.</a:t>
+            </a:r>
+          </a:p>
+          <a:p>
+            <a:pPr algn="l"/>
+            <a:r>
+              <a:rPr sz="1600" b="0">
+                <a:solidFill>
+                  <a:srgbClr val="C2C2C2"/>
+                </a:solidFill>
+                <a:latin typeface="Arial"/>
+              </a:rPr>
+              <a:t>Quando o melhor vendedor sai, o processo some com ele.</a:t>
+            </a:r>
+          </a:p>
+          <a:p>
+            <a:pPr algn="l"/>
+            <a:r>
+              <a:rPr sz="1600" b="0">
+                <a:solidFill>
+                  <a:srgbClr val="C2C2C2"/>
+                </a:solidFill>
+                <a:latin typeface="Arial"/>
+              </a:rPr>
+              <a:t>A agência executa por você — e o crescimento para quando o contrato termina.</a:t>
+            </a:r>
+          </a:p>
+          <a:p>
+            <a:pPr algn="l"/>
+            <a:r>
+              <a:rPr sz="1600" b="0">
+                <a:solidFill>
+                  <a:srgbClr val="C2C2C2"/>
+                </a:solidFill>
+                <a:latin typeface="Arial"/>
+              </a:rPr>
+              <a:t/>
+            </a:r>
+          </a:p>
+          <a:p>
+            <a:pPr algn="l"/>
+            <a:r>
+              <a:rPr sz="1600" b="0">
+                <a:solidFill>
+                  <a:srgbClr val="C2C2C2"/>
+                </a:solidFill>
+                <a:latin typeface="Arial"/>
+              </a:rPr>
+              <a:t>Este é o empresário que o Empresa que Vende foi criado para atender.</a:t>
+            </a:r>
+          </a:p>
+        </p:txBody>
+      </p:sp>
     </p:spTree>
   </p:cSld>
   <p:clrMapOvr>
@@ -3266,30 +4974,785 @@
         <p:nvPr/>
       </p:nvGrpSpPr>
       <p:grpSpPr/>
-      <p:pic>
-        <p:nvPicPr>
-          <p:cNvPr id="2" name="Picture 1" descr="slide_03.png"/>
-          <p:cNvPicPr>
-            <a:picLocks noChangeAspect="1"/>
-          </p:cNvPicPr>
-          <p:nvPr/>
-        </p:nvPicPr>
-        <p:blipFill>
-          <a:blip r:embed="rId2"/>
-          <a:stretch>
-            <a:fillRect/>
-          </a:stretch>
-        </p:blipFill>
+      <p:sp>
+        <p:nvSpPr>
+          <p:cNvPr id="2" name="Rectangle 1"/>
+          <p:cNvSpPr/>
+          <p:nvPr/>
+        </p:nvSpPr>
         <p:spPr>
           <a:xfrm>
             <a:off x="0" y="0"/>
-            <a:ext cx="6858000" cy="3857625"/>
-          </a:xfrm>
-          <a:prstGeom prst="rect">
-            <a:avLst/>
-          </a:prstGeom>
-        </p:spPr>
-      </p:pic>
+            <a:ext cx="12191695" cy="6858000"/>
+          </a:xfrm>
+          <a:prstGeom prst="rect">
+            <a:avLst/>
+          </a:prstGeom>
+          <a:solidFill>
+            <a:srgbClr val="0D0D0D"/>
+          </a:solidFill>
+          <a:ln>
+            <a:noFill/>
+          </a:ln>
+        </p:spPr>
+        <p:style>
+          <a:lnRef idx="1">
+            <a:schemeClr val="accent1"/>
+          </a:lnRef>
+          <a:fillRef idx="3">
+            <a:schemeClr val="accent1"/>
+          </a:fillRef>
+          <a:effectRef idx="2">
+            <a:schemeClr val="accent1"/>
+          </a:effectRef>
+          <a:fontRef idx="minor">
+            <a:schemeClr val="lt1"/>
+          </a:fontRef>
+        </p:style>
+        <p:txBody>
+          <a:bodyPr rtlCol="0" anchor="ctr"/>
+          <a:lstStyle/>
+          <a:p>
+            <a:pPr algn="ctr"/>
+          </a:p>
+        </p:txBody>
+      </p:sp>
+      <p:sp>
+        <p:nvSpPr>
+          <p:cNvPr id="3" name="Oval 2"/>
+          <p:cNvSpPr/>
+          <p:nvPr/>
+        </p:nvSpPr>
+        <p:spPr>
+          <a:xfrm>
+            <a:off x="-1828800" y="-1371600"/>
+            <a:ext cx="4572000" cy="4572000"/>
+          </a:xfrm>
+          <a:prstGeom prst="ellipse">
+            <a:avLst/>
+          </a:prstGeom>
+          <a:solidFill>
+            <a:srgbClr val="3C0909"/>
+          </a:solidFill>
+          <a:ln>
+            <a:noFill/>
+          </a:ln>
+        </p:spPr>
+        <p:style>
+          <a:lnRef idx="1">
+            <a:schemeClr val="accent1"/>
+          </a:lnRef>
+          <a:fillRef idx="3">
+            <a:schemeClr val="accent1"/>
+          </a:fillRef>
+          <a:effectRef idx="2">
+            <a:schemeClr val="accent1"/>
+          </a:effectRef>
+          <a:fontRef idx="minor">
+            <a:schemeClr val="lt1"/>
+          </a:fontRef>
+        </p:style>
+        <p:txBody>
+          <a:bodyPr rtlCol="0" anchor="ctr"/>
+          <a:lstStyle/>
+          <a:p>
+            <a:pPr algn="ctr"/>
+          </a:p>
+        </p:txBody>
+      </p:sp>
+      <p:sp>
+        <p:nvSpPr>
+          <p:cNvPr id="4" name="Oval 3"/>
+          <p:cNvSpPr/>
+          <p:nvPr/>
+        </p:nvSpPr>
+        <p:spPr>
+          <a:xfrm>
+            <a:off x="9144000" y="3657600"/>
+            <a:ext cx="4114800" cy="4114800"/>
+          </a:xfrm>
+          <a:prstGeom prst="ellipse">
+            <a:avLst/>
+          </a:prstGeom>
+          <a:solidFill>
+            <a:srgbClr val="3C0909"/>
+          </a:solidFill>
+          <a:ln>
+            <a:noFill/>
+          </a:ln>
+        </p:spPr>
+        <p:style>
+          <a:lnRef idx="1">
+            <a:schemeClr val="accent1"/>
+          </a:lnRef>
+          <a:fillRef idx="3">
+            <a:schemeClr val="accent1"/>
+          </a:fillRef>
+          <a:effectRef idx="2">
+            <a:schemeClr val="accent1"/>
+          </a:effectRef>
+          <a:fontRef idx="minor">
+            <a:schemeClr val="lt1"/>
+          </a:fontRef>
+        </p:style>
+        <p:txBody>
+          <a:bodyPr rtlCol="0" anchor="ctr"/>
+          <a:lstStyle/>
+          <a:p>
+            <a:pPr algn="ctr"/>
+          </a:p>
+        </p:txBody>
+      </p:sp>
+      <p:sp>
+        <p:nvSpPr>
+          <p:cNvPr id="5" name="TextBox 4"/>
+          <p:cNvSpPr txBox="1"/>
+          <p:nvPr/>
+        </p:nvSpPr>
+        <p:spPr>
+          <a:xfrm>
+            <a:off x="640080" y="365760"/>
+            <a:ext cx="9144000" cy="457200"/>
+          </a:xfrm>
+          <a:prstGeom prst="rect">
+            <a:avLst/>
+          </a:prstGeom>
+          <a:noFill/>
+        </p:spPr>
+        <p:txBody>
+          <a:bodyPr wrap="square">
+            <a:spAutoFit/>
+          </a:bodyPr>
+          <a:lstStyle/>
+          <a:p>
+            <a:pPr algn="l"/>
+            <a:r>
+              <a:rPr sz="3200" b="1">
+                <a:solidFill>
+                  <a:srgbClr val="FFFFFF"/>
+                </a:solidFill>
+                <a:latin typeface="Arial"/>
+              </a:rPr>
+              <a:t>PARA QUEM É</a:t>
+            </a:r>
+          </a:p>
+        </p:txBody>
+      </p:sp>
+      <p:sp>
+        <p:nvSpPr>
+          <p:cNvPr id="6" name="TextBox 5"/>
+          <p:cNvSpPr txBox="1"/>
+          <p:nvPr/>
+        </p:nvSpPr>
+        <p:spPr>
+          <a:xfrm>
+            <a:off x="640080" y="914400"/>
+            <a:ext cx="9144000" cy="365760"/>
+          </a:xfrm>
+          <a:prstGeom prst="rect">
+            <a:avLst/>
+          </a:prstGeom>
+          <a:noFill/>
+        </p:spPr>
+        <p:txBody>
+          <a:bodyPr wrap="square">
+            <a:spAutoFit/>
+          </a:bodyPr>
+          <a:lstStyle/>
+          <a:p>
+            <a:pPr algn="l"/>
+            <a:r>
+              <a:rPr sz="1400" b="0">
+                <a:solidFill>
+                  <a:srgbClr val="C2C2C2"/>
+                </a:solidFill>
+                <a:latin typeface="Arial"/>
+              </a:rPr>
+              <a:t>O perfil do cliente ideal do Empresa que Vende</a:t>
+            </a:r>
+          </a:p>
+        </p:txBody>
+      </p:sp>
+      <p:sp>
+        <p:nvSpPr>
+          <p:cNvPr id="7" name="Rounded Rectangle 6"/>
+          <p:cNvSpPr/>
+          <p:nvPr/>
+        </p:nvSpPr>
+        <p:spPr>
+          <a:xfrm>
+            <a:off x="457200" y="1828800"/>
+            <a:ext cx="2103120" cy="3200400"/>
+          </a:xfrm>
+          <a:prstGeom prst="roundRect">
+            <a:avLst/>
+          </a:prstGeom>
+          <a:solidFill>
+            <a:srgbClr val="1F1F1F"/>
+          </a:solidFill>
+          <a:ln>
+            <a:solidFill>
+              <a:srgbClr val="4A1010"/>
+            </a:solidFill>
+          </a:ln>
+        </p:spPr>
+        <p:style>
+          <a:lnRef idx="1">
+            <a:schemeClr val="accent1"/>
+          </a:lnRef>
+          <a:fillRef idx="3">
+            <a:schemeClr val="accent1"/>
+          </a:fillRef>
+          <a:effectRef idx="2">
+            <a:schemeClr val="accent1"/>
+          </a:effectRef>
+          <a:fontRef idx="minor">
+            <a:schemeClr val="lt1"/>
+          </a:fontRef>
+        </p:style>
+        <p:txBody>
+          <a:bodyPr rtlCol="0" anchor="ctr"/>
+          <a:lstStyle/>
+          <a:p>
+            <a:pPr algn="ctr"/>
+          </a:p>
+        </p:txBody>
+      </p:sp>
+      <p:sp>
+        <p:nvSpPr>
+          <p:cNvPr id="8" name="TextBox 7"/>
+          <p:cNvSpPr txBox="1"/>
+          <p:nvPr/>
+        </p:nvSpPr>
+        <p:spPr>
+          <a:xfrm>
+            <a:off x="594360" y="2011680"/>
+            <a:ext cx="1828800" cy="274320"/>
+          </a:xfrm>
+          <a:prstGeom prst="rect">
+            <a:avLst/>
+          </a:prstGeom>
+          <a:noFill/>
+        </p:spPr>
+        <p:txBody>
+          <a:bodyPr wrap="square">
+            <a:spAutoFit/>
+          </a:bodyPr>
+          <a:lstStyle/>
+          <a:p>
+            <a:pPr algn="l"/>
+            <a:r>
+              <a:rPr sz="1100" b="1">
+                <a:solidFill>
+                  <a:srgbClr val="CC0000"/>
+                </a:solidFill>
+                <a:latin typeface="Arial"/>
+              </a:rPr>
+              <a:t>PORTE</a:t>
+            </a:r>
+          </a:p>
+        </p:txBody>
+      </p:sp>
+      <p:sp>
+        <p:nvSpPr>
+          <p:cNvPr id="9" name="TextBox 8"/>
+          <p:cNvSpPr txBox="1"/>
+          <p:nvPr/>
+        </p:nvSpPr>
+        <p:spPr>
+          <a:xfrm>
+            <a:off x="594360" y="2468880"/>
+            <a:ext cx="1828800" cy="2011680"/>
+          </a:xfrm>
+          <a:prstGeom prst="rect">
+            <a:avLst/>
+          </a:prstGeom>
+          <a:noFill/>
+        </p:spPr>
+        <p:txBody>
+          <a:bodyPr wrap="square">
+            <a:spAutoFit/>
+          </a:bodyPr>
+          <a:lstStyle/>
+          <a:p>
+            <a:pPr algn="l"/>
+            <a:r>
+              <a:rPr sz="1600" b="1">
+                <a:solidFill>
+                  <a:srgbClr val="FFFFFF"/>
+                </a:solidFill>
+                <a:latin typeface="Arial"/>
+              </a:rPr>
+              <a:t>Tiny e Small
+até 50 funcionários</a:t>
+            </a:r>
+          </a:p>
+        </p:txBody>
+      </p:sp>
+      <p:sp>
+        <p:nvSpPr>
+          <p:cNvPr id="10" name="Rounded Rectangle 9"/>
+          <p:cNvSpPr/>
+          <p:nvPr/>
+        </p:nvSpPr>
+        <p:spPr>
+          <a:xfrm>
+            <a:off x="2743200" y="1828800"/>
+            <a:ext cx="2103120" cy="3200400"/>
+          </a:xfrm>
+          <a:prstGeom prst="roundRect">
+            <a:avLst/>
+          </a:prstGeom>
+          <a:solidFill>
+            <a:srgbClr val="1F1F1F"/>
+          </a:solidFill>
+          <a:ln>
+            <a:solidFill>
+              <a:srgbClr val="4A1010"/>
+            </a:solidFill>
+          </a:ln>
+        </p:spPr>
+        <p:style>
+          <a:lnRef idx="1">
+            <a:schemeClr val="accent1"/>
+          </a:lnRef>
+          <a:fillRef idx="3">
+            <a:schemeClr val="accent1"/>
+          </a:fillRef>
+          <a:effectRef idx="2">
+            <a:schemeClr val="accent1"/>
+          </a:effectRef>
+          <a:fontRef idx="minor">
+            <a:schemeClr val="lt1"/>
+          </a:fontRef>
+        </p:style>
+        <p:txBody>
+          <a:bodyPr rtlCol="0" anchor="ctr"/>
+          <a:lstStyle/>
+          <a:p>
+            <a:pPr algn="ctr"/>
+          </a:p>
+        </p:txBody>
+      </p:sp>
+      <p:sp>
+        <p:nvSpPr>
+          <p:cNvPr id="11" name="TextBox 10"/>
+          <p:cNvSpPr txBox="1"/>
+          <p:nvPr/>
+        </p:nvSpPr>
+        <p:spPr>
+          <a:xfrm>
+            <a:off x="2880360" y="2011680"/>
+            <a:ext cx="1828800" cy="274320"/>
+          </a:xfrm>
+          <a:prstGeom prst="rect">
+            <a:avLst/>
+          </a:prstGeom>
+          <a:noFill/>
+        </p:spPr>
+        <p:txBody>
+          <a:bodyPr wrap="square">
+            <a:spAutoFit/>
+          </a:bodyPr>
+          <a:lstStyle/>
+          <a:p>
+            <a:pPr algn="l"/>
+            <a:r>
+              <a:rPr sz="1100" b="1">
+                <a:solidFill>
+                  <a:srgbClr val="CC0000"/>
+                </a:solidFill>
+                <a:latin typeface="Arial"/>
+              </a:rPr>
+              <a:t>FATURAMENTO</a:t>
+            </a:r>
+          </a:p>
+        </p:txBody>
+      </p:sp>
+      <p:sp>
+        <p:nvSpPr>
+          <p:cNvPr id="12" name="TextBox 11"/>
+          <p:cNvSpPr txBox="1"/>
+          <p:nvPr/>
+        </p:nvSpPr>
+        <p:spPr>
+          <a:xfrm>
+            <a:off x="2880360" y="2468880"/>
+            <a:ext cx="1828800" cy="2011680"/>
+          </a:xfrm>
+          <a:prstGeom prst="rect">
+            <a:avLst/>
+          </a:prstGeom>
+          <a:noFill/>
+        </p:spPr>
+        <p:txBody>
+          <a:bodyPr wrap="square">
+            <a:spAutoFit/>
+          </a:bodyPr>
+          <a:lstStyle/>
+          <a:p>
+            <a:pPr algn="l"/>
+            <a:r>
+              <a:rPr sz="1600" b="1">
+                <a:solidFill>
+                  <a:srgbClr val="FFFFFF"/>
+                </a:solidFill>
+                <a:latin typeface="Arial"/>
+              </a:rPr>
+              <a:t>R$ 600K – R$ 2,4M
+anuais</a:t>
+            </a:r>
+          </a:p>
+        </p:txBody>
+      </p:sp>
+      <p:sp>
+        <p:nvSpPr>
+          <p:cNvPr id="13" name="Rounded Rectangle 12"/>
+          <p:cNvSpPr/>
+          <p:nvPr/>
+        </p:nvSpPr>
+        <p:spPr>
+          <a:xfrm>
+            <a:off x="5029200" y="1828800"/>
+            <a:ext cx="2103120" cy="3200400"/>
+          </a:xfrm>
+          <a:prstGeom prst="roundRect">
+            <a:avLst/>
+          </a:prstGeom>
+          <a:solidFill>
+            <a:srgbClr val="1F1F1F"/>
+          </a:solidFill>
+          <a:ln>
+            <a:solidFill>
+              <a:srgbClr val="4A1010"/>
+            </a:solidFill>
+          </a:ln>
+        </p:spPr>
+        <p:style>
+          <a:lnRef idx="1">
+            <a:schemeClr val="accent1"/>
+          </a:lnRef>
+          <a:fillRef idx="3">
+            <a:schemeClr val="accent1"/>
+          </a:fillRef>
+          <a:effectRef idx="2">
+            <a:schemeClr val="accent1"/>
+          </a:effectRef>
+          <a:fontRef idx="minor">
+            <a:schemeClr val="lt1"/>
+          </a:fontRef>
+        </p:style>
+        <p:txBody>
+          <a:bodyPr rtlCol="0" anchor="ctr"/>
+          <a:lstStyle/>
+          <a:p>
+            <a:pPr algn="ctr"/>
+          </a:p>
+        </p:txBody>
+      </p:sp>
+      <p:sp>
+        <p:nvSpPr>
+          <p:cNvPr id="14" name="TextBox 13"/>
+          <p:cNvSpPr txBox="1"/>
+          <p:nvPr/>
+        </p:nvSpPr>
+        <p:spPr>
+          <a:xfrm>
+            <a:off x="5166360" y="2011680"/>
+            <a:ext cx="1828800" cy="274320"/>
+          </a:xfrm>
+          <a:prstGeom prst="rect">
+            <a:avLst/>
+          </a:prstGeom>
+          <a:noFill/>
+        </p:spPr>
+        <p:txBody>
+          <a:bodyPr wrap="square">
+            <a:spAutoFit/>
+          </a:bodyPr>
+          <a:lstStyle/>
+          <a:p>
+            <a:pPr algn="l"/>
+            <a:r>
+              <a:rPr sz="1100" b="1">
+                <a:solidFill>
+                  <a:srgbClr val="CC0000"/>
+                </a:solidFill>
+                <a:latin typeface="Arial"/>
+              </a:rPr>
+              <a:t>MERCADO</a:t>
+            </a:r>
+          </a:p>
+        </p:txBody>
+      </p:sp>
+      <p:sp>
+        <p:nvSpPr>
+          <p:cNvPr id="15" name="TextBox 14"/>
+          <p:cNvSpPr txBox="1"/>
+          <p:nvPr/>
+        </p:nvSpPr>
+        <p:spPr>
+          <a:xfrm>
+            <a:off x="5166360" y="2468880"/>
+            <a:ext cx="1828800" cy="2011680"/>
+          </a:xfrm>
+          <a:prstGeom prst="rect">
+            <a:avLst/>
+          </a:prstGeom>
+          <a:noFill/>
+        </p:spPr>
+        <p:txBody>
+          <a:bodyPr wrap="square">
+            <a:spAutoFit/>
+          </a:bodyPr>
+          <a:lstStyle/>
+          <a:p>
+            <a:pPr algn="l"/>
+            <a:r>
+              <a:rPr sz="1600" b="1">
+                <a:solidFill>
+                  <a:srgbClr val="FFFFFF"/>
+                </a:solidFill>
+                <a:latin typeface="Arial"/>
+              </a:rPr>
+              <a:t>B2C · academias
+/ fitness</a:t>
+            </a:r>
+          </a:p>
+        </p:txBody>
+      </p:sp>
+      <p:sp>
+        <p:nvSpPr>
+          <p:cNvPr id="16" name="Rounded Rectangle 15"/>
+          <p:cNvSpPr/>
+          <p:nvPr/>
+        </p:nvSpPr>
+        <p:spPr>
+          <a:xfrm>
+            <a:off x="7315200" y="1828800"/>
+            <a:ext cx="2103120" cy="3200400"/>
+          </a:xfrm>
+          <a:prstGeom prst="roundRect">
+            <a:avLst/>
+          </a:prstGeom>
+          <a:solidFill>
+            <a:srgbClr val="1F1F1F"/>
+          </a:solidFill>
+          <a:ln>
+            <a:solidFill>
+              <a:srgbClr val="4A1010"/>
+            </a:solidFill>
+          </a:ln>
+        </p:spPr>
+        <p:style>
+          <a:lnRef idx="1">
+            <a:schemeClr val="accent1"/>
+          </a:lnRef>
+          <a:fillRef idx="3">
+            <a:schemeClr val="accent1"/>
+          </a:fillRef>
+          <a:effectRef idx="2">
+            <a:schemeClr val="accent1"/>
+          </a:effectRef>
+          <a:fontRef idx="minor">
+            <a:schemeClr val="lt1"/>
+          </a:fontRef>
+        </p:style>
+        <p:txBody>
+          <a:bodyPr rtlCol="0" anchor="ctr"/>
+          <a:lstStyle/>
+          <a:p>
+            <a:pPr algn="ctr"/>
+          </a:p>
+        </p:txBody>
+      </p:sp>
+      <p:sp>
+        <p:nvSpPr>
+          <p:cNvPr id="17" name="TextBox 16"/>
+          <p:cNvSpPr txBox="1"/>
+          <p:nvPr/>
+        </p:nvSpPr>
+        <p:spPr>
+          <a:xfrm>
+            <a:off x="7452360" y="2011680"/>
+            <a:ext cx="1828800" cy="274320"/>
+          </a:xfrm>
+          <a:prstGeom prst="rect">
+            <a:avLst/>
+          </a:prstGeom>
+          <a:noFill/>
+        </p:spPr>
+        <p:txBody>
+          <a:bodyPr wrap="square">
+            <a:spAutoFit/>
+          </a:bodyPr>
+          <a:lstStyle/>
+          <a:p>
+            <a:pPr algn="l"/>
+            <a:r>
+              <a:rPr sz="1100" b="1">
+                <a:solidFill>
+                  <a:srgbClr val="CC0000"/>
+                </a:solidFill>
+                <a:latin typeface="Arial"/>
+              </a:rPr>
+              <a:t>CANAL</a:t>
+            </a:r>
+          </a:p>
+        </p:txBody>
+      </p:sp>
+      <p:sp>
+        <p:nvSpPr>
+          <p:cNvPr id="18" name="TextBox 17"/>
+          <p:cNvSpPr txBox="1"/>
+          <p:nvPr/>
+        </p:nvSpPr>
+        <p:spPr>
+          <a:xfrm>
+            <a:off x="7452360" y="2468880"/>
+            <a:ext cx="1828800" cy="2011680"/>
+          </a:xfrm>
+          <a:prstGeom prst="rect">
+            <a:avLst/>
+          </a:prstGeom>
+          <a:noFill/>
+        </p:spPr>
+        <p:txBody>
+          <a:bodyPr wrap="square">
+            <a:spAutoFit/>
+          </a:bodyPr>
+          <a:lstStyle/>
+          <a:p>
+            <a:pPr algn="l"/>
+            <a:r>
+              <a:rPr sz="1600" b="1">
+                <a:solidFill>
+                  <a:srgbClr val="FFFFFF"/>
+                </a:solidFill>
+                <a:latin typeface="Arial"/>
+              </a:rPr>
+              <a:t>PDV · Inside Sales
+WhatsApp · Meta Ads</a:t>
+            </a:r>
+          </a:p>
+        </p:txBody>
+      </p:sp>
+      <p:sp>
+        <p:nvSpPr>
+          <p:cNvPr id="19" name="Rounded Rectangle 18"/>
+          <p:cNvSpPr/>
+          <p:nvPr/>
+        </p:nvSpPr>
+        <p:spPr>
+          <a:xfrm>
+            <a:off x="9601200" y="1828800"/>
+            <a:ext cx="2103120" cy="3200400"/>
+          </a:xfrm>
+          <a:prstGeom prst="roundRect">
+            <a:avLst/>
+          </a:prstGeom>
+          <a:solidFill>
+            <a:srgbClr val="1F1F1F"/>
+          </a:solidFill>
+          <a:ln>
+            <a:solidFill>
+              <a:srgbClr val="4A1010"/>
+            </a:solidFill>
+          </a:ln>
+        </p:spPr>
+        <p:style>
+          <a:lnRef idx="1">
+            <a:schemeClr val="accent1"/>
+          </a:lnRef>
+          <a:fillRef idx="3">
+            <a:schemeClr val="accent1"/>
+          </a:fillRef>
+          <a:effectRef idx="2">
+            <a:schemeClr val="accent1"/>
+          </a:effectRef>
+          <a:fontRef idx="minor">
+            <a:schemeClr val="lt1"/>
+          </a:fontRef>
+        </p:style>
+        <p:txBody>
+          <a:bodyPr rtlCol="0" anchor="ctr"/>
+          <a:lstStyle/>
+          <a:p>
+            <a:pPr algn="ctr"/>
+          </a:p>
+        </p:txBody>
+      </p:sp>
+      <p:sp>
+        <p:nvSpPr>
+          <p:cNvPr id="20" name="TextBox 19"/>
+          <p:cNvSpPr txBox="1"/>
+          <p:nvPr/>
+        </p:nvSpPr>
+        <p:spPr>
+          <a:xfrm>
+            <a:off x="9738360" y="2011680"/>
+            <a:ext cx="1828800" cy="274320"/>
+          </a:xfrm>
+          <a:prstGeom prst="rect">
+            <a:avLst/>
+          </a:prstGeom>
+          <a:noFill/>
+        </p:spPr>
+        <p:txBody>
+          <a:bodyPr wrap="square">
+            <a:spAutoFit/>
+          </a:bodyPr>
+          <a:lstStyle/>
+          <a:p>
+            <a:pPr algn="l"/>
+            <a:r>
+              <a:rPr sz="1100" b="1">
+                <a:solidFill>
+                  <a:srgbClr val="CC0000"/>
+                </a:solidFill>
+                <a:latin typeface="Arial"/>
+              </a:rPr>
+              <a:t>MATURIDADE</a:t>
+            </a:r>
+          </a:p>
+        </p:txBody>
+      </p:sp>
+      <p:sp>
+        <p:nvSpPr>
+          <p:cNvPr id="21" name="TextBox 20"/>
+          <p:cNvSpPr txBox="1"/>
+          <p:nvPr/>
+        </p:nvSpPr>
+        <p:spPr>
+          <a:xfrm>
+            <a:off x="9738360" y="2468880"/>
+            <a:ext cx="1828800" cy="2011680"/>
+          </a:xfrm>
+          <a:prstGeom prst="rect">
+            <a:avLst/>
+          </a:prstGeom>
+          <a:noFill/>
+        </p:spPr>
+        <p:txBody>
+          <a:bodyPr wrap="square">
+            <a:spAutoFit/>
+          </a:bodyPr>
+          <a:lstStyle/>
+          <a:p>
+            <a:pPr algn="l"/>
+            <a:r>
+              <a:rPr sz="1600" b="1">
+                <a:solidFill>
+                  <a:srgbClr val="FFFFFF"/>
+                </a:solidFill>
+                <a:latin typeface="Arial"/>
+              </a:rPr>
+              <a:t>Baixo a médio
+N1 ou N2 no diagnóstico V4</a:t>
+            </a:r>
+          </a:p>
+        </p:txBody>
+      </p:sp>
     </p:spTree>
   </p:cSld>
   <p:clrMapOvr>
@@ -3308,30 +5771,690 @@
         <p:nvPr/>
       </p:nvGrpSpPr>
       <p:grpSpPr/>
-      <p:pic>
-        <p:nvPicPr>
-          <p:cNvPr id="2" name="Picture 1" descr="slide_04.png"/>
-          <p:cNvPicPr>
-            <a:picLocks noChangeAspect="1"/>
-          </p:cNvPicPr>
-          <p:nvPr/>
-        </p:nvPicPr>
-        <p:blipFill>
-          <a:blip r:embed="rId2"/>
-          <a:stretch>
-            <a:fillRect/>
-          </a:stretch>
-        </p:blipFill>
+      <p:sp>
+        <p:nvSpPr>
+          <p:cNvPr id="2" name="Rectangle 1"/>
+          <p:cNvSpPr/>
+          <p:nvPr/>
+        </p:nvSpPr>
         <p:spPr>
           <a:xfrm>
             <a:off x="0" y="0"/>
-            <a:ext cx="6858000" cy="3857625"/>
-          </a:xfrm>
-          <a:prstGeom prst="rect">
-            <a:avLst/>
-          </a:prstGeom>
-        </p:spPr>
-      </p:pic>
+            <a:ext cx="12191695" cy="6858000"/>
+          </a:xfrm>
+          <a:prstGeom prst="rect">
+            <a:avLst/>
+          </a:prstGeom>
+          <a:solidFill>
+            <a:srgbClr val="0D0D0D"/>
+          </a:solidFill>
+          <a:ln>
+            <a:noFill/>
+          </a:ln>
+        </p:spPr>
+        <p:style>
+          <a:lnRef idx="1">
+            <a:schemeClr val="accent1"/>
+          </a:lnRef>
+          <a:fillRef idx="3">
+            <a:schemeClr val="accent1"/>
+          </a:fillRef>
+          <a:effectRef idx="2">
+            <a:schemeClr val="accent1"/>
+          </a:effectRef>
+          <a:fontRef idx="minor">
+            <a:schemeClr val="lt1"/>
+          </a:fontRef>
+        </p:style>
+        <p:txBody>
+          <a:bodyPr rtlCol="0" anchor="ctr"/>
+          <a:lstStyle/>
+          <a:p>
+            <a:pPr algn="ctr"/>
+          </a:p>
+        </p:txBody>
+      </p:sp>
+      <p:sp>
+        <p:nvSpPr>
+          <p:cNvPr id="3" name="Oval 2"/>
+          <p:cNvSpPr/>
+          <p:nvPr/>
+        </p:nvSpPr>
+        <p:spPr>
+          <a:xfrm>
+            <a:off x="-1828800" y="-1371600"/>
+            <a:ext cx="4572000" cy="4572000"/>
+          </a:xfrm>
+          <a:prstGeom prst="ellipse">
+            <a:avLst/>
+          </a:prstGeom>
+          <a:solidFill>
+            <a:srgbClr val="3C0909"/>
+          </a:solidFill>
+          <a:ln>
+            <a:noFill/>
+          </a:ln>
+        </p:spPr>
+        <p:style>
+          <a:lnRef idx="1">
+            <a:schemeClr val="accent1"/>
+          </a:lnRef>
+          <a:fillRef idx="3">
+            <a:schemeClr val="accent1"/>
+          </a:fillRef>
+          <a:effectRef idx="2">
+            <a:schemeClr val="accent1"/>
+          </a:effectRef>
+          <a:fontRef idx="minor">
+            <a:schemeClr val="lt1"/>
+          </a:fontRef>
+        </p:style>
+        <p:txBody>
+          <a:bodyPr rtlCol="0" anchor="ctr"/>
+          <a:lstStyle/>
+          <a:p>
+            <a:pPr algn="ctr"/>
+          </a:p>
+        </p:txBody>
+      </p:sp>
+      <p:sp>
+        <p:nvSpPr>
+          <p:cNvPr id="4" name="Oval 3"/>
+          <p:cNvSpPr/>
+          <p:nvPr/>
+        </p:nvSpPr>
+        <p:spPr>
+          <a:xfrm>
+            <a:off x="9144000" y="3657600"/>
+            <a:ext cx="4114800" cy="4114800"/>
+          </a:xfrm>
+          <a:prstGeom prst="ellipse">
+            <a:avLst/>
+          </a:prstGeom>
+          <a:solidFill>
+            <a:srgbClr val="3C0909"/>
+          </a:solidFill>
+          <a:ln>
+            <a:noFill/>
+          </a:ln>
+        </p:spPr>
+        <p:style>
+          <a:lnRef idx="1">
+            <a:schemeClr val="accent1"/>
+          </a:lnRef>
+          <a:fillRef idx="3">
+            <a:schemeClr val="accent1"/>
+          </a:fillRef>
+          <a:effectRef idx="2">
+            <a:schemeClr val="accent1"/>
+          </a:effectRef>
+          <a:fontRef idx="minor">
+            <a:schemeClr val="lt1"/>
+          </a:fontRef>
+        </p:style>
+        <p:txBody>
+          <a:bodyPr rtlCol="0" anchor="ctr"/>
+          <a:lstStyle/>
+          <a:p>
+            <a:pPr algn="ctr"/>
+          </a:p>
+        </p:txBody>
+      </p:sp>
+      <p:sp>
+        <p:nvSpPr>
+          <p:cNvPr id="5" name="TextBox 4"/>
+          <p:cNvSpPr txBox="1"/>
+          <p:nvPr/>
+        </p:nvSpPr>
+        <p:spPr>
+          <a:xfrm>
+            <a:off x="640080" y="365760"/>
+            <a:ext cx="10972800" cy="457200"/>
+          </a:xfrm>
+          <a:prstGeom prst="rect">
+            <a:avLst/>
+          </a:prstGeom>
+          <a:noFill/>
+        </p:spPr>
+        <p:txBody>
+          <a:bodyPr wrap="square">
+            <a:spAutoFit/>
+          </a:bodyPr>
+          <a:lstStyle/>
+          <a:p>
+            <a:pPr algn="l"/>
+            <a:r>
+              <a:rPr sz="2800" b="1">
+                <a:solidFill>
+                  <a:srgbClr val="FFFFFF"/>
+                </a:solidFill>
+                <a:latin typeface="Arial"/>
+              </a:rPr>
+              <a:t>O QUE ESTÁ ERRADO</a:t>
+            </a:r>
+          </a:p>
+        </p:txBody>
+      </p:sp>
+      <p:sp>
+        <p:nvSpPr>
+          <p:cNvPr id="6" name="TextBox 5"/>
+          <p:cNvSpPr txBox="1"/>
+          <p:nvPr/>
+        </p:nvSpPr>
+        <p:spPr>
+          <a:xfrm>
+            <a:off x="640080" y="914400"/>
+            <a:ext cx="10972800" cy="365760"/>
+          </a:xfrm>
+          <a:prstGeom prst="rect">
+            <a:avLst/>
+          </a:prstGeom>
+          <a:noFill/>
+        </p:spPr>
+        <p:txBody>
+          <a:bodyPr wrap="square">
+            <a:spAutoFit/>
+          </a:bodyPr>
+          <a:lstStyle/>
+          <a:p>
+            <a:pPr algn="l"/>
+            <a:r>
+              <a:rPr sz="1400" b="0">
+                <a:solidFill>
+                  <a:srgbClr val="C2C2C2"/>
+                </a:solidFill>
+                <a:latin typeface="Arial"/>
+              </a:rPr>
+              <a:t>Por que as soluções tradicionais não resolvem o problema real</a:t>
+            </a:r>
+          </a:p>
+        </p:txBody>
+      </p:sp>
+      <p:sp>
+        <p:nvSpPr>
+          <p:cNvPr id="7" name="Rounded Rectangle 6"/>
+          <p:cNvSpPr/>
+          <p:nvPr/>
+        </p:nvSpPr>
+        <p:spPr>
+          <a:xfrm>
+            <a:off x="457200" y="1554480"/>
+            <a:ext cx="3566160" cy="3657600"/>
+          </a:xfrm>
+          <a:prstGeom prst="roundRect">
+            <a:avLst/>
+          </a:prstGeom>
+          <a:solidFill>
+            <a:srgbClr val="1F1F1F"/>
+          </a:solidFill>
+          <a:ln>
+            <a:solidFill>
+              <a:srgbClr val="4A1010"/>
+            </a:solidFill>
+          </a:ln>
+        </p:spPr>
+        <p:style>
+          <a:lnRef idx="1">
+            <a:schemeClr val="accent1"/>
+          </a:lnRef>
+          <a:fillRef idx="3">
+            <a:schemeClr val="accent1"/>
+          </a:fillRef>
+          <a:effectRef idx="2">
+            <a:schemeClr val="accent1"/>
+          </a:effectRef>
+          <a:fontRef idx="minor">
+            <a:schemeClr val="lt1"/>
+          </a:fontRef>
+        </p:style>
+        <p:txBody>
+          <a:bodyPr rtlCol="0" anchor="ctr"/>
+          <a:lstStyle/>
+          <a:p>
+            <a:pPr algn="ctr"/>
+          </a:p>
+        </p:txBody>
+      </p:sp>
+      <p:sp>
+        <p:nvSpPr>
+          <p:cNvPr id="8" name="TextBox 7"/>
+          <p:cNvSpPr txBox="1"/>
+          <p:nvPr/>
+        </p:nvSpPr>
+        <p:spPr>
+          <a:xfrm>
+            <a:off x="685800" y="1737360"/>
+            <a:ext cx="3108960" cy="274320"/>
+          </a:xfrm>
+          <a:prstGeom prst="rect">
+            <a:avLst/>
+          </a:prstGeom>
+          <a:noFill/>
+        </p:spPr>
+        <p:txBody>
+          <a:bodyPr wrap="square">
+            <a:spAutoFit/>
+          </a:bodyPr>
+          <a:lstStyle/>
+          <a:p>
+            <a:pPr algn="l"/>
+            <a:r>
+              <a:rPr sz="1200" b="1">
+                <a:solidFill>
+                  <a:srgbClr val="CC0000"/>
+                </a:solidFill>
+                <a:latin typeface="Arial"/>
+              </a:rPr>
+              <a:t>AGÊNCIA</a:t>
+            </a:r>
+          </a:p>
+        </p:txBody>
+      </p:sp>
+      <p:sp>
+        <p:nvSpPr>
+          <p:cNvPr id="9" name="TextBox 8"/>
+          <p:cNvSpPr txBox="1"/>
+          <p:nvPr/>
+        </p:nvSpPr>
+        <p:spPr>
+          <a:xfrm>
+            <a:off x="685800" y="2194560"/>
+            <a:ext cx="3108960" cy="457200"/>
+          </a:xfrm>
+          <a:prstGeom prst="rect">
+            <a:avLst/>
+          </a:prstGeom>
+          <a:noFill/>
+        </p:spPr>
+        <p:txBody>
+          <a:bodyPr wrap="square">
+            <a:spAutoFit/>
+          </a:bodyPr>
+          <a:lstStyle/>
+          <a:p>
+            <a:pPr algn="l"/>
+            <a:r>
+              <a:rPr sz="2000" b="1">
+                <a:solidFill>
+                  <a:srgbClr val="FFFFFF"/>
+                </a:solidFill>
+                <a:latin typeface="Arial"/>
+              </a:rPr>
+              <a:t>Executa por você.</a:t>
+            </a:r>
+          </a:p>
+        </p:txBody>
+      </p:sp>
+      <p:sp>
+        <p:nvSpPr>
+          <p:cNvPr id="10" name="TextBox 9"/>
+          <p:cNvSpPr txBox="1"/>
+          <p:nvPr/>
+        </p:nvSpPr>
+        <p:spPr>
+          <a:xfrm>
+            <a:off x="685800" y="2926080"/>
+            <a:ext cx="3108960" cy="1828800"/>
+          </a:xfrm>
+          <a:prstGeom prst="rect">
+            <a:avLst/>
+          </a:prstGeom>
+          <a:noFill/>
+        </p:spPr>
+        <p:txBody>
+          <a:bodyPr wrap="square">
+            <a:spAutoFit/>
+          </a:bodyPr>
+          <a:lstStyle/>
+          <a:p>
+            <a:pPr algn="l"/>
+            <a:r>
+              <a:rPr sz="1400" b="0">
+                <a:solidFill>
+                  <a:srgbClr val="C2C2C2"/>
+                </a:solidFill>
+                <a:latin typeface="Arial"/>
+              </a:rPr>
+              <a:t>Quando o contrato termina, o resultado vai junto. Você nunca aprendeu a operar a máquina.</a:t>
+            </a:r>
+          </a:p>
+        </p:txBody>
+      </p:sp>
+      <p:sp>
+        <p:nvSpPr>
+          <p:cNvPr id="11" name="Rounded Rectangle 10"/>
+          <p:cNvSpPr/>
+          <p:nvPr/>
+        </p:nvSpPr>
+        <p:spPr>
+          <a:xfrm>
+            <a:off x="4297680" y="1554480"/>
+            <a:ext cx="3566160" cy="3657600"/>
+          </a:xfrm>
+          <a:prstGeom prst="roundRect">
+            <a:avLst/>
+          </a:prstGeom>
+          <a:solidFill>
+            <a:srgbClr val="1F1F1F"/>
+          </a:solidFill>
+          <a:ln>
+            <a:solidFill>
+              <a:srgbClr val="4A1010"/>
+            </a:solidFill>
+          </a:ln>
+        </p:spPr>
+        <p:style>
+          <a:lnRef idx="1">
+            <a:schemeClr val="accent1"/>
+          </a:lnRef>
+          <a:fillRef idx="3">
+            <a:schemeClr val="accent1"/>
+          </a:fillRef>
+          <a:effectRef idx="2">
+            <a:schemeClr val="accent1"/>
+          </a:effectRef>
+          <a:fontRef idx="minor">
+            <a:schemeClr val="lt1"/>
+          </a:fontRef>
+        </p:style>
+        <p:txBody>
+          <a:bodyPr rtlCol="0" anchor="ctr"/>
+          <a:lstStyle/>
+          <a:p>
+            <a:pPr algn="ctr"/>
+          </a:p>
+        </p:txBody>
+      </p:sp>
+      <p:sp>
+        <p:nvSpPr>
+          <p:cNvPr id="12" name="TextBox 11"/>
+          <p:cNvSpPr txBox="1"/>
+          <p:nvPr/>
+        </p:nvSpPr>
+        <p:spPr>
+          <a:xfrm>
+            <a:off x="4526280" y="1737360"/>
+            <a:ext cx="3108960" cy="274320"/>
+          </a:xfrm>
+          <a:prstGeom prst="rect">
+            <a:avLst/>
+          </a:prstGeom>
+          <a:noFill/>
+        </p:spPr>
+        <p:txBody>
+          <a:bodyPr wrap="square">
+            <a:spAutoFit/>
+          </a:bodyPr>
+          <a:lstStyle/>
+          <a:p>
+            <a:pPr algn="l"/>
+            <a:r>
+              <a:rPr sz="1200" b="1">
+                <a:solidFill>
+                  <a:srgbClr val="CC0000"/>
+                </a:solidFill>
+                <a:latin typeface="Arial"/>
+              </a:rPr>
+              <a:t>CURSO</a:t>
+            </a:r>
+          </a:p>
+        </p:txBody>
+      </p:sp>
+      <p:sp>
+        <p:nvSpPr>
+          <p:cNvPr id="13" name="TextBox 12"/>
+          <p:cNvSpPr txBox="1"/>
+          <p:nvPr/>
+        </p:nvSpPr>
+        <p:spPr>
+          <a:xfrm>
+            <a:off x="4526280" y="2194560"/>
+            <a:ext cx="3108960" cy="457200"/>
+          </a:xfrm>
+          <a:prstGeom prst="rect">
+            <a:avLst/>
+          </a:prstGeom>
+          <a:noFill/>
+        </p:spPr>
+        <p:txBody>
+          <a:bodyPr wrap="square">
+            <a:spAutoFit/>
+          </a:bodyPr>
+          <a:lstStyle/>
+          <a:p>
+            <a:pPr algn="l"/>
+            <a:r>
+              <a:rPr sz="2000" b="1">
+                <a:solidFill>
+                  <a:srgbClr val="FFFFFF"/>
+                </a:solidFill>
+                <a:latin typeface="Arial"/>
+              </a:rPr>
+              <a:t>Ensina teoria.</a:t>
+            </a:r>
+          </a:p>
+        </p:txBody>
+      </p:sp>
+      <p:sp>
+        <p:nvSpPr>
+          <p:cNvPr id="14" name="TextBox 13"/>
+          <p:cNvSpPr txBox="1"/>
+          <p:nvPr/>
+        </p:nvSpPr>
+        <p:spPr>
+          <a:xfrm>
+            <a:off x="4526280" y="2926080"/>
+            <a:ext cx="3108960" cy="1828800"/>
+          </a:xfrm>
+          <a:prstGeom prst="rect">
+            <a:avLst/>
+          </a:prstGeom>
+          <a:noFill/>
+        </p:spPr>
+        <p:txBody>
+          <a:bodyPr wrap="square">
+            <a:spAutoFit/>
+          </a:bodyPr>
+          <a:lstStyle/>
+          <a:p>
+            <a:pPr algn="l"/>
+            <a:r>
+              <a:rPr sz="1400" b="0">
+                <a:solidFill>
+                  <a:srgbClr val="C2C2C2"/>
+                </a:solidFill>
+                <a:latin typeface="Arial"/>
+              </a:rPr>
+              <a:t>Sem aplicação no seu negócio real. O playbook fica na gaveta e nada muda na prática.</a:t>
+            </a:r>
+          </a:p>
+        </p:txBody>
+      </p:sp>
+      <p:sp>
+        <p:nvSpPr>
+          <p:cNvPr id="15" name="Rounded Rectangle 14"/>
+          <p:cNvSpPr/>
+          <p:nvPr/>
+        </p:nvSpPr>
+        <p:spPr>
+          <a:xfrm>
+            <a:off x="8138160" y="1554480"/>
+            <a:ext cx="3566160" cy="3657600"/>
+          </a:xfrm>
+          <a:prstGeom prst="roundRect">
+            <a:avLst/>
+          </a:prstGeom>
+          <a:solidFill>
+            <a:srgbClr val="1F1F1F"/>
+          </a:solidFill>
+          <a:ln>
+            <a:solidFill>
+              <a:srgbClr val="4A1010"/>
+            </a:solidFill>
+          </a:ln>
+        </p:spPr>
+        <p:style>
+          <a:lnRef idx="1">
+            <a:schemeClr val="accent1"/>
+          </a:lnRef>
+          <a:fillRef idx="3">
+            <a:schemeClr val="accent1"/>
+          </a:fillRef>
+          <a:effectRef idx="2">
+            <a:schemeClr val="accent1"/>
+          </a:effectRef>
+          <a:fontRef idx="minor">
+            <a:schemeClr val="lt1"/>
+          </a:fontRef>
+        </p:style>
+        <p:txBody>
+          <a:bodyPr rtlCol="0" anchor="ctr"/>
+          <a:lstStyle/>
+          <a:p>
+            <a:pPr algn="ctr"/>
+          </a:p>
+        </p:txBody>
+      </p:sp>
+      <p:sp>
+        <p:nvSpPr>
+          <p:cNvPr id="16" name="TextBox 15"/>
+          <p:cNvSpPr txBox="1"/>
+          <p:nvPr/>
+        </p:nvSpPr>
+        <p:spPr>
+          <a:xfrm>
+            <a:off x="8366760" y="1737360"/>
+            <a:ext cx="3108960" cy="274320"/>
+          </a:xfrm>
+          <a:prstGeom prst="rect">
+            <a:avLst/>
+          </a:prstGeom>
+          <a:noFill/>
+        </p:spPr>
+        <p:txBody>
+          <a:bodyPr wrap="square">
+            <a:spAutoFit/>
+          </a:bodyPr>
+          <a:lstStyle/>
+          <a:p>
+            <a:pPr algn="l"/>
+            <a:r>
+              <a:rPr sz="1200" b="1">
+                <a:solidFill>
+                  <a:srgbClr val="CC0000"/>
+                </a:solidFill>
+                <a:latin typeface="Arial"/>
+              </a:rPr>
+              <a:t>CONSULTORIA</a:t>
+            </a:r>
+          </a:p>
+        </p:txBody>
+      </p:sp>
+      <p:sp>
+        <p:nvSpPr>
+          <p:cNvPr id="17" name="TextBox 16"/>
+          <p:cNvSpPr txBox="1"/>
+          <p:nvPr/>
+        </p:nvSpPr>
+        <p:spPr>
+          <a:xfrm>
+            <a:off x="8366760" y="2194560"/>
+            <a:ext cx="3108960" cy="457200"/>
+          </a:xfrm>
+          <a:prstGeom prst="rect">
+            <a:avLst/>
+          </a:prstGeom>
+          <a:noFill/>
+        </p:spPr>
+        <p:txBody>
+          <a:bodyPr wrap="square">
+            <a:spAutoFit/>
+          </a:bodyPr>
+          <a:lstStyle/>
+          <a:p>
+            <a:pPr algn="l"/>
+            <a:r>
+              <a:rPr sz="2000" b="1">
+                <a:solidFill>
+                  <a:srgbClr val="FFFFFF"/>
+                </a:solidFill>
+                <a:latin typeface="Arial"/>
+              </a:rPr>
+              <a:t>Diagnostica.</a:t>
+            </a:r>
+          </a:p>
+        </p:txBody>
+      </p:sp>
+      <p:sp>
+        <p:nvSpPr>
+          <p:cNvPr id="18" name="TextBox 17"/>
+          <p:cNvSpPr txBox="1"/>
+          <p:nvPr/>
+        </p:nvSpPr>
+        <p:spPr>
+          <a:xfrm>
+            <a:off x="8366760" y="2926080"/>
+            <a:ext cx="3108960" cy="1828800"/>
+          </a:xfrm>
+          <a:prstGeom prst="rect">
+            <a:avLst/>
+          </a:prstGeom>
+          <a:noFill/>
+        </p:spPr>
+        <p:txBody>
+          <a:bodyPr wrap="square">
+            <a:spAutoFit/>
+          </a:bodyPr>
+          <a:lstStyle/>
+          <a:p>
+            <a:pPr algn="l"/>
+            <a:r>
+              <a:rPr sz="1400" b="0">
+                <a:solidFill>
+                  <a:srgbClr val="C2C2C2"/>
+                </a:solidFill>
+                <a:latin typeface="Arial"/>
+              </a:rPr>
+              <a:t>Entrega um relatório detalhado. Ninguém implementa. O problema continua exatamente onde estava.</a:t>
+            </a:r>
+          </a:p>
+        </p:txBody>
+      </p:sp>
+      <p:sp>
+        <p:nvSpPr>
+          <p:cNvPr id="19" name="TextBox 18"/>
+          <p:cNvSpPr txBox="1"/>
+          <p:nvPr/>
+        </p:nvSpPr>
+        <p:spPr>
+          <a:xfrm>
+            <a:off x="640080" y="5943600"/>
+            <a:ext cx="10972800" cy="365760"/>
+          </a:xfrm>
+          <a:prstGeom prst="rect">
+            <a:avLst/>
+          </a:prstGeom>
+          <a:noFill/>
+        </p:spPr>
+        <p:txBody>
+          <a:bodyPr wrap="square">
+            <a:spAutoFit/>
+          </a:bodyPr>
+          <a:lstStyle/>
+          <a:p>
+            <a:pPr algn="l"/>
+            <a:r>
+              <a:rPr sz="1400" b="1">
+                <a:solidFill>
+                  <a:srgbClr val="FFFFFF"/>
+                </a:solidFill>
+                <a:latin typeface="Arial"/>
+              </a:rPr>
+              <a:t>Resultado: o empresário continua sem máquina de vendas previsível.</a:t>
+            </a:r>
+          </a:p>
+        </p:txBody>
+      </p:sp>
     </p:spTree>
   </p:cSld>
   <p:clrMapOvr>
@@ -3350,30 +6473,485 @@
         <p:nvPr/>
       </p:nvGrpSpPr>
       <p:grpSpPr/>
-      <p:pic>
-        <p:nvPicPr>
-          <p:cNvPr id="2" name="Picture 1" descr="slide_05.png"/>
-          <p:cNvPicPr>
-            <a:picLocks noChangeAspect="1"/>
-          </p:cNvPicPr>
-          <p:nvPr/>
-        </p:nvPicPr>
-        <p:blipFill>
-          <a:blip r:embed="rId2"/>
-          <a:stretch>
-            <a:fillRect/>
-          </a:stretch>
-        </p:blipFill>
+      <p:sp>
+        <p:nvSpPr>
+          <p:cNvPr id="2" name="Rectangle 1"/>
+          <p:cNvSpPr/>
+          <p:nvPr/>
+        </p:nvSpPr>
         <p:spPr>
           <a:xfrm>
             <a:off x="0" y="0"/>
-            <a:ext cx="6858000" cy="3857625"/>
-          </a:xfrm>
-          <a:prstGeom prst="rect">
-            <a:avLst/>
-          </a:prstGeom>
-        </p:spPr>
-      </p:pic>
+            <a:ext cx="12191695" cy="6858000"/>
+          </a:xfrm>
+          <a:prstGeom prst="rect">
+            <a:avLst/>
+          </a:prstGeom>
+          <a:solidFill>
+            <a:srgbClr val="0D0D0D"/>
+          </a:solidFill>
+          <a:ln>
+            <a:noFill/>
+          </a:ln>
+        </p:spPr>
+        <p:style>
+          <a:lnRef idx="1">
+            <a:schemeClr val="accent1"/>
+          </a:lnRef>
+          <a:fillRef idx="3">
+            <a:schemeClr val="accent1"/>
+          </a:fillRef>
+          <a:effectRef idx="2">
+            <a:schemeClr val="accent1"/>
+          </a:effectRef>
+          <a:fontRef idx="minor">
+            <a:schemeClr val="lt1"/>
+          </a:fontRef>
+        </p:style>
+        <p:txBody>
+          <a:bodyPr rtlCol="0" anchor="ctr"/>
+          <a:lstStyle/>
+          <a:p>
+            <a:pPr algn="ctr"/>
+          </a:p>
+        </p:txBody>
+      </p:sp>
+      <p:sp>
+        <p:nvSpPr>
+          <p:cNvPr id="3" name="Oval 2"/>
+          <p:cNvSpPr/>
+          <p:nvPr/>
+        </p:nvSpPr>
+        <p:spPr>
+          <a:xfrm>
+            <a:off x="-1828800" y="-1371600"/>
+            <a:ext cx="4572000" cy="4572000"/>
+          </a:xfrm>
+          <a:prstGeom prst="ellipse">
+            <a:avLst/>
+          </a:prstGeom>
+          <a:solidFill>
+            <a:srgbClr val="3C0909"/>
+          </a:solidFill>
+          <a:ln>
+            <a:noFill/>
+          </a:ln>
+        </p:spPr>
+        <p:style>
+          <a:lnRef idx="1">
+            <a:schemeClr val="accent1"/>
+          </a:lnRef>
+          <a:fillRef idx="3">
+            <a:schemeClr val="accent1"/>
+          </a:fillRef>
+          <a:effectRef idx="2">
+            <a:schemeClr val="accent1"/>
+          </a:effectRef>
+          <a:fontRef idx="minor">
+            <a:schemeClr val="lt1"/>
+          </a:fontRef>
+        </p:style>
+        <p:txBody>
+          <a:bodyPr rtlCol="0" anchor="ctr"/>
+          <a:lstStyle/>
+          <a:p>
+            <a:pPr algn="ctr"/>
+          </a:p>
+        </p:txBody>
+      </p:sp>
+      <p:sp>
+        <p:nvSpPr>
+          <p:cNvPr id="4" name="Oval 3"/>
+          <p:cNvSpPr/>
+          <p:nvPr/>
+        </p:nvSpPr>
+        <p:spPr>
+          <a:xfrm>
+            <a:off x="9144000" y="3657600"/>
+            <a:ext cx="4114800" cy="4114800"/>
+          </a:xfrm>
+          <a:prstGeom prst="ellipse">
+            <a:avLst/>
+          </a:prstGeom>
+          <a:solidFill>
+            <a:srgbClr val="3C0909"/>
+          </a:solidFill>
+          <a:ln>
+            <a:noFill/>
+          </a:ln>
+        </p:spPr>
+        <p:style>
+          <a:lnRef idx="1">
+            <a:schemeClr val="accent1"/>
+          </a:lnRef>
+          <a:fillRef idx="3">
+            <a:schemeClr val="accent1"/>
+          </a:fillRef>
+          <a:effectRef idx="2">
+            <a:schemeClr val="accent1"/>
+          </a:effectRef>
+          <a:fontRef idx="minor">
+            <a:schemeClr val="lt1"/>
+          </a:fontRef>
+        </p:style>
+        <p:txBody>
+          <a:bodyPr rtlCol="0" anchor="ctr"/>
+          <a:lstStyle/>
+          <a:p>
+            <a:pPr algn="ctr"/>
+          </a:p>
+        </p:txBody>
+      </p:sp>
+      <p:sp>
+        <p:nvSpPr>
+          <p:cNvPr id="5" name="TextBox 4"/>
+          <p:cNvSpPr txBox="1"/>
+          <p:nvPr/>
+        </p:nvSpPr>
+        <p:spPr>
+          <a:xfrm>
+            <a:off x="640080" y="457200"/>
+            <a:ext cx="4572000" cy="274320"/>
+          </a:xfrm>
+          <a:prstGeom prst="rect">
+            <a:avLst/>
+          </a:prstGeom>
+          <a:noFill/>
+        </p:spPr>
+        <p:txBody>
+          <a:bodyPr wrap="square">
+            <a:spAutoFit/>
+          </a:bodyPr>
+          <a:lstStyle/>
+          <a:p>
+            <a:pPr algn="l"/>
+            <a:r>
+              <a:rPr sz="1200" b="1">
+                <a:solidFill>
+                  <a:srgbClr val="CC0000"/>
+                </a:solidFill>
+                <a:latin typeface="Arial"/>
+              </a:rPr>
+              <a:t>A SOLUÇÃO</a:t>
+            </a:r>
+          </a:p>
+        </p:txBody>
+      </p:sp>
+      <p:sp>
+        <p:nvSpPr>
+          <p:cNvPr id="6" name="TextBox 5"/>
+          <p:cNvSpPr txBox="1"/>
+          <p:nvPr/>
+        </p:nvSpPr>
+        <p:spPr>
+          <a:xfrm>
+            <a:off x="640080" y="1371600"/>
+            <a:ext cx="10058400" cy="731520"/>
+          </a:xfrm>
+          <a:prstGeom prst="rect">
+            <a:avLst/>
+          </a:prstGeom>
+          <a:noFill/>
+        </p:spPr>
+        <p:txBody>
+          <a:bodyPr wrap="square">
+            <a:spAutoFit/>
+          </a:bodyPr>
+          <a:lstStyle/>
+          <a:p>
+            <a:pPr algn="l"/>
+            <a:r>
+              <a:rPr sz="2800" b="1">
+                <a:solidFill>
+                  <a:srgbClr val="FFFFFF"/>
+                </a:solidFill>
+                <a:latin typeface="Arial"/>
+              </a:rPr>
+              <a:t>Empresa que Vende não executa para você.</a:t>
+            </a:r>
+          </a:p>
+        </p:txBody>
+      </p:sp>
+      <p:sp>
+        <p:nvSpPr>
+          <p:cNvPr id="7" name="TextBox 6"/>
+          <p:cNvSpPr txBox="1"/>
+          <p:nvPr/>
+        </p:nvSpPr>
+        <p:spPr>
+          <a:xfrm>
+            <a:off x="640080" y="2194560"/>
+            <a:ext cx="10058400" cy="457200"/>
+          </a:xfrm>
+          <a:prstGeom prst="rect">
+            <a:avLst/>
+          </a:prstGeom>
+          <a:noFill/>
+        </p:spPr>
+        <p:txBody>
+          <a:bodyPr wrap="square">
+            <a:spAutoFit/>
+          </a:bodyPr>
+          <a:lstStyle/>
+          <a:p>
+            <a:pPr algn="l"/>
+            <a:r>
+              <a:rPr sz="1800" b="1">
+                <a:solidFill>
+                  <a:srgbClr val="FFFFFF"/>
+                </a:solidFill>
+                <a:latin typeface="Arial"/>
+              </a:rPr>
+              <a:t>Estrutura o negócio. Treina o time. Acompanha a execução.</a:t>
+            </a:r>
+          </a:p>
+        </p:txBody>
+      </p:sp>
+      <p:sp>
+        <p:nvSpPr>
+          <p:cNvPr id="8" name="TextBox 7"/>
+          <p:cNvSpPr txBox="1"/>
+          <p:nvPr/>
+        </p:nvSpPr>
+        <p:spPr>
+          <a:xfrm>
+            <a:off x="640080" y="2834640"/>
+            <a:ext cx="10058400" cy="365760"/>
+          </a:xfrm>
+          <a:prstGeom prst="rect">
+            <a:avLst/>
+          </a:prstGeom>
+          <a:noFill/>
+        </p:spPr>
+        <p:txBody>
+          <a:bodyPr wrap="square">
+            <a:spAutoFit/>
+          </a:bodyPr>
+          <a:lstStyle/>
+          <a:p>
+            <a:pPr algn="l"/>
+            <a:r>
+              <a:rPr sz="1600" b="0">
+                <a:solidFill>
+                  <a:srgbClr val="C2C2C2"/>
+                </a:solidFill>
+                <a:latin typeface="Arial"/>
+              </a:rPr>
+              <a:t>Quem faz é o cliente. É exatamente por isso que funciona.</a:t>
+            </a:r>
+          </a:p>
+        </p:txBody>
+      </p:sp>
+      <p:sp>
+        <p:nvSpPr>
+          <p:cNvPr id="9" name="TextBox 8"/>
+          <p:cNvSpPr txBox="1"/>
+          <p:nvPr/>
+        </p:nvSpPr>
+        <p:spPr>
+          <a:xfrm>
+            <a:off x="640080" y="4114800"/>
+            <a:ext cx="3200400" cy="457200"/>
+          </a:xfrm>
+          <a:prstGeom prst="rect">
+            <a:avLst/>
+          </a:prstGeom>
+          <a:noFill/>
+        </p:spPr>
+        <p:txBody>
+          <a:bodyPr wrap="square">
+            <a:spAutoFit/>
+          </a:bodyPr>
+          <a:lstStyle/>
+          <a:p>
+            <a:pPr algn="l"/>
+            <a:r>
+              <a:rPr sz="2800" b="1">
+                <a:solidFill>
+                  <a:srgbClr val="FFFFFF"/>
+                </a:solidFill>
+                <a:latin typeface="Arial"/>
+              </a:rPr>
+              <a:t>NPS 55+</a:t>
+            </a:r>
+          </a:p>
+        </p:txBody>
+      </p:sp>
+      <p:sp>
+        <p:nvSpPr>
+          <p:cNvPr id="10" name="TextBox 9"/>
+          <p:cNvSpPr txBox="1"/>
+          <p:nvPr/>
+        </p:nvSpPr>
+        <p:spPr>
+          <a:xfrm>
+            <a:off x="640080" y="4754880"/>
+            <a:ext cx="3200400" cy="365760"/>
+          </a:xfrm>
+          <a:prstGeom prst="rect">
+            <a:avLst/>
+          </a:prstGeom>
+          <a:noFill/>
+        </p:spPr>
+        <p:txBody>
+          <a:bodyPr wrap="square">
+            <a:spAutoFit/>
+          </a:bodyPr>
+          <a:lstStyle/>
+          <a:p>
+            <a:pPr algn="l"/>
+            <a:r>
+              <a:rPr sz="1200" b="0">
+                <a:solidFill>
+                  <a:srgbClr val="C2C2C2"/>
+                </a:solidFill>
+                <a:latin typeface="Arial"/>
+              </a:rPr>
+              <a:t>vs. 35 das agências tradicionais</a:t>
+            </a:r>
+          </a:p>
+        </p:txBody>
+      </p:sp>
+      <p:sp>
+        <p:nvSpPr>
+          <p:cNvPr id="11" name="TextBox 10"/>
+          <p:cNvSpPr txBox="1"/>
+          <p:nvPr/>
+        </p:nvSpPr>
+        <p:spPr>
+          <a:xfrm>
+            <a:off x="4297680" y="4114800"/>
+            <a:ext cx="3200400" cy="457200"/>
+          </a:xfrm>
+          <a:prstGeom prst="rect">
+            <a:avLst/>
+          </a:prstGeom>
+          <a:noFill/>
+        </p:spPr>
+        <p:txBody>
+          <a:bodyPr wrap="square">
+            <a:spAutoFit/>
+          </a:bodyPr>
+          <a:lstStyle/>
+          <a:p>
+            <a:pPr algn="l"/>
+            <a:r>
+              <a:rPr sz="2800" b="1">
+                <a:solidFill>
+                  <a:srgbClr val="FFFFFF"/>
+                </a:solidFill>
+                <a:latin typeface="Arial"/>
+              </a:rPr>
+              <a:t>6 meses</a:t>
+            </a:r>
+          </a:p>
+        </p:txBody>
+      </p:sp>
+      <p:sp>
+        <p:nvSpPr>
+          <p:cNvPr id="12" name="TextBox 11"/>
+          <p:cNvSpPr txBox="1"/>
+          <p:nvPr/>
+        </p:nvSpPr>
+        <p:spPr>
+          <a:xfrm>
+            <a:off x="4297680" y="4754880"/>
+            <a:ext cx="3200400" cy="365760"/>
+          </a:xfrm>
+          <a:prstGeom prst="rect">
+            <a:avLst/>
+          </a:prstGeom>
+          <a:noFill/>
+        </p:spPr>
+        <p:txBody>
+          <a:bodyPr wrap="square">
+            <a:spAutoFit/>
+          </a:bodyPr>
+          <a:lstStyle/>
+          <a:p>
+            <a:pPr algn="l"/>
+            <a:r>
+              <a:rPr sz="1200" b="0">
+                <a:solidFill>
+                  <a:srgbClr val="C2C2C2"/>
+                </a:solidFill>
+                <a:latin typeface="Arial"/>
+              </a:rPr>
+              <a:t>de acompanhamento contínuo</a:t>
+            </a:r>
+          </a:p>
+        </p:txBody>
+      </p:sp>
+      <p:sp>
+        <p:nvSpPr>
+          <p:cNvPr id="13" name="TextBox 12"/>
+          <p:cNvSpPr txBox="1"/>
+          <p:nvPr/>
+        </p:nvSpPr>
+        <p:spPr>
+          <a:xfrm>
+            <a:off x="7955279" y="4114800"/>
+            <a:ext cx="3200400" cy="457200"/>
+          </a:xfrm>
+          <a:prstGeom prst="rect">
+            <a:avLst/>
+          </a:prstGeom>
+          <a:noFill/>
+        </p:spPr>
+        <p:txBody>
+          <a:bodyPr wrap="square">
+            <a:spAutoFit/>
+          </a:bodyPr>
+          <a:lstStyle/>
+          <a:p>
+            <a:pPr algn="l"/>
+            <a:r>
+              <a:rPr sz="2800" b="1">
+                <a:solidFill>
+                  <a:srgbClr val="FFFFFF"/>
+                </a:solidFill>
+                <a:latin typeface="Arial"/>
+              </a:rPr>
+              <a:t>4 squads</a:t>
+            </a:r>
+          </a:p>
+        </p:txBody>
+      </p:sp>
+      <p:sp>
+        <p:nvSpPr>
+          <p:cNvPr id="14" name="TextBox 13"/>
+          <p:cNvSpPr txBox="1"/>
+          <p:nvPr/>
+        </p:nvSpPr>
+        <p:spPr>
+          <a:xfrm>
+            <a:off x="7955279" y="4754880"/>
+            <a:ext cx="3200400" cy="365760"/>
+          </a:xfrm>
+          <a:prstGeom prst="rect">
+            <a:avLst/>
+          </a:prstGeom>
+          <a:noFill/>
+        </p:spPr>
+        <p:txBody>
+          <a:bodyPr wrap="square">
+            <a:spAutoFit/>
+          </a:bodyPr>
+          <a:lstStyle/>
+          <a:p>
+            <a:pPr algn="l"/>
+            <a:r>
+              <a:rPr sz="1200" b="0">
+                <a:solidFill>
+                  <a:srgbClr val="C2C2C2"/>
+                </a:solidFill>
+                <a:latin typeface="Arial"/>
+              </a:rPr>
+              <a:t>especializados no seu negócio</a:t>
+            </a:r>
+          </a:p>
+        </p:txBody>
+      </p:sp>
     </p:spTree>
   </p:cSld>
   <p:clrMapOvr>
@@ -3392,30 +6970,955 @@
         <p:nvPr/>
       </p:nvGrpSpPr>
       <p:grpSpPr/>
-      <p:pic>
-        <p:nvPicPr>
-          <p:cNvPr id="2" name="Picture 1" descr="slide_06.png"/>
-          <p:cNvPicPr>
-            <a:picLocks noChangeAspect="1"/>
-          </p:cNvPicPr>
-          <p:nvPr/>
-        </p:nvPicPr>
-        <p:blipFill>
-          <a:blip r:embed="rId2"/>
-          <a:stretch>
-            <a:fillRect/>
-          </a:stretch>
-        </p:blipFill>
+      <p:sp>
+        <p:nvSpPr>
+          <p:cNvPr id="2" name="Rectangle 1"/>
+          <p:cNvSpPr/>
+          <p:nvPr/>
+        </p:nvSpPr>
         <p:spPr>
           <a:xfrm>
             <a:off x="0" y="0"/>
-            <a:ext cx="6858000" cy="3857625"/>
-          </a:xfrm>
-          <a:prstGeom prst="rect">
-            <a:avLst/>
-          </a:prstGeom>
-        </p:spPr>
-      </p:pic>
+            <a:ext cx="12191695" cy="6858000"/>
+          </a:xfrm>
+          <a:prstGeom prst="rect">
+            <a:avLst/>
+          </a:prstGeom>
+          <a:solidFill>
+            <a:srgbClr val="0D0D0D"/>
+          </a:solidFill>
+          <a:ln>
+            <a:noFill/>
+          </a:ln>
+        </p:spPr>
+        <p:style>
+          <a:lnRef idx="1">
+            <a:schemeClr val="accent1"/>
+          </a:lnRef>
+          <a:fillRef idx="3">
+            <a:schemeClr val="accent1"/>
+          </a:fillRef>
+          <a:effectRef idx="2">
+            <a:schemeClr val="accent1"/>
+          </a:effectRef>
+          <a:fontRef idx="minor">
+            <a:schemeClr val="lt1"/>
+          </a:fontRef>
+        </p:style>
+        <p:txBody>
+          <a:bodyPr rtlCol="0" anchor="ctr"/>
+          <a:lstStyle/>
+          <a:p>
+            <a:pPr algn="ctr"/>
+          </a:p>
+        </p:txBody>
+      </p:sp>
+      <p:sp>
+        <p:nvSpPr>
+          <p:cNvPr id="3" name="Oval 2"/>
+          <p:cNvSpPr/>
+          <p:nvPr/>
+        </p:nvSpPr>
+        <p:spPr>
+          <a:xfrm>
+            <a:off x="-1828800" y="-1371600"/>
+            <a:ext cx="4572000" cy="4572000"/>
+          </a:xfrm>
+          <a:prstGeom prst="ellipse">
+            <a:avLst/>
+          </a:prstGeom>
+          <a:solidFill>
+            <a:srgbClr val="3C0909"/>
+          </a:solidFill>
+          <a:ln>
+            <a:noFill/>
+          </a:ln>
+        </p:spPr>
+        <p:style>
+          <a:lnRef idx="1">
+            <a:schemeClr val="accent1"/>
+          </a:lnRef>
+          <a:fillRef idx="3">
+            <a:schemeClr val="accent1"/>
+          </a:fillRef>
+          <a:effectRef idx="2">
+            <a:schemeClr val="accent1"/>
+          </a:effectRef>
+          <a:fontRef idx="minor">
+            <a:schemeClr val="lt1"/>
+          </a:fontRef>
+        </p:style>
+        <p:txBody>
+          <a:bodyPr rtlCol="0" anchor="ctr"/>
+          <a:lstStyle/>
+          <a:p>
+            <a:pPr algn="ctr"/>
+          </a:p>
+        </p:txBody>
+      </p:sp>
+      <p:sp>
+        <p:nvSpPr>
+          <p:cNvPr id="4" name="Oval 3"/>
+          <p:cNvSpPr/>
+          <p:nvPr/>
+        </p:nvSpPr>
+        <p:spPr>
+          <a:xfrm>
+            <a:off x="9144000" y="3657600"/>
+            <a:ext cx="4114800" cy="4114800"/>
+          </a:xfrm>
+          <a:prstGeom prst="ellipse">
+            <a:avLst/>
+          </a:prstGeom>
+          <a:solidFill>
+            <a:srgbClr val="3C0909"/>
+          </a:solidFill>
+          <a:ln>
+            <a:noFill/>
+          </a:ln>
+        </p:spPr>
+        <p:style>
+          <a:lnRef idx="1">
+            <a:schemeClr val="accent1"/>
+          </a:lnRef>
+          <a:fillRef idx="3">
+            <a:schemeClr val="accent1"/>
+          </a:fillRef>
+          <a:effectRef idx="2">
+            <a:schemeClr val="accent1"/>
+          </a:effectRef>
+          <a:fontRef idx="minor">
+            <a:schemeClr val="lt1"/>
+          </a:fontRef>
+        </p:style>
+        <p:txBody>
+          <a:bodyPr rtlCol="0" anchor="ctr"/>
+          <a:lstStyle/>
+          <a:p>
+            <a:pPr algn="ctr"/>
+          </a:p>
+        </p:txBody>
+      </p:sp>
+      <p:sp>
+        <p:nvSpPr>
+          <p:cNvPr id="5" name="TextBox 4"/>
+          <p:cNvSpPr txBox="1"/>
+          <p:nvPr/>
+        </p:nvSpPr>
+        <p:spPr>
+          <a:xfrm>
+            <a:off x="457200" y="320040"/>
+            <a:ext cx="10972800" cy="457200"/>
+          </a:xfrm>
+          <a:prstGeom prst="rect">
+            <a:avLst/>
+          </a:prstGeom>
+          <a:noFill/>
+        </p:spPr>
+        <p:txBody>
+          <a:bodyPr wrap="square">
+            <a:spAutoFit/>
+          </a:bodyPr>
+          <a:lstStyle/>
+          <a:p>
+            <a:pPr algn="l"/>
+            <a:r>
+              <a:rPr sz="2800" b="1">
+                <a:solidFill>
+                  <a:srgbClr val="FFFFFF"/>
+                </a:solidFill>
+                <a:latin typeface="Arial"/>
+              </a:rPr>
+              <a:t>O PROGRAMA</a:t>
+            </a:r>
+          </a:p>
+        </p:txBody>
+      </p:sp>
+      <p:sp>
+        <p:nvSpPr>
+          <p:cNvPr id="6" name="TextBox 5"/>
+          <p:cNvSpPr txBox="1"/>
+          <p:nvPr/>
+        </p:nvSpPr>
+        <p:spPr>
+          <a:xfrm>
+            <a:off x="457200" y="868680"/>
+            <a:ext cx="10972800" cy="320040"/>
+          </a:xfrm>
+          <a:prstGeom prst="rect">
+            <a:avLst/>
+          </a:prstGeom>
+          <a:noFill/>
+        </p:spPr>
+        <p:txBody>
+          <a:bodyPr wrap="square">
+            <a:spAutoFit/>
+          </a:bodyPr>
+          <a:lstStyle/>
+          <a:p>
+            <a:pPr algn="l"/>
+            <a:r>
+              <a:rPr sz="1400" b="0">
+                <a:solidFill>
+                  <a:srgbClr val="C2C2C2"/>
+                </a:solidFill>
+                <a:latin typeface="Arial"/>
+              </a:rPr>
+              <a:t>5 pilares que compõem o Empresa que Vende</a:t>
+            </a:r>
+          </a:p>
+        </p:txBody>
+      </p:sp>
+      <p:sp>
+        <p:nvSpPr>
+          <p:cNvPr id="7" name="Rounded Rectangle 6"/>
+          <p:cNvSpPr/>
+          <p:nvPr/>
+        </p:nvSpPr>
+        <p:spPr>
+          <a:xfrm>
+            <a:off x="320040" y="1554480"/>
+            <a:ext cx="2194560" cy="4206240"/>
+          </a:xfrm>
+          <a:prstGeom prst="roundRect">
+            <a:avLst/>
+          </a:prstGeom>
+          <a:solidFill>
+            <a:srgbClr val="1F1F1F"/>
+          </a:solidFill>
+          <a:ln>
+            <a:solidFill>
+              <a:srgbClr val="4A1010"/>
+            </a:solidFill>
+          </a:ln>
+        </p:spPr>
+        <p:style>
+          <a:lnRef idx="1">
+            <a:schemeClr val="accent1"/>
+          </a:lnRef>
+          <a:fillRef idx="3">
+            <a:schemeClr val="accent1"/>
+          </a:fillRef>
+          <a:effectRef idx="2">
+            <a:schemeClr val="accent1"/>
+          </a:effectRef>
+          <a:fontRef idx="minor">
+            <a:schemeClr val="lt1"/>
+          </a:fontRef>
+        </p:style>
+        <p:txBody>
+          <a:bodyPr rtlCol="0" anchor="ctr"/>
+          <a:lstStyle/>
+          <a:p>
+            <a:pPr algn="ctr"/>
+          </a:p>
+        </p:txBody>
+      </p:sp>
+      <p:sp>
+        <p:nvSpPr>
+          <p:cNvPr id="8" name="TextBox 7"/>
+          <p:cNvSpPr txBox="1"/>
+          <p:nvPr/>
+        </p:nvSpPr>
+        <p:spPr>
+          <a:xfrm>
+            <a:off x="457200" y="1737360"/>
+            <a:ext cx="1828800" cy="320040"/>
+          </a:xfrm>
+          <a:prstGeom prst="rect">
+            <a:avLst/>
+          </a:prstGeom>
+          <a:noFill/>
+        </p:spPr>
+        <p:txBody>
+          <a:bodyPr wrap="square">
+            <a:spAutoFit/>
+          </a:bodyPr>
+          <a:lstStyle/>
+          <a:p>
+            <a:pPr algn="l"/>
+            <a:r>
+              <a:rPr sz="1400" b="1">
+                <a:solidFill>
+                  <a:srgbClr val="CC0000"/>
+                </a:solidFill>
+                <a:latin typeface="Arial"/>
+              </a:rPr>
+              <a:t>01</a:t>
+            </a:r>
+          </a:p>
+        </p:txBody>
+      </p:sp>
+      <p:sp>
+        <p:nvSpPr>
+          <p:cNvPr id="9" name="TextBox 8"/>
+          <p:cNvSpPr txBox="1"/>
+          <p:nvPr/>
+        </p:nvSpPr>
+        <p:spPr>
+          <a:xfrm>
+            <a:off x="457200" y="2286000"/>
+            <a:ext cx="1920240" cy="914400"/>
+          </a:xfrm>
+          <a:prstGeom prst="rect">
+            <a:avLst/>
+          </a:prstGeom>
+          <a:noFill/>
+        </p:spPr>
+        <p:txBody>
+          <a:bodyPr wrap="square">
+            <a:spAutoFit/>
+          </a:bodyPr>
+          <a:lstStyle/>
+          <a:p>
+            <a:pPr algn="l"/>
+            <a:r>
+              <a:rPr sz="1600" b="1">
+                <a:solidFill>
+                  <a:srgbClr val="FFFFFF"/>
+                </a:solidFill>
+                <a:latin typeface="Arial"/>
+              </a:rPr>
+              <a:t>Diagnóstico Contínuo</a:t>
+            </a:r>
+          </a:p>
+        </p:txBody>
+      </p:sp>
+      <p:sp>
+        <p:nvSpPr>
+          <p:cNvPr id="10" name="TextBox 9"/>
+          <p:cNvSpPr txBox="1"/>
+          <p:nvPr/>
+        </p:nvSpPr>
+        <p:spPr>
+          <a:xfrm>
+            <a:off x="457200" y="3383280"/>
+            <a:ext cx="1920240" cy="2011680"/>
+          </a:xfrm>
+          <a:prstGeom prst="rect">
+            <a:avLst/>
+          </a:prstGeom>
+          <a:noFill/>
+        </p:spPr>
+        <p:txBody>
+          <a:bodyPr wrap="square">
+            <a:spAutoFit/>
+          </a:bodyPr>
+          <a:lstStyle/>
+          <a:p>
+            <a:pPr algn="l"/>
+            <a:r>
+              <a:rPr sz="1300" b="0">
+                <a:solidFill>
+                  <a:srgbClr val="C2C2C2"/>
+                </a:solidFill>
+                <a:latin typeface="Arial"/>
+              </a:rPr>
+              <a:t>Maturidade GTM monitorada. Gargalos identificados a cada ciclo.</a:t>
+            </a:r>
+          </a:p>
+        </p:txBody>
+      </p:sp>
+      <p:sp>
+        <p:nvSpPr>
+          <p:cNvPr id="11" name="Rounded Rectangle 10"/>
+          <p:cNvSpPr/>
+          <p:nvPr/>
+        </p:nvSpPr>
+        <p:spPr>
+          <a:xfrm>
+            <a:off x="2651760" y="1554480"/>
+            <a:ext cx="2194560" cy="4206240"/>
+          </a:xfrm>
+          <a:prstGeom prst="roundRect">
+            <a:avLst/>
+          </a:prstGeom>
+          <a:solidFill>
+            <a:srgbClr val="1F1F1F"/>
+          </a:solidFill>
+          <a:ln>
+            <a:solidFill>
+              <a:srgbClr val="4A1010"/>
+            </a:solidFill>
+          </a:ln>
+        </p:spPr>
+        <p:style>
+          <a:lnRef idx="1">
+            <a:schemeClr val="accent1"/>
+          </a:lnRef>
+          <a:fillRef idx="3">
+            <a:schemeClr val="accent1"/>
+          </a:fillRef>
+          <a:effectRef idx="2">
+            <a:schemeClr val="accent1"/>
+          </a:effectRef>
+          <a:fontRef idx="minor">
+            <a:schemeClr val="lt1"/>
+          </a:fontRef>
+        </p:style>
+        <p:txBody>
+          <a:bodyPr rtlCol="0" anchor="ctr"/>
+          <a:lstStyle/>
+          <a:p>
+            <a:pPr algn="ctr"/>
+          </a:p>
+        </p:txBody>
+      </p:sp>
+      <p:sp>
+        <p:nvSpPr>
+          <p:cNvPr id="12" name="TextBox 11"/>
+          <p:cNvSpPr txBox="1"/>
+          <p:nvPr/>
+        </p:nvSpPr>
+        <p:spPr>
+          <a:xfrm>
+            <a:off x="2788920" y="1737360"/>
+            <a:ext cx="1828800" cy="320040"/>
+          </a:xfrm>
+          <a:prstGeom prst="rect">
+            <a:avLst/>
+          </a:prstGeom>
+          <a:noFill/>
+        </p:spPr>
+        <p:txBody>
+          <a:bodyPr wrap="square">
+            <a:spAutoFit/>
+          </a:bodyPr>
+          <a:lstStyle/>
+          <a:p>
+            <a:pPr algn="l"/>
+            <a:r>
+              <a:rPr sz="1400" b="1">
+                <a:solidFill>
+                  <a:srgbClr val="CC0000"/>
+                </a:solidFill>
+                <a:latin typeface="Arial"/>
+              </a:rPr>
+              <a:t>02</a:t>
+            </a:r>
+          </a:p>
+        </p:txBody>
+      </p:sp>
+      <p:sp>
+        <p:nvSpPr>
+          <p:cNvPr id="13" name="TextBox 12"/>
+          <p:cNvSpPr txBox="1"/>
+          <p:nvPr/>
+        </p:nvSpPr>
+        <p:spPr>
+          <a:xfrm>
+            <a:off x="2788920" y="2286000"/>
+            <a:ext cx="1920240" cy="914400"/>
+          </a:xfrm>
+          <a:prstGeom prst="rect">
+            <a:avLst/>
+          </a:prstGeom>
+          <a:noFill/>
+        </p:spPr>
+        <p:txBody>
+          <a:bodyPr wrap="square">
+            <a:spAutoFit/>
+          </a:bodyPr>
+          <a:lstStyle/>
+          <a:p>
+            <a:pPr algn="l"/>
+            <a:r>
+              <a:rPr sz="1600" b="1">
+                <a:solidFill>
+                  <a:srgbClr val="FFFFFF"/>
+                </a:solidFill>
+                <a:latin typeface="Arial"/>
+              </a:rPr>
+              <a:t>Consultoria Estratégica</a:t>
+            </a:r>
+          </a:p>
+        </p:txBody>
+      </p:sp>
+      <p:sp>
+        <p:nvSpPr>
+          <p:cNvPr id="14" name="TextBox 13"/>
+          <p:cNvSpPr txBox="1"/>
+          <p:nvPr/>
+        </p:nvSpPr>
+        <p:spPr>
+          <a:xfrm>
+            <a:off x="2788920" y="3383280"/>
+            <a:ext cx="1920240" cy="2011680"/>
+          </a:xfrm>
+          <a:prstGeom prst="rect">
+            <a:avLst/>
+          </a:prstGeom>
+          <a:noFill/>
+        </p:spPr>
+        <p:txBody>
+          <a:bodyPr wrap="square">
+            <a:spAutoFit/>
+          </a:bodyPr>
+          <a:lstStyle/>
+          <a:p>
+            <a:pPr algn="l"/>
+            <a:r>
+              <a:rPr sz="1300" b="0">
+                <a:solidFill>
+                  <a:srgbClr val="C2C2C2"/>
+                </a:solidFill>
+                <a:latin typeface="Arial"/>
+              </a:rPr>
+              <a:t>1h/mês com consultor V4: prioridades e créditos do squad.</a:t>
+            </a:r>
+          </a:p>
+        </p:txBody>
+      </p:sp>
+      <p:sp>
+        <p:nvSpPr>
+          <p:cNvPr id="15" name="Rounded Rectangle 14"/>
+          <p:cNvSpPr/>
+          <p:nvPr/>
+        </p:nvSpPr>
+        <p:spPr>
+          <a:xfrm>
+            <a:off x="4983479" y="1554480"/>
+            <a:ext cx="2194560" cy="4206240"/>
+          </a:xfrm>
+          <a:prstGeom prst="roundRect">
+            <a:avLst/>
+          </a:prstGeom>
+          <a:solidFill>
+            <a:srgbClr val="1F1F1F"/>
+          </a:solidFill>
+          <a:ln>
+            <a:solidFill>
+              <a:srgbClr val="4A1010"/>
+            </a:solidFill>
+          </a:ln>
+        </p:spPr>
+        <p:style>
+          <a:lnRef idx="1">
+            <a:schemeClr val="accent1"/>
+          </a:lnRef>
+          <a:fillRef idx="3">
+            <a:schemeClr val="accent1"/>
+          </a:fillRef>
+          <a:effectRef idx="2">
+            <a:schemeClr val="accent1"/>
+          </a:effectRef>
+          <a:fontRef idx="minor">
+            <a:schemeClr val="lt1"/>
+          </a:fontRef>
+        </p:style>
+        <p:txBody>
+          <a:bodyPr rtlCol="0" anchor="ctr"/>
+          <a:lstStyle/>
+          <a:p>
+            <a:pPr algn="ctr"/>
+          </a:p>
+        </p:txBody>
+      </p:sp>
+      <p:sp>
+        <p:nvSpPr>
+          <p:cNvPr id="16" name="TextBox 15"/>
+          <p:cNvSpPr txBox="1"/>
+          <p:nvPr/>
+        </p:nvSpPr>
+        <p:spPr>
+          <a:xfrm>
+            <a:off x="5120639" y="1737360"/>
+            <a:ext cx="1828800" cy="320040"/>
+          </a:xfrm>
+          <a:prstGeom prst="rect">
+            <a:avLst/>
+          </a:prstGeom>
+          <a:noFill/>
+        </p:spPr>
+        <p:txBody>
+          <a:bodyPr wrap="square">
+            <a:spAutoFit/>
+          </a:bodyPr>
+          <a:lstStyle/>
+          <a:p>
+            <a:pPr algn="l"/>
+            <a:r>
+              <a:rPr sz="1400" b="1">
+                <a:solidFill>
+                  <a:srgbClr val="CC0000"/>
+                </a:solidFill>
+                <a:latin typeface="Arial"/>
+              </a:rPr>
+              <a:t>03</a:t>
+            </a:r>
+          </a:p>
+        </p:txBody>
+      </p:sp>
+      <p:sp>
+        <p:nvSpPr>
+          <p:cNvPr id="17" name="TextBox 16"/>
+          <p:cNvSpPr txBox="1"/>
+          <p:nvPr/>
+        </p:nvSpPr>
+        <p:spPr>
+          <a:xfrm>
+            <a:off x="5120639" y="2286000"/>
+            <a:ext cx="1920240" cy="914400"/>
+          </a:xfrm>
+          <a:prstGeom prst="rect">
+            <a:avLst/>
+          </a:prstGeom>
+          <a:noFill/>
+        </p:spPr>
+        <p:txBody>
+          <a:bodyPr wrap="square">
+            <a:spAutoFit/>
+          </a:bodyPr>
+          <a:lstStyle/>
+          <a:p>
+            <a:pPr algn="l"/>
+            <a:r>
+              <a:rPr sz="1600" b="1">
+                <a:solidFill>
+                  <a:srgbClr val="FFFFFF"/>
+                </a:solidFill>
+                <a:latin typeface="Arial"/>
+              </a:rPr>
+              <a:t>Execução Assistida</a:t>
+            </a:r>
+          </a:p>
+        </p:txBody>
+      </p:sp>
+      <p:sp>
+        <p:nvSpPr>
+          <p:cNvPr id="18" name="TextBox 17"/>
+          <p:cNvSpPr txBox="1"/>
+          <p:nvPr/>
+        </p:nvSpPr>
+        <p:spPr>
+          <a:xfrm>
+            <a:off x="5120639" y="3383280"/>
+            <a:ext cx="1920240" cy="2011680"/>
+          </a:xfrm>
+          <a:prstGeom prst="rect">
+            <a:avLst/>
+          </a:prstGeom>
+          <a:noFill/>
+        </p:spPr>
+        <p:txBody>
+          <a:bodyPr wrap="square">
+            <a:spAutoFit/>
+          </a:bodyPr>
+          <a:lstStyle/>
+          <a:p>
+            <a:pPr algn="l"/>
+            <a:r>
+              <a:rPr sz="1300" b="0">
+                <a:solidFill>
+                  <a:srgbClr val="C2C2C2"/>
+                </a:solidFill>
+                <a:latin typeface="Arial"/>
+              </a:rPr>
+              <a:t>Squad: Conteúdo, Mídia Paga, Comercial e CRM.</a:t>
+            </a:r>
+          </a:p>
+        </p:txBody>
+      </p:sp>
+      <p:sp>
+        <p:nvSpPr>
+          <p:cNvPr id="19" name="Rounded Rectangle 18"/>
+          <p:cNvSpPr/>
+          <p:nvPr/>
+        </p:nvSpPr>
+        <p:spPr>
+          <a:xfrm>
+            <a:off x="7315199" y="1554480"/>
+            <a:ext cx="2194560" cy="4206240"/>
+          </a:xfrm>
+          <a:prstGeom prst="roundRect">
+            <a:avLst/>
+          </a:prstGeom>
+          <a:solidFill>
+            <a:srgbClr val="1F1F1F"/>
+          </a:solidFill>
+          <a:ln>
+            <a:solidFill>
+              <a:srgbClr val="4A1010"/>
+            </a:solidFill>
+          </a:ln>
+        </p:spPr>
+        <p:style>
+          <a:lnRef idx="1">
+            <a:schemeClr val="accent1"/>
+          </a:lnRef>
+          <a:fillRef idx="3">
+            <a:schemeClr val="accent1"/>
+          </a:fillRef>
+          <a:effectRef idx="2">
+            <a:schemeClr val="accent1"/>
+          </a:effectRef>
+          <a:fontRef idx="minor">
+            <a:schemeClr val="lt1"/>
+          </a:fontRef>
+        </p:style>
+        <p:txBody>
+          <a:bodyPr rtlCol="0" anchor="ctr"/>
+          <a:lstStyle/>
+          <a:p>
+            <a:pPr algn="ctr"/>
+          </a:p>
+        </p:txBody>
+      </p:sp>
+      <p:sp>
+        <p:nvSpPr>
+          <p:cNvPr id="20" name="TextBox 19"/>
+          <p:cNvSpPr txBox="1"/>
+          <p:nvPr/>
+        </p:nvSpPr>
+        <p:spPr>
+          <a:xfrm>
+            <a:off x="7452359" y="1737360"/>
+            <a:ext cx="1828800" cy="320040"/>
+          </a:xfrm>
+          <a:prstGeom prst="rect">
+            <a:avLst/>
+          </a:prstGeom>
+          <a:noFill/>
+        </p:spPr>
+        <p:txBody>
+          <a:bodyPr wrap="square">
+            <a:spAutoFit/>
+          </a:bodyPr>
+          <a:lstStyle/>
+          <a:p>
+            <a:pPr algn="l"/>
+            <a:r>
+              <a:rPr sz="1400" b="1">
+                <a:solidFill>
+                  <a:srgbClr val="CC0000"/>
+                </a:solidFill>
+                <a:latin typeface="Arial"/>
+              </a:rPr>
+              <a:t>04</a:t>
+            </a:r>
+          </a:p>
+        </p:txBody>
+      </p:sp>
+      <p:sp>
+        <p:nvSpPr>
+          <p:cNvPr id="21" name="TextBox 20"/>
+          <p:cNvSpPr txBox="1"/>
+          <p:nvPr/>
+        </p:nvSpPr>
+        <p:spPr>
+          <a:xfrm>
+            <a:off x="7452359" y="2286000"/>
+            <a:ext cx="1920240" cy="914400"/>
+          </a:xfrm>
+          <a:prstGeom prst="rect">
+            <a:avLst/>
+          </a:prstGeom>
+          <a:noFill/>
+        </p:spPr>
+        <p:txBody>
+          <a:bodyPr wrap="square">
+            <a:spAutoFit/>
+          </a:bodyPr>
+          <a:lstStyle/>
+          <a:p>
+            <a:pPr algn="l"/>
+            <a:r>
+              <a:rPr sz="1600" b="1">
+                <a:solidFill>
+                  <a:srgbClr val="FFFFFF"/>
+                </a:solidFill>
+                <a:latin typeface="Arial"/>
+              </a:rPr>
+              <a:t>Comunidade</a:t>
+            </a:r>
+          </a:p>
+        </p:txBody>
+      </p:sp>
+      <p:sp>
+        <p:nvSpPr>
+          <p:cNvPr id="22" name="TextBox 21"/>
+          <p:cNvSpPr txBox="1"/>
+          <p:nvPr/>
+        </p:nvSpPr>
+        <p:spPr>
+          <a:xfrm>
+            <a:off x="7452359" y="3383280"/>
+            <a:ext cx="1920240" cy="2011680"/>
+          </a:xfrm>
+          <a:prstGeom prst="rect">
+            <a:avLst/>
+          </a:prstGeom>
+          <a:noFill/>
+        </p:spPr>
+        <p:txBody>
+          <a:bodyPr wrap="square">
+            <a:spAutoFit/>
+          </a:bodyPr>
+          <a:lstStyle/>
+          <a:p>
+            <a:pPr algn="l"/>
+            <a:r>
+              <a:rPr sz="1300" b="0">
+                <a:solidFill>
+                  <a:srgbClr val="C2C2C2"/>
+                </a:solidFill>
+                <a:latin typeface="Arial"/>
+              </a:rPr>
+              <a:t>Peers do segmento e lives mensais temáticas.</a:t>
+            </a:r>
+          </a:p>
+        </p:txBody>
+      </p:sp>
+      <p:sp>
+        <p:nvSpPr>
+          <p:cNvPr id="23" name="Rounded Rectangle 22"/>
+          <p:cNvSpPr/>
+          <p:nvPr/>
+        </p:nvSpPr>
+        <p:spPr>
+          <a:xfrm>
+            <a:off x="9646919" y="1554480"/>
+            <a:ext cx="2194560" cy="4206240"/>
+          </a:xfrm>
+          <a:prstGeom prst="roundRect">
+            <a:avLst/>
+          </a:prstGeom>
+          <a:solidFill>
+            <a:srgbClr val="1F1F1F"/>
+          </a:solidFill>
+          <a:ln>
+            <a:solidFill>
+              <a:srgbClr val="4A1010"/>
+            </a:solidFill>
+          </a:ln>
+        </p:spPr>
+        <p:style>
+          <a:lnRef idx="1">
+            <a:schemeClr val="accent1"/>
+          </a:lnRef>
+          <a:fillRef idx="3">
+            <a:schemeClr val="accent1"/>
+          </a:fillRef>
+          <a:effectRef idx="2">
+            <a:schemeClr val="accent1"/>
+          </a:effectRef>
+          <a:fontRef idx="minor">
+            <a:schemeClr val="lt1"/>
+          </a:fontRef>
+        </p:style>
+        <p:txBody>
+          <a:bodyPr rtlCol="0" anchor="ctr"/>
+          <a:lstStyle/>
+          <a:p>
+            <a:pPr algn="ctr"/>
+          </a:p>
+        </p:txBody>
+      </p:sp>
+      <p:sp>
+        <p:nvSpPr>
+          <p:cNvPr id="24" name="TextBox 23"/>
+          <p:cNvSpPr txBox="1"/>
+          <p:nvPr/>
+        </p:nvSpPr>
+        <p:spPr>
+          <a:xfrm>
+            <a:off x="9784079" y="1737360"/>
+            <a:ext cx="1828800" cy="320040"/>
+          </a:xfrm>
+          <a:prstGeom prst="rect">
+            <a:avLst/>
+          </a:prstGeom>
+          <a:noFill/>
+        </p:spPr>
+        <p:txBody>
+          <a:bodyPr wrap="square">
+            <a:spAutoFit/>
+          </a:bodyPr>
+          <a:lstStyle/>
+          <a:p>
+            <a:pPr algn="l"/>
+            <a:r>
+              <a:rPr sz="1400" b="1">
+                <a:solidFill>
+                  <a:srgbClr val="CC0000"/>
+                </a:solidFill>
+                <a:latin typeface="Arial"/>
+              </a:rPr>
+              <a:t>05</a:t>
+            </a:r>
+          </a:p>
+        </p:txBody>
+      </p:sp>
+      <p:sp>
+        <p:nvSpPr>
+          <p:cNvPr id="25" name="TextBox 24"/>
+          <p:cNvSpPr txBox="1"/>
+          <p:nvPr/>
+        </p:nvSpPr>
+        <p:spPr>
+          <a:xfrm>
+            <a:off x="9784079" y="2286000"/>
+            <a:ext cx="1920240" cy="914400"/>
+          </a:xfrm>
+          <a:prstGeom prst="rect">
+            <a:avLst/>
+          </a:prstGeom>
+          <a:noFill/>
+        </p:spPr>
+        <p:txBody>
+          <a:bodyPr wrap="square">
+            <a:spAutoFit/>
+          </a:bodyPr>
+          <a:lstStyle/>
+          <a:p>
+            <a:pPr algn="l"/>
+            <a:r>
+              <a:rPr sz="1600" b="1">
+                <a:solidFill>
+                  <a:srgbClr val="FFFFFF"/>
+                </a:solidFill>
+                <a:latin typeface="Arial"/>
+              </a:rPr>
+              <a:t>Fábrica de Receita</a:t>
+            </a:r>
+          </a:p>
+        </p:txBody>
+      </p:sp>
+      <p:sp>
+        <p:nvSpPr>
+          <p:cNvPr id="26" name="TextBox 25"/>
+          <p:cNvSpPr txBox="1"/>
+          <p:nvPr/>
+        </p:nvSpPr>
+        <p:spPr>
+          <a:xfrm>
+            <a:off x="9784079" y="3383280"/>
+            <a:ext cx="1920240" cy="2011680"/>
+          </a:xfrm>
+          <a:prstGeom prst="rect">
+            <a:avLst/>
+          </a:prstGeom>
+          <a:noFill/>
+        </p:spPr>
+        <p:txBody>
+          <a:bodyPr wrap="square">
+            <a:spAutoFit/>
+          </a:bodyPr>
+          <a:lstStyle/>
+          <a:p>
+            <a:pPr algn="l"/>
+            <a:r>
+              <a:rPr sz="1300" b="0">
+                <a:solidFill>
+                  <a:srgbClr val="C2C2C2"/>
+                </a:solidFill>
+                <a:latin typeface="Arial"/>
+              </a:rPr>
+              <a:t>Imersão presencial: hot seats, cases e workshops.</a:t>
+            </a:r>
+          </a:p>
+        </p:txBody>
+      </p:sp>
     </p:spTree>
   </p:cSld>
   <p:clrMapOvr>
@@ -3434,30 +7937,797 @@
         <p:nvPr/>
       </p:nvGrpSpPr>
       <p:grpSpPr/>
-      <p:pic>
-        <p:nvPicPr>
-          <p:cNvPr id="2" name="Picture 1" descr="slide_07.png"/>
-          <p:cNvPicPr>
-            <a:picLocks noChangeAspect="1"/>
-          </p:cNvPicPr>
-          <p:nvPr/>
-        </p:nvPicPr>
-        <p:blipFill>
-          <a:blip r:embed="rId2"/>
-          <a:stretch>
-            <a:fillRect/>
-          </a:stretch>
-        </p:blipFill>
+      <p:sp>
+        <p:nvSpPr>
+          <p:cNvPr id="2" name="Rectangle 1"/>
+          <p:cNvSpPr/>
+          <p:nvPr/>
+        </p:nvSpPr>
         <p:spPr>
           <a:xfrm>
             <a:off x="0" y="0"/>
-            <a:ext cx="6858000" cy="3857625"/>
-          </a:xfrm>
-          <a:prstGeom prst="rect">
-            <a:avLst/>
-          </a:prstGeom>
-        </p:spPr>
-      </p:pic>
+            <a:ext cx="12191695" cy="6858000"/>
+          </a:xfrm>
+          <a:prstGeom prst="rect">
+            <a:avLst/>
+          </a:prstGeom>
+          <a:solidFill>
+            <a:srgbClr val="0D0D0D"/>
+          </a:solidFill>
+          <a:ln>
+            <a:noFill/>
+          </a:ln>
+        </p:spPr>
+        <p:style>
+          <a:lnRef idx="1">
+            <a:schemeClr val="accent1"/>
+          </a:lnRef>
+          <a:fillRef idx="3">
+            <a:schemeClr val="accent1"/>
+          </a:fillRef>
+          <a:effectRef idx="2">
+            <a:schemeClr val="accent1"/>
+          </a:effectRef>
+          <a:fontRef idx="minor">
+            <a:schemeClr val="lt1"/>
+          </a:fontRef>
+        </p:style>
+        <p:txBody>
+          <a:bodyPr rtlCol="0" anchor="ctr"/>
+          <a:lstStyle/>
+          <a:p>
+            <a:pPr algn="ctr"/>
+          </a:p>
+        </p:txBody>
+      </p:sp>
+      <p:sp>
+        <p:nvSpPr>
+          <p:cNvPr id="3" name="Oval 2"/>
+          <p:cNvSpPr/>
+          <p:nvPr/>
+        </p:nvSpPr>
+        <p:spPr>
+          <a:xfrm>
+            <a:off x="-1828800" y="-1371600"/>
+            <a:ext cx="4572000" cy="4572000"/>
+          </a:xfrm>
+          <a:prstGeom prst="ellipse">
+            <a:avLst/>
+          </a:prstGeom>
+          <a:solidFill>
+            <a:srgbClr val="3C0909"/>
+          </a:solidFill>
+          <a:ln>
+            <a:noFill/>
+          </a:ln>
+        </p:spPr>
+        <p:style>
+          <a:lnRef idx="1">
+            <a:schemeClr val="accent1"/>
+          </a:lnRef>
+          <a:fillRef idx="3">
+            <a:schemeClr val="accent1"/>
+          </a:fillRef>
+          <a:effectRef idx="2">
+            <a:schemeClr val="accent1"/>
+          </a:effectRef>
+          <a:fontRef idx="minor">
+            <a:schemeClr val="lt1"/>
+          </a:fontRef>
+        </p:style>
+        <p:txBody>
+          <a:bodyPr rtlCol="0" anchor="ctr"/>
+          <a:lstStyle/>
+          <a:p>
+            <a:pPr algn="ctr"/>
+          </a:p>
+        </p:txBody>
+      </p:sp>
+      <p:sp>
+        <p:nvSpPr>
+          <p:cNvPr id="4" name="Oval 3"/>
+          <p:cNvSpPr/>
+          <p:nvPr/>
+        </p:nvSpPr>
+        <p:spPr>
+          <a:xfrm>
+            <a:off x="9144000" y="3657600"/>
+            <a:ext cx="4114800" cy="4114800"/>
+          </a:xfrm>
+          <a:prstGeom prst="ellipse">
+            <a:avLst/>
+          </a:prstGeom>
+          <a:solidFill>
+            <a:srgbClr val="3C0909"/>
+          </a:solidFill>
+          <a:ln>
+            <a:noFill/>
+          </a:ln>
+        </p:spPr>
+        <p:style>
+          <a:lnRef idx="1">
+            <a:schemeClr val="accent1"/>
+          </a:lnRef>
+          <a:fillRef idx="3">
+            <a:schemeClr val="accent1"/>
+          </a:fillRef>
+          <a:effectRef idx="2">
+            <a:schemeClr val="accent1"/>
+          </a:effectRef>
+          <a:fontRef idx="minor">
+            <a:schemeClr val="lt1"/>
+          </a:fontRef>
+        </p:style>
+        <p:txBody>
+          <a:bodyPr rtlCol="0" anchor="ctr"/>
+          <a:lstStyle/>
+          <a:p>
+            <a:pPr algn="ctr"/>
+          </a:p>
+        </p:txBody>
+      </p:sp>
+      <p:sp>
+        <p:nvSpPr>
+          <p:cNvPr id="5" name="TextBox 4"/>
+          <p:cNvSpPr txBox="1"/>
+          <p:nvPr/>
+        </p:nvSpPr>
+        <p:spPr>
+          <a:xfrm>
+            <a:off x="457200" y="274320"/>
+            <a:ext cx="10972800" cy="411480"/>
+          </a:xfrm>
+          <a:prstGeom prst="rect">
+            <a:avLst/>
+          </a:prstGeom>
+          <a:noFill/>
+        </p:spPr>
+        <p:txBody>
+          <a:bodyPr wrap="square">
+            <a:spAutoFit/>
+          </a:bodyPr>
+          <a:lstStyle/>
+          <a:p>
+            <a:pPr algn="l"/>
+            <a:r>
+              <a:rPr sz="2600" b="1">
+                <a:solidFill>
+                  <a:srgbClr val="FFFFFF"/>
+                </a:solidFill>
+                <a:latin typeface="Arial"/>
+              </a:rPr>
+              <a:t>EXECUÇÃO ASSISTIDA</a:t>
+            </a:r>
+          </a:p>
+        </p:txBody>
+      </p:sp>
+      <p:sp>
+        <p:nvSpPr>
+          <p:cNvPr id="6" name="TextBox 5"/>
+          <p:cNvSpPr txBox="1"/>
+          <p:nvPr/>
+        </p:nvSpPr>
+        <p:spPr>
+          <a:xfrm>
+            <a:off x="457200" y="777240"/>
+            <a:ext cx="10972800" cy="320040"/>
+          </a:xfrm>
+          <a:prstGeom prst="rect">
+            <a:avLst/>
+          </a:prstGeom>
+          <a:noFill/>
+        </p:spPr>
+        <p:txBody>
+          <a:bodyPr wrap="square">
+            <a:spAutoFit/>
+          </a:bodyPr>
+          <a:lstStyle/>
+          <a:p>
+            <a:pPr algn="l"/>
+            <a:r>
+              <a:rPr sz="1300" b="0">
+                <a:solidFill>
+                  <a:srgbClr val="CC0000"/>
+                </a:solidFill>
+                <a:latin typeface="Arial"/>
+              </a:rPr>
+              <a:t>Incluso no EQV: LP · Tracking · WhatsApp (MQL → SQL → Vendas)</a:t>
+            </a:r>
+          </a:p>
+        </p:txBody>
+      </p:sp>
+      <p:sp>
+        <p:nvSpPr>
+          <p:cNvPr id="7" name="Rounded Rectangle 6"/>
+          <p:cNvSpPr/>
+          <p:nvPr/>
+        </p:nvSpPr>
+        <p:spPr>
+          <a:xfrm>
+            <a:off x="320040" y="1280160"/>
+            <a:ext cx="2788920" cy="4937760"/>
+          </a:xfrm>
+          <a:prstGeom prst="roundRect">
+            <a:avLst/>
+          </a:prstGeom>
+          <a:solidFill>
+            <a:srgbClr val="1F1F1F"/>
+          </a:solidFill>
+          <a:ln>
+            <a:solidFill>
+              <a:srgbClr val="4A1010"/>
+            </a:solidFill>
+          </a:ln>
+        </p:spPr>
+        <p:style>
+          <a:lnRef idx="1">
+            <a:schemeClr val="accent1"/>
+          </a:lnRef>
+          <a:fillRef idx="3">
+            <a:schemeClr val="accent1"/>
+          </a:fillRef>
+          <a:effectRef idx="2">
+            <a:schemeClr val="accent1"/>
+          </a:effectRef>
+          <a:fontRef idx="minor">
+            <a:schemeClr val="lt1"/>
+          </a:fontRef>
+        </p:style>
+        <p:txBody>
+          <a:bodyPr rtlCol="0" anchor="ctr"/>
+          <a:lstStyle/>
+          <a:p>
+            <a:pPr algn="ctr"/>
+          </a:p>
+        </p:txBody>
+      </p:sp>
+      <p:sp>
+        <p:nvSpPr>
+          <p:cNvPr id="8" name="TextBox 7"/>
+          <p:cNvSpPr txBox="1"/>
+          <p:nvPr/>
+        </p:nvSpPr>
+        <p:spPr>
+          <a:xfrm>
+            <a:off x="502920" y="1463040"/>
+            <a:ext cx="2468880" cy="320040"/>
+          </a:xfrm>
+          <a:prstGeom prst="rect">
+            <a:avLst/>
+          </a:prstGeom>
+          <a:noFill/>
+        </p:spPr>
+        <p:txBody>
+          <a:bodyPr wrap="square">
+            <a:spAutoFit/>
+          </a:bodyPr>
+          <a:lstStyle/>
+          <a:p>
+            <a:pPr algn="l"/>
+            <a:r>
+              <a:rPr sz="1400" b="1">
+                <a:solidFill>
+                  <a:srgbClr val="CC0000"/>
+                </a:solidFill>
+                <a:latin typeface="Arial"/>
+              </a:rPr>
+              <a:t>CONTEÚDO</a:t>
+            </a:r>
+          </a:p>
+        </p:txBody>
+      </p:sp>
+      <p:sp>
+        <p:nvSpPr>
+          <p:cNvPr id="9" name="TextBox 8"/>
+          <p:cNvSpPr txBox="1"/>
+          <p:nvPr/>
+        </p:nvSpPr>
+        <p:spPr>
+          <a:xfrm>
+            <a:off x="502920" y="2011680"/>
+            <a:ext cx="2468880" cy="3840480"/>
+          </a:xfrm>
+          <a:prstGeom prst="rect">
+            <a:avLst/>
+          </a:prstGeom>
+          <a:noFill/>
+        </p:spPr>
+        <p:txBody>
+          <a:bodyPr wrap="square">
+            <a:spAutoFit/>
+          </a:bodyPr>
+          <a:lstStyle/>
+          <a:p>
+            <a:pPr algn="l"/>
+            <a:r>
+              <a:rPr sz="1300" b="0">
+                <a:solidFill>
+                  <a:srgbClr val="C2C2C2"/>
+                </a:solidFill>
+                <a:latin typeface="Arial"/>
+              </a:rPr>
+              <a:t>Roteiro de vídeo viral</a:t>
+            </a:r>
+          </a:p>
+          <a:p>
+            <a:pPr algn="l"/>
+            <a:r>
+              <a:rPr sz="1300" b="0">
+                <a:solidFill>
+                  <a:srgbClr val="C2C2C2"/>
+                </a:solidFill>
+                <a:latin typeface="Arial"/>
+              </a:rPr>
+              <a:t>Briefing de posts Instagram</a:t>
+            </a:r>
+          </a:p>
+          <a:p>
+            <a:pPr algn="l"/>
+            <a:r>
+              <a:rPr sz="1300" b="0">
+                <a:solidFill>
+                  <a:srgbClr val="C2C2C2"/>
+                </a:solidFill>
+                <a:latin typeface="Arial"/>
+              </a:rPr>
+              <a:t>Suporte à produção e publicação</a:t>
+            </a:r>
+          </a:p>
+        </p:txBody>
+      </p:sp>
+      <p:sp>
+        <p:nvSpPr>
+          <p:cNvPr id="10" name="Rounded Rectangle 9"/>
+          <p:cNvSpPr/>
+          <p:nvPr/>
+        </p:nvSpPr>
+        <p:spPr>
+          <a:xfrm>
+            <a:off x="3246120" y="1280160"/>
+            <a:ext cx="2788920" cy="4937760"/>
+          </a:xfrm>
+          <a:prstGeom prst="roundRect">
+            <a:avLst/>
+          </a:prstGeom>
+          <a:solidFill>
+            <a:srgbClr val="1F1F1F"/>
+          </a:solidFill>
+          <a:ln>
+            <a:solidFill>
+              <a:srgbClr val="4A1010"/>
+            </a:solidFill>
+          </a:ln>
+        </p:spPr>
+        <p:style>
+          <a:lnRef idx="1">
+            <a:schemeClr val="accent1"/>
+          </a:lnRef>
+          <a:fillRef idx="3">
+            <a:schemeClr val="accent1"/>
+          </a:fillRef>
+          <a:effectRef idx="2">
+            <a:schemeClr val="accent1"/>
+          </a:effectRef>
+          <a:fontRef idx="minor">
+            <a:schemeClr val="lt1"/>
+          </a:fontRef>
+        </p:style>
+        <p:txBody>
+          <a:bodyPr rtlCol="0" anchor="ctr"/>
+          <a:lstStyle/>
+          <a:p>
+            <a:pPr algn="ctr"/>
+          </a:p>
+        </p:txBody>
+      </p:sp>
+      <p:sp>
+        <p:nvSpPr>
+          <p:cNvPr id="11" name="TextBox 10"/>
+          <p:cNvSpPr txBox="1"/>
+          <p:nvPr/>
+        </p:nvSpPr>
+        <p:spPr>
+          <a:xfrm>
+            <a:off x="3429000" y="1463040"/>
+            <a:ext cx="2468880" cy="320040"/>
+          </a:xfrm>
+          <a:prstGeom prst="rect">
+            <a:avLst/>
+          </a:prstGeom>
+          <a:noFill/>
+        </p:spPr>
+        <p:txBody>
+          <a:bodyPr wrap="square">
+            <a:spAutoFit/>
+          </a:bodyPr>
+          <a:lstStyle/>
+          <a:p>
+            <a:pPr algn="l"/>
+            <a:r>
+              <a:rPr sz="1400" b="1">
+                <a:solidFill>
+                  <a:srgbClr val="CC0000"/>
+                </a:solidFill>
+                <a:latin typeface="Arial"/>
+              </a:rPr>
+              <a:t>MÍDIA PAGA</a:t>
+            </a:r>
+          </a:p>
+        </p:txBody>
+      </p:sp>
+      <p:sp>
+        <p:nvSpPr>
+          <p:cNvPr id="12" name="TextBox 11"/>
+          <p:cNvSpPr txBox="1"/>
+          <p:nvPr/>
+        </p:nvSpPr>
+        <p:spPr>
+          <a:xfrm>
+            <a:off x="3429000" y="2011680"/>
+            <a:ext cx="2468880" cy="3840480"/>
+          </a:xfrm>
+          <a:prstGeom prst="rect">
+            <a:avLst/>
+          </a:prstGeom>
+          <a:noFill/>
+        </p:spPr>
+        <p:txBody>
+          <a:bodyPr wrap="square">
+            <a:spAutoFit/>
+          </a:bodyPr>
+          <a:lstStyle/>
+          <a:p>
+            <a:pPr algn="l"/>
+            <a:r>
+              <a:rPr sz="1300" b="0">
+                <a:solidFill>
+                  <a:srgbClr val="C2C2C2"/>
+                </a:solidFill>
+                <a:latin typeface="Arial"/>
+              </a:rPr>
+              <a:t>Gestão Meta / Google</a:t>
+            </a:r>
+          </a:p>
+          <a:p>
+            <a:pPr algn="l"/>
+            <a:r>
+              <a:rPr sz="1300" b="0">
+                <a:solidFill>
+                  <a:srgbClr val="C2C2C2"/>
+                </a:solidFill>
+                <a:latin typeface="Arial"/>
+              </a:rPr>
+              <a:t>Segmentação, pixel, dados</a:t>
+            </a:r>
+          </a:p>
+          <a:p>
+            <a:pPr algn="l"/>
+            <a:r>
+              <a:rPr sz="1300" b="0">
+                <a:solidFill>
+                  <a:srgbClr val="C2C2C2"/>
+                </a:solidFill>
+                <a:latin typeface="Arial"/>
+              </a:rPr>
+              <a:t>Decisão por ROAS e CPL</a:t>
+            </a:r>
+          </a:p>
+          <a:p>
+            <a:pPr algn="l"/>
+            <a:r>
+              <a:rPr sz="1300" b="0">
+                <a:solidFill>
+                  <a:srgbClr val="C2C2C2"/>
+                </a:solidFill>
+                <a:latin typeface="Arial"/>
+              </a:rPr>
+              <a:t>Tracking + rastreamento</a:t>
+            </a:r>
+          </a:p>
+          <a:p>
+            <a:pPr algn="l"/>
+            <a:r>
+              <a:rPr sz="1300" b="0">
+                <a:solidFill>
+                  <a:srgbClr val="C2C2C2"/>
+                </a:solidFill>
+                <a:latin typeface="Arial"/>
+              </a:rPr>
+              <a:t>Implementação de Landing Page</a:t>
+            </a:r>
+          </a:p>
+        </p:txBody>
+      </p:sp>
+      <p:sp>
+        <p:nvSpPr>
+          <p:cNvPr id="13" name="Rounded Rectangle 12"/>
+          <p:cNvSpPr/>
+          <p:nvPr/>
+        </p:nvSpPr>
+        <p:spPr>
+          <a:xfrm>
+            <a:off x="6172200" y="1280160"/>
+            <a:ext cx="2788920" cy="4937760"/>
+          </a:xfrm>
+          <a:prstGeom prst="roundRect">
+            <a:avLst/>
+          </a:prstGeom>
+          <a:solidFill>
+            <a:srgbClr val="1F1F1F"/>
+          </a:solidFill>
+          <a:ln>
+            <a:solidFill>
+              <a:srgbClr val="4A1010"/>
+            </a:solidFill>
+          </a:ln>
+        </p:spPr>
+        <p:style>
+          <a:lnRef idx="1">
+            <a:schemeClr val="accent1"/>
+          </a:lnRef>
+          <a:fillRef idx="3">
+            <a:schemeClr val="accent1"/>
+          </a:fillRef>
+          <a:effectRef idx="2">
+            <a:schemeClr val="accent1"/>
+          </a:effectRef>
+          <a:fontRef idx="minor">
+            <a:schemeClr val="lt1"/>
+          </a:fontRef>
+        </p:style>
+        <p:txBody>
+          <a:bodyPr rtlCol="0" anchor="ctr"/>
+          <a:lstStyle/>
+          <a:p>
+            <a:pPr algn="ctr"/>
+          </a:p>
+        </p:txBody>
+      </p:sp>
+      <p:sp>
+        <p:nvSpPr>
+          <p:cNvPr id="14" name="TextBox 13"/>
+          <p:cNvSpPr txBox="1"/>
+          <p:nvPr/>
+        </p:nvSpPr>
+        <p:spPr>
+          <a:xfrm>
+            <a:off x="6355080" y="1463040"/>
+            <a:ext cx="2468880" cy="320040"/>
+          </a:xfrm>
+          <a:prstGeom prst="rect">
+            <a:avLst/>
+          </a:prstGeom>
+          <a:noFill/>
+        </p:spPr>
+        <p:txBody>
+          <a:bodyPr wrap="square">
+            <a:spAutoFit/>
+          </a:bodyPr>
+          <a:lstStyle/>
+          <a:p>
+            <a:pPr algn="l"/>
+            <a:r>
+              <a:rPr sz="1400" b="1">
+                <a:solidFill>
+                  <a:srgbClr val="CC0000"/>
+                </a:solidFill>
+                <a:latin typeface="Arial"/>
+              </a:rPr>
+              <a:t>COMERCIAL</a:t>
+            </a:r>
+          </a:p>
+        </p:txBody>
+      </p:sp>
+      <p:sp>
+        <p:nvSpPr>
+          <p:cNvPr id="15" name="TextBox 14"/>
+          <p:cNvSpPr txBox="1"/>
+          <p:nvPr/>
+        </p:nvSpPr>
+        <p:spPr>
+          <a:xfrm>
+            <a:off x="6355080" y="2011680"/>
+            <a:ext cx="2468880" cy="3840480"/>
+          </a:xfrm>
+          <a:prstGeom prst="rect">
+            <a:avLst/>
+          </a:prstGeom>
+          <a:noFill/>
+        </p:spPr>
+        <p:txBody>
+          <a:bodyPr wrap="square">
+            <a:spAutoFit/>
+          </a:bodyPr>
+          <a:lstStyle/>
+          <a:p>
+            <a:pPr algn="l"/>
+            <a:r>
+              <a:rPr sz="1300" b="0">
+                <a:solidFill>
+                  <a:srgbClr val="C2C2C2"/>
+                </a:solidFill>
+                <a:latin typeface="Arial"/>
+              </a:rPr>
+              <a:t>Revisão de scripts + objeções</a:t>
+            </a:r>
+          </a:p>
+          <a:p>
+            <a:pPr algn="l"/>
+            <a:r>
+              <a:rPr sz="1300" b="0">
+                <a:solidFill>
+                  <a:srgbClr val="C2C2C2"/>
+                </a:solidFill>
+                <a:latin typeface="Arial"/>
+              </a:rPr>
+              <a:t>Role play com vendedores</a:t>
+            </a:r>
+          </a:p>
+          <a:p>
+            <a:pPr algn="l"/>
+            <a:r>
+              <a:rPr sz="1300" b="0">
+                <a:solidFill>
+                  <a:srgbClr val="C2C2C2"/>
+                </a:solidFill>
+                <a:latin typeface="Arial"/>
+              </a:rPr>
+              <a:t>Réguas de follow-up</a:t>
+            </a:r>
+          </a:p>
+        </p:txBody>
+      </p:sp>
+      <p:sp>
+        <p:nvSpPr>
+          <p:cNvPr id="16" name="Rounded Rectangle 15"/>
+          <p:cNvSpPr/>
+          <p:nvPr/>
+        </p:nvSpPr>
+        <p:spPr>
+          <a:xfrm>
+            <a:off x="9098280" y="1280160"/>
+            <a:ext cx="2788920" cy="4937760"/>
+          </a:xfrm>
+          <a:prstGeom prst="roundRect">
+            <a:avLst/>
+          </a:prstGeom>
+          <a:solidFill>
+            <a:srgbClr val="1F1F1F"/>
+          </a:solidFill>
+          <a:ln>
+            <a:solidFill>
+              <a:srgbClr val="4A1010"/>
+            </a:solidFill>
+          </a:ln>
+        </p:spPr>
+        <p:style>
+          <a:lnRef idx="1">
+            <a:schemeClr val="accent1"/>
+          </a:lnRef>
+          <a:fillRef idx="3">
+            <a:schemeClr val="accent1"/>
+          </a:fillRef>
+          <a:effectRef idx="2">
+            <a:schemeClr val="accent1"/>
+          </a:effectRef>
+          <a:fontRef idx="minor">
+            <a:schemeClr val="lt1"/>
+          </a:fontRef>
+        </p:style>
+        <p:txBody>
+          <a:bodyPr rtlCol="0" anchor="ctr"/>
+          <a:lstStyle/>
+          <a:p>
+            <a:pPr algn="ctr"/>
+          </a:p>
+        </p:txBody>
+      </p:sp>
+      <p:sp>
+        <p:nvSpPr>
+          <p:cNvPr id="17" name="TextBox 16"/>
+          <p:cNvSpPr txBox="1"/>
+          <p:nvPr/>
+        </p:nvSpPr>
+        <p:spPr>
+          <a:xfrm>
+            <a:off x="9281160" y="1463040"/>
+            <a:ext cx="2468880" cy="320040"/>
+          </a:xfrm>
+          <a:prstGeom prst="rect">
+            <a:avLst/>
+          </a:prstGeom>
+          <a:noFill/>
+        </p:spPr>
+        <p:txBody>
+          <a:bodyPr wrap="square">
+            <a:spAutoFit/>
+          </a:bodyPr>
+          <a:lstStyle/>
+          <a:p>
+            <a:pPr algn="l"/>
+            <a:r>
+              <a:rPr sz="1400" b="1">
+                <a:solidFill>
+                  <a:srgbClr val="CC0000"/>
+                </a:solidFill>
+                <a:latin typeface="Arial"/>
+              </a:rPr>
+              <a:t>CRM</a:t>
+            </a:r>
+          </a:p>
+        </p:txBody>
+      </p:sp>
+      <p:sp>
+        <p:nvSpPr>
+          <p:cNvPr id="18" name="TextBox 17"/>
+          <p:cNvSpPr txBox="1"/>
+          <p:nvPr/>
+        </p:nvSpPr>
+        <p:spPr>
+          <a:xfrm>
+            <a:off x="9281160" y="2011680"/>
+            <a:ext cx="2468880" cy="3840480"/>
+          </a:xfrm>
+          <a:prstGeom prst="rect">
+            <a:avLst/>
+          </a:prstGeom>
+          <a:noFill/>
+        </p:spPr>
+        <p:txBody>
+          <a:bodyPr wrap="square">
+            <a:spAutoFit/>
+          </a:bodyPr>
+          <a:lstStyle/>
+          <a:p>
+            <a:pPr algn="l"/>
+            <a:r>
+              <a:rPr sz="1300" b="0">
+                <a:solidFill>
+                  <a:srgbClr val="C2C2C2"/>
+                </a:solidFill>
+                <a:latin typeface="Arial"/>
+              </a:rPr>
+              <a:t>CRM ativo e manutenção</a:t>
+            </a:r>
+          </a:p>
+          <a:p>
+            <a:pPr algn="l"/>
+            <a:r>
+              <a:rPr sz="1300" b="0">
+                <a:solidFill>
+                  <a:srgbClr val="C2C2C2"/>
+                </a:solidFill>
+                <a:latin typeface="Arial"/>
+              </a:rPr>
+              <a:t>Cadências e automações</a:t>
+            </a:r>
+          </a:p>
+          <a:p>
+            <a:pPr algn="l"/>
+            <a:r>
+              <a:rPr sz="1300" b="0">
+                <a:solidFill>
+                  <a:srgbClr val="C2C2C2"/>
+                </a:solidFill>
+                <a:latin typeface="Arial"/>
+              </a:rPr>
+              <a:t>Pipeline e conversão</a:t>
+            </a:r>
+          </a:p>
+          <a:p>
+            <a:pPr algn="l"/>
+            <a:r>
+              <a:rPr sz="1300" b="0">
+                <a:solidFill>
+                  <a:srgbClr val="C2C2C2"/>
+                </a:solidFill>
+                <a:latin typeface="Arial"/>
+              </a:rPr>
+              <a:t>Tracking WhatsApp (MQL → SQL → Vendas)</a:t>
+            </a:r>
+          </a:p>
+        </p:txBody>
+      </p:sp>
     </p:spTree>
   </p:cSld>
   <p:clrMapOvr>
@@ -3476,30 +8746,955 @@
         <p:nvPr/>
       </p:nvGrpSpPr>
       <p:grpSpPr/>
-      <p:pic>
-        <p:nvPicPr>
-          <p:cNvPr id="2" name="Picture 1" descr="slide_08.png"/>
-          <p:cNvPicPr>
-            <a:picLocks noChangeAspect="1"/>
-          </p:cNvPicPr>
-          <p:nvPr/>
-        </p:nvPicPr>
-        <p:blipFill>
-          <a:blip r:embed="rId2"/>
-          <a:stretch>
-            <a:fillRect/>
-          </a:stretch>
-        </p:blipFill>
+      <p:sp>
+        <p:nvSpPr>
+          <p:cNvPr id="2" name="Rectangle 1"/>
+          <p:cNvSpPr/>
+          <p:nvPr/>
+        </p:nvSpPr>
         <p:spPr>
           <a:xfrm>
             <a:off x="0" y="0"/>
-            <a:ext cx="6858000" cy="3857625"/>
-          </a:xfrm>
-          <a:prstGeom prst="rect">
-            <a:avLst/>
-          </a:prstGeom>
-        </p:spPr>
-      </p:pic>
+            <a:ext cx="12191695" cy="6858000"/>
+          </a:xfrm>
+          <a:prstGeom prst="rect">
+            <a:avLst/>
+          </a:prstGeom>
+          <a:solidFill>
+            <a:srgbClr val="0D0D0D"/>
+          </a:solidFill>
+          <a:ln>
+            <a:noFill/>
+          </a:ln>
+        </p:spPr>
+        <p:style>
+          <a:lnRef idx="1">
+            <a:schemeClr val="accent1"/>
+          </a:lnRef>
+          <a:fillRef idx="3">
+            <a:schemeClr val="accent1"/>
+          </a:fillRef>
+          <a:effectRef idx="2">
+            <a:schemeClr val="accent1"/>
+          </a:effectRef>
+          <a:fontRef idx="minor">
+            <a:schemeClr val="lt1"/>
+          </a:fontRef>
+        </p:style>
+        <p:txBody>
+          <a:bodyPr rtlCol="0" anchor="ctr"/>
+          <a:lstStyle/>
+          <a:p>
+            <a:pPr algn="ctr"/>
+          </a:p>
+        </p:txBody>
+      </p:sp>
+      <p:sp>
+        <p:nvSpPr>
+          <p:cNvPr id="3" name="Oval 2"/>
+          <p:cNvSpPr/>
+          <p:nvPr/>
+        </p:nvSpPr>
+        <p:spPr>
+          <a:xfrm>
+            <a:off x="-1828800" y="-1371600"/>
+            <a:ext cx="4572000" cy="4572000"/>
+          </a:xfrm>
+          <a:prstGeom prst="ellipse">
+            <a:avLst/>
+          </a:prstGeom>
+          <a:solidFill>
+            <a:srgbClr val="3C0909"/>
+          </a:solidFill>
+          <a:ln>
+            <a:noFill/>
+          </a:ln>
+        </p:spPr>
+        <p:style>
+          <a:lnRef idx="1">
+            <a:schemeClr val="accent1"/>
+          </a:lnRef>
+          <a:fillRef idx="3">
+            <a:schemeClr val="accent1"/>
+          </a:fillRef>
+          <a:effectRef idx="2">
+            <a:schemeClr val="accent1"/>
+          </a:effectRef>
+          <a:fontRef idx="minor">
+            <a:schemeClr val="lt1"/>
+          </a:fontRef>
+        </p:style>
+        <p:txBody>
+          <a:bodyPr rtlCol="0" anchor="ctr"/>
+          <a:lstStyle/>
+          <a:p>
+            <a:pPr algn="ctr"/>
+          </a:p>
+        </p:txBody>
+      </p:sp>
+      <p:sp>
+        <p:nvSpPr>
+          <p:cNvPr id="4" name="Oval 3"/>
+          <p:cNvSpPr/>
+          <p:nvPr/>
+        </p:nvSpPr>
+        <p:spPr>
+          <a:xfrm>
+            <a:off x="9144000" y="3657600"/>
+            <a:ext cx="4114800" cy="4114800"/>
+          </a:xfrm>
+          <a:prstGeom prst="ellipse">
+            <a:avLst/>
+          </a:prstGeom>
+          <a:solidFill>
+            <a:srgbClr val="3C0909"/>
+          </a:solidFill>
+          <a:ln>
+            <a:noFill/>
+          </a:ln>
+        </p:spPr>
+        <p:style>
+          <a:lnRef idx="1">
+            <a:schemeClr val="accent1"/>
+          </a:lnRef>
+          <a:fillRef idx="3">
+            <a:schemeClr val="accent1"/>
+          </a:fillRef>
+          <a:effectRef idx="2">
+            <a:schemeClr val="accent1"/>
+          </a:effectRef>
+          <a:fontRef idx="minor">
+            <a:schemeClr val="lt1"/>
+          </a:fontRef>
+        </p:style>
+        <p:txBody>
+          <a:bodyPr rtlCol="0" anchor="ctr"/>
+          <a:lstStyle/>
+          <a:p>
+            <a:pPr algn="ctr"/>
+          </a:p>
+        </p:txBody>
+      </p:sp>
+      <p:sp>
+        <p:nvSpPr>
+          <p:cNvPr id="5" name="TextBox 4"/>
+          <p:cNvSpPr txBox="1"/>
+          <p:nvPr/>
+        </p:nvSpPr>
+        <p:spPr>
+          <a:xfrm>
+            <a:off x="457200" y="320040"/>
+            <a:ext cx="10972800" cy="411480"/>
+          </a:xfrm>
+          <a:prstGeom prst="rect">
+            <a:avLst/>
+          </a:prstGeom>
+          <a:noFill/>
+        </p:spPr>
+        <p:txBody>
+          <a:bodyPr wrap="square">
+            <a:spAutoFit/>
+          </a:bodyPr>
+          <a:lstStyle/>
+          <a:p>
+            <a:pPr algn="l"/>
+            <a:r>
+              <a:rPr sz="2800" b="1">
+                <a:solidFill>
+                  <a:srgbClr val="FFFFFF"/>
+                </a:solidFill>
+                <a:latin typeface="Arial"/>
+              </a:rPr>
+              <a:t>A JORNADA</a:t>
+            </a:r>
+          </a:p>
+        </p:txBody>
+      </p:sp>
+      <p:sp>
+        <p:nvSpPr>
+          <p:cNvPr id="6" name="TextBox 5"/>
+          <p:cNvSpPr txBox="1"/>
+          <p:nvPr/>
+        </p:nvSpPr>
+        <p:spPr>
+          <a:xfrm>
+            <a:off x="457200" y="868680"/>
+            <a:ext cx="10972800" cy="320040"/>
+          </a:xfrm>
+          <a:prstGeom prst="rect">
+            <a:avLst/>
+          </a:prstGeom>
+          <a:noFill/>
+        </p:spPr>
+        <p:txBody>
+          <a:bodyPr wrap="square">
+            <a:spAutoFit/>
+          </a:bodyPr>
+          <a:lstStyle/>
+          <a:p>
+            <a:pPr algn="l"/>
+            <a:r>
+              <a:rPr sz="1400" b="0">
+                <a:solidFill>
+                  <a:srgbClr val="C2C2C2"/>
+                </a:solidFill>
+                <a:latin typeface="Arial"/>
+              </a:rPr>
+              <a:t>5 fases em 6 meses — ciclo contínuo de crescimento</a:t>
+            </a:r>
+          </a:p>
+        </p:txBody>
+      </p:sp>
+      <p:sp>
+        <p:nvSpPr>
+          <p:cNvPr id="7" name="Rounded Rectangle 6"/>
+          <p:cNvSpPr/>
+          <p:nvPr/>
+        </p:nvSpPr>
+        <p:spPr>
+          <a:xfrm>
+            <a:off x="320040" y="1554480"/>
+            <a:ext cx="2194560" cy="3931920"/>
+          </a:xfrm>
+          <a:prstGeom prst="roundRect">
+            <a:avLst/>
+          </a:prstGeom>
+          <a:solidFill>
+            <a:srgbClr val="1F1F1F"/>
+          </a:solidFill>
+          <a:ln>
+            <a:solidFill>
+              <a:srgbClr val="4A1010"/>
+            </a:solidFill>
+          </a:ln>
+        </p:spPr>
+        <p:style>
+          <a:lnRef idx="1">
+            <a:schemeClr val="accent1"/>
+          </a:lnRef>
+          <a:fillRef idx="3">
+            <a:schemeClr val="accent1"/>
+          </a:fillRef>
+          <a:effectRef idx="2">
+            <a:schemeClr val="accent1"/>
+          </a:effectRef>
+          <a:fontRef idx="minor">
+            <a:schemeClr val="lt1"/>
+          </a:fontRef>
+        </p:style>
+        <p:txBody>
+          <a:bodyPr rtlCol="0" anchor="ctr"/>
+          <a:lstStyle/>
+          <a:p>
+            <a:pPr algn="ctr"/>
+          </a:p>
+        </p:txBody>
+      </p:sp>
+      <p:sp>
+        <p:nvSpPr>
+          <p:cNvPr id="8" name="TextBox 7"/>
+          <p:cNvSpPr txBox="1"/>
+          <p:nvPr/>
+        </p:nvSpPr>
+        <p:spPr>
+          <a:xfrm>
+            <a:off x="457200" y="1737360"/>
+            <a:ext cx="1920240" cy="274320"/>
+          </a:xfrm>
+          <a:prstGeom prst="rect">
+            <a:avLst/>
+          </a:prstGeom>
+          <a:noFill/>
+        </p:spPr>
+        <p:txBody>
+          <a:bodyPr wrap="square">
+            <a:spAutoFit/>
+          </a:bodyPr>
+          <a:lstStyle/>
+          <a:p>
+            <a:pPr algn="l"/>
+            <a:r>
+              <a:rPr sz="1100" b="0">
+                <a:solidFill>
+                  <a:srgbClr val="C2C2C2"/>
+                </a:solidFill>
+                <a:latin typeface="Arial"/>
+              </a:rPr>
+              <a:t>MÊS 1</a:t>
+            </a:r>
+          </a:p>
+        </p:txBody>
+      </p:sp>
+      <p:sp>
+        <p:nvSpPr>
+          <p:cNvPr id="9" name="TextBox 8"/>
+          <p:cNvSpPr txBox="1"/>
+          <p:nvPr/>
+        </p:nvSpPr>
+        <p:spPr>
+          <a:xfrm>
+            <a:off x="457200" y="2286000"/>
+            <a:ext cx="1920240" cy="914400"/>
+          </a:xfrm>
+          <a:prstGeom prst="rect">
+            <a:avLst/>
+          </a:prstGeom>
+          <a:noFill/>
+        </p:spPr>
+        <p:txBody>
+          <a:bodyPr wrap="square">
+            <a:spAutoFit/>
+          </a:bodyPr>
+          <a:lstStyle/>
+          <a:p>
+            <a:pPr algn="l"/>
+            <a:r>
+              <a:rPr sz="1500" b="1">
+                <a:solidFill>
+                  <a:srgbClr val="FFFFFF"/>
+                </a:solidFill>
+                <a:latin typeface="Arial"/>
+              </a:rPr>
+              <a:t>Onboarding + Diagnóstico</a:t>
+            </a:r>
+          </a:p>
+        </p:txBody>
+      </p:sp>
+      <p:sp>
+        <p:nvSpPr>
+          <p:cNvPr id="10" name="TextBox 9"/>
+          <p:cNvSpPr txBox="1"/>
+          <p:nvPr/>
+        </p:nvSpPr>
+        <p:spPr>
+          <a:xfrm>
+            <a:off x="457200" y="3474720"/>
+            <a:ext cx="1920240" cy="1645920"/>
+          </a:xfrm>
+          <a:prstGeom prst="rect">
+            <a:avLst/>
+          </a:prstGeom>
+          <a:noFill/>
+        </p:spPr>
+        <p:txBody>
+          <a:bodyPr wrap="square">
+            <a:spAutoFit/>
+          </a:bodyPr>
+          <a:lstStyle/>
+          <a:p>
+            <a:pPr algn="l"/>
+            <a:r>
+              <a:rPr sz="1300" b="0">
+                <a:solidFill>
+                  <a:srgbClr val="C2C2C2"/>
+                </a:solidFill>
+                <a:latin typeface="Arial"/>
+              </a:rPr>
+              <a:t>Kickoff, GTM, LP, tracking e prioridades.</a:t>
+            </a:r>
+          </a:p>
+        </p:txBody>
+      </p:sp>
+      <p:sp>
+        <p:nvSpPr>
+          <p:cNvPr id="11" name="Rounded Rectangle 10"/>
+          <p:cNvSpPr/>
+          <p:nvPr/>
+        </p:nvSpPr>
+        <p:spPr>
+          <a:xfrm>
+            <a:off x="2651760" y="1554480"/>
+            <a:ext cx="2194560" cy="3931920"/>
+          </a:xfrm>
+          <a:prstGeom prst="roundRect">
+            <a:avLst/>
+          </a:prstGeom>
+          <a:solidFill>
+            <a:srgbClr val="1F1F1F"/>
+          </a:solidFill>
+          <a:ln>
+            <a:solidFill>
+              <a:srgbClr val="4A1010"/>
+            </a:solidFill>
+          </a:ln>
+        </p:spPr>
+        <p:style>
+          <a:lnRef idx="1">
+            <a:schemeClr val="accent1"/>
+          </a:lnRef>
+          <a:fillRef idx="3">
+            <a:schemeClr val="accent1"/>
+          </a:fillRef>
+          <a:effectRef idx="2">
+            <a:schemeClr val="accent1"/>
+          </a:effectRef>
+          <a:fontRef idx="minor">
+            <a:schemeClr val="lt1"/>
+          </a:fontRef>
+        </p:style>
+        <p:txBody>
+          <a:bodyPr rtlCol="0" anchor="ctr"/>
+          <a:lstStyle/>
+          <a:p>
+            <a:pPr algn="ctr"/>
+          </a:p>
+        </p:txBody>
+      </p:sp>
+      <p:sp>
+        <p:nvSpPr>
+          <p:cNvPr id="12" name="TextBox 11"/>
+          <p:cNvSpPr txBox="1"/>
+          <p:nvPr/>
+        </p:nvSpPr>
+        <p:spPr>
+          <a:xfrm>
+            <a:off x="2788920" y="1737360"/>
+            <a:ext cx="1920240" cy="274320"/>
+          </a:xfrm>
+          <a:prstGeom prst="rect">
+            <a:avLst/>
+          </a:prstGeom>
+          <a:noFill/>
+        </p:spPr>
+        <p:txBody>
+          <a:bodyPr wrap="square">
+            <a:spAutoFit/>
+          </a:bodyPr>
+          <a:lstStyle/>
+          <a:p>
+            <a:pPr algn="l"/>
+            <a:r>
+              <a:rPr sz="1100" b="0">
+                <a:solidFill>
+                  <a:srgbClr val="C2C2C2"/>
+                </a:solidFill>
+                <a:latin typeface="Arial"/>
+              </a:rPr>
+              <a:t>MÊS 2</a:t>
+            </a:r>
+          </a:p>
+        </p:txBody>
+      </p:sp>
+      <p:sp>
+        <p:nvSpPr>
+          <p:cNvPr id="13" name="TextBox 12"/>
+          <p:cNvSpPr txBox="1"/>
+          <p:nvPr/>
+        </p:nvSpPr>
+        <p:spPr>
+          <a:xfrm>
+            <a:off x="2788920" y="2286000"/>
+            <a:ext cx="1920240" cy="914400"/>
+          </a:xfrm>
+          <a:prstGeom prst="rect">
+            <a:avLst/>
+          </a:prstGeom>
+          <a:noFill/>
+        </p:spPr>
+        <p:txBody>
+          <a:bodyPr wrap="square">
+            <a:spAutoFit/>
+          </a:bodyPr>
+          <a:lstStyle/>
+          <a:p>
+            <a:pPr algn="l"/>
+            <a:r>
+              <a:rPr sz="1500" b="1">
+                <a:solidFill>
+                  <a:srgbClr val="FFFFFF"/>
+                </a:solidFill>
+                <a:latin typeface="Arial"/>
+              </a:rPr>
+              <a:t>EE Completa</a:t>
+            </a:r>
+          </a:p>
+        </p:txBody>
+      </p:sp>
+      <p:sp>
+        <p:nvSpPr>
+          <p:cNvPr id="14" name="TextBox 13"/>
+          <p:cNvSpPr txBox="1"/>
+          <p:nvPr/>
+        </p:nvSpPr>
+        <p:spPr>
+          <a:xfrm>
+            <a:off x="2788920" y="3474720"/>
+            <a:ext cx="1920240" cy="1645920"/>
+          </a:xfrm>
+          <a:prstGeom prst="rect">
+            <a:avLst/>
+          </a:prstGeom>
+          <a:noFill/>
+        </p:spPr>
+        <p:txBody>
+          <a:bodyPr wrap="square">
+            <a:spAutoFit/>
+          </a:bodyPr>
+          <a:lstStyle/>
+          <a:p>
+            <a:pPr algn="l"/>
+            <a:r>
+              <a:rPr sz="1300" b="0">
+                <a:solidFill>
+                  <a:srgbClr val="C2C2C2"/>
+                </a:solidFill>
+                <a:latin typeface="Arial"/>
+              </a:rPr>
+              <a:t>3P-IA, posicionamento e canal ativo.</a:t>
+            </a:r>
+          </a:p>
+        </p:txBody>
+      </p:sp>
+      <p:sp>
+        <p:nvSpPr>
+          <p:cNvPr id="15" name="Rounded Rectangle 14"/>
+          <p:cNvSpPr/>
+          <p:nvPr/>
+        </p:nvSpPr>
+        <p:spPr>
+          <a:xfrm>
+            <a:off x="4983479" y="1554480"/>
+            <a:ext cx="2194560" cy="3931920"/>
+          </a:xfrm>
+          <a:prstGeom prst="roundRect">
+            <a:avLst/>
+          </a:prstGeom>
+          <a:solidFill>
+            <a:srgbClr val="1F1F1F"/>
+          </a:solidFill>
+          <a:ln>
+            <a:solidFill>
+              <a:srgbClr val="4A1010"/>
+            </a:solidFill>
+          </a:ln>
+        </p:spPr>
+        <p:style>
+          <a:lnRef idx="1">
+            <a:schemeClr val="accent1"/>
+          </a:lnRef>
+          <a:fillRef idx="3">
+            <a:schemeClr val="accent1"/>
+          </a:fillRef>
+          <a:effectRef idx="2">
+            <a:schemeClr val="accent1"/>
+          </a:effectRef>
+          <a:fontRef idx="minor">
+            <a:schemeClr val="lt1"/>
+          </a:fontRef>
+        </p:style>
+        <p:txBody>
+          <a:bodyPr rtlCol="0" anchor="ctr"/>
+          <a:lstStyle/>
+          <a:p>
+            <a:pPr algn="ctr"/>
+          </a:p>
+        </p:txBody>
+      </p:sp>
+      <p:sp>
+        <p:nvSpPr>
+          <p:cNvPr id="16" name="TextBox 15"/>
+          <p:cNvSpPr txBox="1"/>
+          <p:nvPr/>
+        </p:nvSpPr>
+        <p:spPr>
+          <a:xfrm>
+            <a:off x="5120639" y="1737360"/>
+            <a:ext cx="1920240" cy="274320"/>
+          </a:xfrm>
+          <a:prstGeom prst="rect">
+            <a:avLst/>
+          </a:prstGeom>
+          <a:noFill/>
+        </p:spPr>
+        <p:txBody>
+          <a:bodyPr wrap="square">
+            <a:spAutoFit/>
+          </a:bodyPr>
+          <a:lstStyle/>
+          <a:p>
+            <a:pPr algn="l"/>
+            <a:r>
+              <a:rPr sz="1100" b="0">
+                <a:solidFill>
+                  <a:srgbClr val="C2C2C2"/>
+                </a:solidFill>
+                <a:latin typeface="Arial"/>
+              </a:rPr>
+              <a:t>MÊS 3</a:t>
+            </a:r>
+          </a:p>
+        </p:txBody>
+      </p:sp>
+      <p:sp>
+        <p:nvSpPr>
+          <p:cNvPr id="17" name="TextBox 16"/>
+          <p:cNvSpPr txBox="1"/>
+          <p:nvPr/>
+        </p:nvSpPr>
+        <p:spPr>
+          <a:xfrm>
+            <a:off x="5120639" y="2286000"/>
+            <a:ext cx="1920240" cy="914400"/>
+          </a:xfrm>
+          <a:prstGeom prst="rect">
+            <a:avLst/>
+          </a:prstGeom>
+          <a:noFill/>
+        </p:spPr>
+        <p:txBody>
+          <a:bodyPr wrap="square">
+            <a:spAutoFit/>
+          </a:bodyPr>
+          <a:lstStyle/>
+          <a:p>
+            <a:pPr algn="l"/>
+            <a:r>
+              <a:rPr sz="1500" b="1">
+                <a:solidFill>
+                  <a:srgbClr val="FFFFFF"/>
+                </a:solidFill>
+                <a:latin typeface="Arial"/>
+              </a:rPr>
+              <a:t>Consultoria + Conteúdo</a:t>
+            </a:r>
+          </a:p>
+        </p:txBody>
+      </p:sp>
+      <p:sp>
+        <p:nvSpPr>
+          <p:cNvPr id="18" name="TextBox 17"/>
+          <p:cNvSpPr txBox="1"/>
+          <p:nvPr/>
+        </p:nvSpPr>
+        <p:spPr>
+          <a:xfrm>
+            <a:off x="5120639" y="3474720"/>
+            <a:ext cx="1920240" cy="1645920"/>
+          </a:xfrm>
+          <a:prstGeom prst="rect">
+            <a:avLst/>
+          </a:prstGeom>
+          <a:noFill/>
+        </p:spPr>
+        <p:txBody>
+          <a:bodyPr wrap="square">
+            <a:spAutoFit/>
+          </a:bodyPr>
+          <a:lstStyle/>
+          <a:p>
+            <a:pPr algn="l"/>
+            <a:r>
+              <a:rPr sz="1300" b="0">
+                <a:solidFill>
+                  <a:srgbClr val="C2C2C2"/>
+                </a:solidFill>
+                <a:latin typeface="Arial"/>
+              </a:rPr>
+              <a:t>Produção assistida + consultoria mensal.</a:t>
+            </a:r>
+          </a:p>
+        </p:txBody>
+      </p:sp>
+      <p:sp>
+        <p:nvSpPr>
+          <p:cNvPr id="19" name="Rounded Rectangle 18"/>
+          <p:cNvSpPr/>
+          <p:nvPr/>
+        </p:nvSpPr>
+        <p:spPr>
+          <a:xfrm>
+            <a:off x="7315199" y="1554480"/>
+            <a:ext cx="2194560" cy="3931920"/>
+          </a:xfrm>
+          <a:prstGeom prst="roundRect">
+            <a:avLst/>
+          </a:prstGeom>
+          <a:solidFill>
+            <a:srgbClr val="1F1F1F"/>
+          </a:solidFill>
+          <a:ln>
+            <a:solidFill>
+              <a:srgbClr val="4A1010"/>
+            </a:solidFill>
+          </a:ln>
+        </p:spPr>
+        <p:style>
+          <a:lnRef idx="1">
+            <a:schemeClr val="accent1"/>
+          </a:lnRef>
+          <a:fillRef idx="3">
+            <a:schemeClr val="accent1"/>
+          </a:fillRef>
+          <a:effectRef idx="2">
+            <a:schemeClr val="accent1"/>
+          </a:effectRef>
+          <a:fontRef idx="minor">
+            <a:schemeClr val="lt1"/>
+          </a:fontRef>
+        </p:style>
+        <p:txBody>
+          <a:bodyPr rtlCol="0" anchor="ctr"/>
+          <a:lstStyle/>
+          <a:p>
+            <a:pPr algn="ctr"/>
+          </a:p>
+        </p:txBody>
+      </p:sp>
+      <p:sp>
+        <p:nvSpPr>
+          <p:cNvPr id="20" name="TextBox 19"/>
+          <p:cNvSpPr txBox="1"/>
+          <p:nvPr/>
+        </p:nvSpPr>
+        <p:spPr>
+          <a:xfrm>
+            <a:off x="7452359" y="1737360"/>
+            <a:ext cx="1920240" cy="274320"/>
+          </a:xfrm>
+          <a:prstGeom prst="rect">
+            <a:avLst/>
+          </a:prstGeom>
+          <a:noFill/>
+        </p:spPr>
+        <p:txBody>
+          <a:bodyPr wrap="square">
+            <a:spAutoFit/>
+          </a:bodyPr>
+          <a:lstStyle/>
+          <a:p>
+            <a:pPr algn="l"/>
+            <a:r>
+              <a:rPr sz="1100" b="0">
+                <a:solidFill>
+                  <a:srgbClr val="C2C2C2"/>
+                </a:solidFill>
+                <a:latin typeface="Arial"/>
+              </a:rPr>
+              <a:t>MÊS 4</a:t>
+            </a:r>
+          </a:p>
+        </p:txBody>
+      </p:sp>
+      <p:sp>
+        <p:nvSpPr>
+          <p:cNvPr id="21" name="TextBox 20"/>
+          <p:cNvSpPr txBox="1"/>
+          <p:nvPr/>
+        </p:nvSpPr>
+        <p:spPr>
+          <a:xfrm>
+            <a:off x="7452359" y="2286000"/>
+            <a:ext cx="1920240" cy="914400"/>
+          </a:xfrm>
+          <a:prstGeom prst="rect">
+            <a:avLst/>
+          </a:prstGeom>
+          <a:noFill/>
+        </p:spPr>
+        <p:txBody>
+          <a:bodyPr wrap="square">
+            <a:spAutoFit/>
+          </a:bodyPr>
+          <a:lstStyle/>
+          <a:p>
+            <a:pPr algn="l"/>
+            <a:r>
+              <a:rPr sz="1500" b="1">
+                <a:solidFill>
+                  <a:srgbClr val="FFFFFF"/>
+                </a:solidFill>
+                <a:latin typeface="Arial"/>
+              </a:rPr>
+              <a:t>Mídia + Performance</a:t>
+            </a:r>
+          </a:p>
+        </p:txBody>
+      </p:sp>
+      <p:sp>
+        <p:nvSpPr>
+          <p:cNvPr id="22" name="TextBox 21"/>
+          <p:cNvSpPr txBox="1"/>
+          <p:nvPr/>
+        </p:nvSpPr>
+        <p:spPr>
+          <a:xfrm>
+            <a:off x="7452359" y="3474720"/>
+            <a:ext cx="1920240" cy="1645920"/>
+          </a:xfrm>
+          <a:prstGeom prst="rect">
+            <a:avLst/>
+          </a:prstGeom>
+          <a:noFill/>
+        </p:spPr>
+        <p:txBody>
+          <a:bodyPr wrap="square">
+            <a:spAutoFit/>
+          </a:bodyPr>
+          <a:lstStyle/>
+          <a:p>
+            <a:pPr algn="l"/>
+            <a:r>
+              <a:rPr sz="1300" b="0">
+                <a:solidFill>
+                  <a:srgbClr val="C2C2C2"/>
+                </a:solidFill>
+                <a:latin typeface="Arial"/>
+              </a:rPr>
+              <a:t>Campanhas, pixel, tracking e otimização.</a:t>
+            </a:r>
+          </a:p>
+        </p:txBody>
+      </p:sp>
+      <p:sp>
+        <p:nvSpPr>
+          <p:cNvPr id="23" name="Rounded Rectangle 22"/>
+          <p:cNvSpPr/>
+          <p:nvPr/>
+        </p:nvSpPr>
+        <p:spPr>
+          <a:xfrm>
+            <a:off x="9646919" y="1554480"/>
+            <a:ext cx="2194560" cy="3931920"/>
+          </a:xfrm>
+          <a:prstGeom prst="roundRect">
+            <a:avLst/>
+          </a:prstGeom>
+          <a:solidFill>
+            <a:srgbClr val="1F1F1F"/>
+          </a:solidFill>
+          <a:ln>
+            <a:solidFill>
+              <a:srgbClr val="4A1010"/>
+            </a:solidFill>
+          </a:ln>
+        </p:spPr>
+        <p:style>
+          <a:lnRef idx="1">
+            <a:schemeClr val="accent1"/>
+          </a:lnRef>
+          <a:fillRef idx="3">
+            <a:schemeClr val="accent1"/>
+          </a:fillRef>
+          <a:effectRef idx="2">
+            <a:schemeClr val="accent1"/>
+          </a:effectRef>
+          <a:fontRef idx="minor">
+            <a:schemeClr val="lt1"/>
+          </a:fontRef>
+        </p:style>
+        <p:txBody>
+          <a:bodyPr rtlCol="0" anchor="ctr"/>
+          <a:lstStyle/>
+          <a:p>
+            <a:pPr algn="ctr"/>
+          </a:p>
+        </p:txBody>
+      </p:sp>
+      <p:sp>
+        <p:nvSpPr>
+          <p:cNvPr id="24" name="TextBox 23"/>
+          <p:cNvSpPr txBox="1"/>
+          <p:nvPr/>
+        </p:nvSpPr>
+        <p:spPr>
+          <a:xfrm>
+            <a:off x="9784079" y="1737360"/>
+            <a:ext cx="1920240" cy="274320"/>
+          </a:xfrm>
+          <a:prstGeom prst="rect">
+            <a:avLst/>
+          </a:prstGeom>
+          <a:noFill/>
+        </p:spPr>
+        <p:txBody>
+          <a:bodyPr wrap="square">
+            <a:spAutoFit/>
+          </a:bodyPr>
+          <a:lstStyle/>
+          <a:p>
+            <a:pPr algn="l"/>
+            <a:r>
+              <a:rPr sz="1100" b="0">
+                <a:solidFill>
+                  <a:srgbClr val="C2C2C2"/>
+                </a:solidFill>
+                <a:latin typeface="Arial"/>
+              </a:rPr>
+              <a:t>MÊS 5/6</a:t>
+            </a:r>
+          </a:p>
+        </p:txBody>
+      </p:sp>
+      <p:sp>
+        <p:nvSpPr>
+          <p:cNvPr id="25" name="TextBox 24"/>
+          <p:cNvSpPr txBox="1"/>
+          <p:nvPr/>
+        </p:nvSpPr>
+        <p:spPr>
+          <a:xfrm>
+            <a:off x="9784079" y="2286000"/>
+            <a:ext cx="1920240" cy="914400"/>
+          </a:xfrm>
+          <a:prstGeom prst="rect">
+            <a:avLst/>
+          </a:prstGeom>
+          <a:noFill/>
+        </p:spPr>
+        <p:txBody>
+          <a:bodyPr wrap="square">
+            <a:spAutoFit/>
+          </a:bodyPr>
+          <a:lstStyle/>
+          <a:p>
+            <a:pPr algn="l"/>
+            <a:r>
+              <a:rPr sz="1500" b="1">
+                <a:solidFill>
+                  <a:srgbClr val="FFFFFF"/>
+                </a:solidFill>
+                <a:latin typeface="Arial"/>
+              </a:rPr>
+              <a:t>Comercial + CRM</a:t>
+            </a:r>
+          </a:p>
+        </p:txBody>
+      </p:sp>
+      <p:sp>
+        <p:nvSpPr>
+          <p:cNvPr id="26" name="TextBox 25"/>
+          <p:cNvSpPr txBox="1"/>
+          <p:nvPr/>
+        </p:nvSpPr>
+        <p:spPr>
+          <a:xfrm>
+            <a:off x="9784079" y="3474720"/>
+            <a:ext cx="1920240" cy="1645920"/>
+          </a:xfrm>
+          <a:prstGeom prst="rect">
+            <a:avLst/>
+          </a:prstGeom>
+          <a:noFill/>
+        </p:spPr>
+        <p:txBody>
+          <a:bodyPr wrap="square">
+            <a:spAutoFit/>
+          </a:bodyPr>
+          <a:lstStyle/>
+          <a:p>
+            <a:pPr algn="l"/>
+            <a:r>
+              <a:rPr sz="1300" b="0">
+                <a:solidFill>
+                  <a:srgbClr val="C2C2C2"/>
+                </a:solidFill>
+                <a:latin typeface="Arial"/>
+              </a:rPr>
+              <a:t>Scripts, follow-up, pipeline WhatsApp.</a:t>
+            </a:r>
+          </a:p>
+        </p:txBody>
+      </p:sp>
     </p:spTree>
   </p:cSld>
   <p:clrMapOvr>
@@ -3518,30 +9713,630 @@
         <p:nvPr/>
       </p:nvGrpSpPr>
       <p:grpSpPr/>
-      <p:pic>
-        <p:nvPicPr>
-          <p:cNvPr id="2" name="Picture 1" descr="slide_09.png"/>
-          <p:cNvPicPr>
-            <a:picLocks noChangeAspect="1"/>
-          </p:cNvPicPr>
-          <p:nvPr/>
-        </p:nvPicPr>
-        <p:blipFill>
-          <a:blip r:embed="rId2"/>
-          <a:stretch>
-            <a:fillRect/>
-          </a:stretch>
-        </p:blipFill>
+      <p:sp>
+        <p:nvSpPr>
+          <p:cNvPr id="2" name="Rectangle 1"/>
+          <p:cNvSpPr/>
+          <p:nvPr/>
+        </p:nvSpPr>
         <p:spPr>
           <a:xfrm>
             <a:off x="0" y="0"/>
-            <a:ext cx="6858000" cy="3857625"/>
-          </a:xfrm>
-          <a:prstGeom prst="rect">
-            <a:avLst/>
-          </a:prstGeom>
-        </p:spPr>
-      </p:pic>
+            <a:ext cx="12191695" cy="6858000"/>
+          </a:xfrm>
+          <a:prstGeom prst="rect">
+            <a:avLst/>
+          </a:prstGeom>
+          <a:solidFill>
+            <a:srgbClr val="0D0D0D"/>
+          </a:solidFill>
+          <a:ln>
+            <a:noFill/>
+          </a:ln>
+        </p:spPr>
+        <p:style>
+          <a:lnRef idx="1">
+            <a:schemeClr val="accent1"/>
+          </a:lnRef>
+          <a:fillRef idx="3">
+            <a:schemeClr val="accent1"/>
+          </a:fillRef>
+          <a:effectRef idx="2">
+            <a:schemeClr val="accent1"/>
+          </a:effectRef>
+          <a:fontRef idx="minor">
+            <a:schemeClr val="lt1"/>
+          </a:fontRef>
+        </p:style>
+        <p:txBody>
+          <a:bodyPr rtlCol="0" anchor="ctr"/>
+          <a:lstStyle/>
+          <a:p>
+            <a:pPr algn="ctr"/>
+          </a:p>
+        </p:txBody>
+      </p:sp>
+      <p:sp>
+        <p:nvSpPr>
+          <p:cNvPr id="3" name="Oval 2"/>
+          <p:cNvSpPr/>
+          <p:nvPr/>
+        </p:nvSpPr>
+        <p:spPr>
+          <a:xfrm>
+            <a:off x="-1828800" y="-1371600"/>
+            <a:ext cx="4572000" cy="4572000"/>
+          </a:xfrm>
+          <a:prstGeom prst="ellipse">
+            <a:avLst/>
+          </a:prstGeom>
+          <a:solidFill>
+            <a:srgbClr val="3C0909"/>
+          </a:solidFill>
+          <a:ln>
+            <a:noFill/>
+          </a:ln>
+        </p:spPr>
+        <p:style>
+          <a:lnRef idx="1">
+            <a:schemeClr val="accent1"/>
+          </a:lnRef>
+          <a:fillRef idx="3">
+            <a:schemeClr val="accent1"/>
+          </a:fillRef>
+          <a:effectRef idx="2">
+            <a:schemeClr val="accent1"/>
+          </a:effectRef>
+          <a:fontRef idx="minor">
+            <a:schemeClr val="lt1"/>
+          </a:fontRef>
+        </p:style>
+        <p:txBody>
+          <a:bodyPr rtlCol="0" anchor="ctr"/>
+          <a:lstStyle/>
+          <a:p>
+            <a:pPr algn="ctr"/>
+          </a:p>
+        </p:txBody>
+      </p:sp>
+      <p:sp>
+        <p:nvSpPr>
+          <p:cNvPr id="4" name="Oval 3"/>
+          <p:cNvSpPr/>
+          <p:nvPr/>
+        </p:nvSpPr>
+        <p:spPr>
+          <a:xfrm>
+            <a:off x="9144000" y="3657600"/>
+            <a:ext cx="4114800" cy="4114800"/>
+          </a:xfrm>
+          <a:prstGeom prst="ellipse">
+            <a:avLst/>
+          </a:prstGeom>
+          <a:solidFill>
+            <a:srgbClr val="3C0909"/>
+          </a:solidFill>
+          <a:ln>
+            <a:noFill/>
+          </a:ln>
+        </p:spPr>
+        <p:style>
+          <a:lnRef idx="1">
+            <a:schemeClr val="accent1"/>
+          </a:lnRef>
+          <a:fillRef idx="3">
+            <a:schemeClr val="accent1"/>
+          </a:fillRef>
+          <a:effectRef idx="2">
+            <a:schemeClr val="accent1"/>
+          </a:effectRef>
+          <a:fontRef idx="minor">
+            <a:schemeClr val="lt1"/>
+          </a:fontRef>
+        </p:style>
+        <p:txBody>
+          <a:bodyPr rtlCol="0" anchor="ctr"/>
+          <a:lstStyle/>
+          <a:p>
+            <a:pPr algn="ctr"/>
+          </a:p>
+        </p:txBody>
+      </p:sp>
+      <p:sp>
+        <p:nvSpPr>
+          <p:cNvPr id="5" name="TextBox 4"/>
+          <p:cNvSpPr txBox="1"/>
+          <p:nvPr/>
+        </p:nvSpPr>
+        <p:spPr>
+          <a:xfrm>
+            <a:off x="457200" y="365760"/>
+            <a:ext cx="10972800" cy="457200"/>
+          </a:xfrm>
+          <a:prstGeom prst="rect">
+            <a:avLst/>
+          </a:prstGeom>
+          <a:noFill/>
+        </p:spPr>
+        <p:txBody>
+          <a:bodyPr wrap="square">
+            <a:spAutoFit/>
+          </a:bodyPr>
+          <a:lstStyle/>
+          <a:p>
+            <a:pPr algn="l"/>
+            <a:r>
+              <a:rPr sz="2600" b="1">
+                <a:solidFill>
+                  <a:srgbClr val="FFFFFF"/>
+                </a:solidFill>
+                <a:latin typeface="Arial"/>
+              </a:rPr>
+              <a:t>AO LONGO DO PROGRAMA</a:t>
+            </a:r>
+          </a:p>
+        </p:txBody>
+      </p:sp>
+      <p:sp>
+        <p:nvSpPr>
+          <p:cNvPr id="6" name="Rounded Rectangle 5"/>
+          <p:cNvSpPr/>
+          <p:nvPr/>
+        </p:nvSpPr>
+        <p:spPr>
+          <a:xfrm>
+            <a:off x="457200" y="1371600"/>
+            <a:ext cx="5486400" cy="1920240"/>
+          </a:xfrm>
+          <a:prstGeom prst="roundRect">
+            <a:avLst/>
+          </a:prstGeom>
+          <a:solidFill>
+            <a:srgbClr val="1F1F1F"/>
+          </a:solidFill>
+          <a:ln>
+            <a:solidFill>
+              <a:srgbClr val="4A1010"/>
+            </a:solidFill>
+          </a:ln>
+        </p:spPr>
+        <p:style>
+          <a:lnRef idx="1">
+            <a:schemeClr val="accent1"/>
+          </a:lnRef>
+          <a:fillRef idx="3">
+            <a:schemeClr val="accent1"/>
+          </a:fillRef>
+          <a:effectRef idx="2">
+            <a:schemeClr val="accent1"/>
+          </a:effectRef>
+          <a:fontRef idx="minor">
+            <a:schemeClr val="lt1"/>
+          </a:fontRef>
+        </p:style>
+        <p:txBody>
+          <a:bodyPr rtlCol="0" anchor="ctr"/>
+          <a:lstStyle/>
+          <a:p>
+            <a:pPr algn="ctr"/>
+          </a:p>
+        </p:txBody>
+      </p:sp>
+      <p:sp>
+        <p:nvSpPr>
+          <p:cNvPr id="7" name="TextBox 6"/>
+          <p:cNvSpPr txBox="1"/>
+          <p:nvPr/>
+        </p:nvSpPr>
+        <p:spPr>
+          <a:xfrm>
+            <a:off x="731520" y="1645920"/>
+            <a:ext cx="4937760" cy="365760"/>
+          </a:xfrm>
+          <a:prstGeom prst="rect">
+            <a:avLst/>
+          </a:prstGeom>
+          <a:noFill/>
+        </p:spPr>
+        <p:txBody>
+          <a:bodyPr wrap="square">
+            <a:spAutoFit/>
+          </a:bodyPr>
+          <a:lstStyle/>
+          <a:p>
+            <a:pPr algn="l"/>
+            <a:r>
+              <a:rPr sz="1400" b="1">
+                <a:solidFill>
+                  <a:srgbClr val="CC0000"/>
+                </a:solidFill>
+                <a:latin typeface="Arial"/>
+              </a:rPr>
+              <a:t>COMUNIDADE PRIVADA</a:t>
+            </a:r>
+          </a:p>
+        </p:txBody>
+      </p:sp>
+      <p:sp>
+        <p:nvSpPr>
+          <p:cNvPr id="8" name="TextBox 7"/>
+          <p:cNvSpPr txBox="1"/>
+          <p:nvPr/>
+        </p:nvSpPr>
+        <p:spPr>
+          <a:xfrm>
+            <a:off x="731520" y="2194560"/>
+            <a:ext cx="4937760" cy="822960"/>
+          </a:xfrm>
+          <a:prstGeom prst="rect">
+            <a:avLst/>
+          </a:prstGeom>
+          <a:noFill/>
+        </p:spPr>
+        <p:txBody>
+          <a:bodyPr wrap="square">
+            <a:spAutoFit/>
+          </a:bodyPr>
+          <a:lstStyle/>
+          <a:p>
+            <a:pPr algn="l"/>
+            <a:r>
+              <a:rPr sz="1400" b="0">
+                <a:solidFill>
+                  <a:srgbClr val="C2C2C2"/>
+                </a:solidFill>
+                <a:latin typeface="Arial"/>
+              </a:rPr>
+              <a:t>Peers do mesmo segmento. Troca de experiências e networking qualificado.</a:t>
+            </a:r>
+          </a:p>
+        </p:txBody>
+      </p:sp>
+      <p:sp>
+        <p:nvSpPr>
+          <p:cNvPr id="9" name="Rounded Rectangle 8"/>
+          <p:cNvSpPr/>
+          <p:nvPr/>
+        </p:nvSpPr>
+        <p:spPr>
+          <a:xfrm>
+            <a:off x="6217920" y="1371600"/>
+            <a:ext cx="5486400" cy="1920240"/>
+          </a:xfrm>
+          <a:prstGeom prst="roundRect">
+            <a:avLst/>
+          </a:prstGeom>
+          <a:solidFill>
+            <a:srgbClr val="1F1F1F"/>
+          </a:solidFill>
+          <a:ln>
+            <a:solidFill>
+              <a:srgbClr val="4A1010"/>
+            </a:solidFill>
+          </a:ln>
+        </p:spPr>
+        <p:style>
+          <a:lnRef idx="1">
+            <a:schemeClr val="accent1"/>
+          </a:lnRef>
+          <a:fillRef idx="3">
+            <a:schemeClr val="accent1"/>
+          </a:fillRef>
+          <a:effectRef idx="2">
+            <a:schemeClr val="accent1"/>
+          </a:effectRef>
+          <a:fontRef idx="minor">
+            <a:schemeClr val="lt1"/>
+          </a:fontRef>
+        </p:style>
+        <p:txBody>
+          <a:bodyPr rtlCol="0" anchor="ctr"/>
+          <a:lstStyle/>
+          <a:p>
+            <a:pPr algn="ctr"/>
+          </a:p>
+        </p:txBody>
+      </p:sp>
+      <p:sp>
+        <p:nvSpPr>
+          <p:cNvPr id="10" name="TextBox 9"/>
+          <p:cNvSpPr txBox="1"/>
+          <p:nvPr/>
+        </p:nvSpPr>
+        <p:spPr>
+          <a:xfrm>
+            <a:off x="6492240" y="1645920"/>
+            <a:ext cx="4937760" cy="365760"/>
+          </a:xfrm>
+          <a:prstGeom prst="rect">
+            <a:avLst/>
+          </a:prstGeom>
+          <a:noFill/>
+        </p:spPr>
+        <p:txBody>
+          <a:bodyPr wrap="square">
+            <a:spAutoFit/>
+          </a:bodyPr>
+          <a:lstStyle/>
+          <a:p>
+            <a:pPr algn="l"/>
+            <a:r>
+              <a:rPr sz="1400" b="1">
+                <a:solidFill>
+                  <a:srgbClr val="CC0000"/>
+                </a:solidFill>
+                <a:latin typeface="Arial"/>
+              </a:rPr>
+              <a:t>MENTORIAS COLETIVAS</a:t>
+            </a:r>
+          </a:p>
+        </p:txBody>
+      </p:sp>
+      <p:sp>
+        <p:nvSpPr>
+          <p:cNvPr id="11" name="TextBox 10"/>
+          <p:cNvSpPr txBox="1"/>
+          <p:nvPr/>
+        </p:nvSpPr>
+        <p:spPr>
+          <a:xfrm>
+            <a:off x="6492240" y="2194560"/>
+            <a:ext cx="4937760" cy="822960"/>
+          </a:xfrm>
+          <a:prstGeom prst="rect">
+            <a:avLst/>
+          </a:prstGeom>
+          <a:noFill/>
+        </p:spPr>
+        <p:txBody>
+          <a:bodyPr wrap="square">
+            <a:spAutoFit/>
+          </a:bodyPr>
+          <a:lstStyle/>
+          <a:p>
+            <a:pPr algn="l"/>
+            <a:r>
+              <a:rPr sz="1400" b="0">
+                <a:solidFill>
+                  <a:srgbClr val="C2C2C2"/>
+                </a:solidFill>
+                <a:latin typeface="Arial"/>
+              </a:rPr>
+              <a:t>Lives mensais temáticas com aplicação direta no negócio.</a:t>
+            </a:r>
+          </a:p>
+        </p:txBody>
+      </p:sp>
+      <p:sp>
+        <p:nvSpPr>
+          <p:cNvPr id="12" name="Rounded Rectangle 11"/>
+          <p:cNvSpPr/>
+          <p:nvPr/>
+        </p:nvSpPr>
+        <p:spPr>
+          <a:xfrm>
+            <a:off x="457200" y="3566160"/>
+            <a:ext cx="5486400" cy="1920240"/>
+          </a:xfrm>
+          <a:prstGeom prst="roundRect">
+            <a:avLst/>
+          </a:prstGeom>
+          <a:solidFill>
+            <a:srgbClr val="1F1F1F"/>
+          </a:solidFill>
+          <a:ln>
+            <a:solidFill>
+              <a:srgbClr val="4A1010"/>
+            </a:solidFill>
+          </a:ln>
+        </p:spPr>
+        <p:style>
+          <a:lnRef idx="1">
+            <a:schemeClr val="accent1"/>
+          </a:lnRef>
+          <a:fillRef idx="3">
+            <a:schemeClr val="accent1"/>
+          </a:fillRef>
+          <a:effectRef idx="2">
+            <a:schemeClr val="accent1"/>
+          </a:effectRef>
+          <a:fontRef idx="minor">
+            <a:schemeClr val="lt1"/>
+          </a:fontRef>
+        </p:style>
+        <p:txBody>
+          <a:bodyPr rtlCol="0" anchor="ctr"/>
+          <a:lstStyle/>
+          <a:p>
+            <a:pPr algn="ctr"/>
+          </a:p>
+        </p:txBody>
+      </p:sp>
+      <p:sp>
+        <p:nvSpPr>
+          <p:cNvPr id="13" name="TextBox 12"/>
+          <p:cNvSpPr txBox="1"/>
+          <p:nvPr/>
+        </p:nvSpPr>
+        <p:spPr>
+          <a:xfrm>
+            <a:off x="731520" y="3840480"/>
+            <a:ext cx="4937760" cy="365760"/>
+          </a:xfrm>
+          <a:prstGeom prst="rect">
+            <a:avLst/>
+          </a:prstGeom>
+          <a:noFill/>
+        </p:spPr>
+        <p:txBody>
+          <a:bodyPr wrap="square">
+            <a:spAutoFit/>
+          </a:bodyPr>
+          <a:lstStyle/>
+          <a:p>
+            <a:pPr algn="l"/>
+            <a:r>
+              <a:rPr sz="1400" b="1">
+                <a:solidFill>
+                  <a:srgbClr val="CC0000"/>
+                </a:solidFill>
+                <a:latin typeface="Arial"/>
+              </a:rPr>
+              <a:t>PLATAFORMA DE CONTEÚDO</a:t>
+            </a:r>
+          </a:p>
+        </p:txBody>
+      </p:sp>
+      <p:sp>
+        <p:nvSpPr>
+          <p:cNvPr id="14" name="TextBox 13"/>
+          <p:cNvSpPr txBox="1"/>
+          <p:nvPr/>
+        </p:nvSpPr>
+        <p:spPr>
+          <a:xfrm>
+            <a:off x="731520" y="4389120"/>
+            <a:ext cx="4937760" cy="822960"/>
+          </a:xfrm>
+          <a:prstGeom prst="rect">
+            <a:avLst/>
+          </a:prstGeom>
+          <a:noFill/>
+        </p:spPr>
+        <p:txBody>
+          <a:bodyPr wrap="square">
+            <a:spAutoFit/>
+          </a:bodyPr>
+          <a:lstStyle/>
+          <a:p>
+            <a:pPr algn="l"/>
+            <a:r>
+              <a:rPr sz="1400" b="0">
+                <a:solidFill>
+                  <a:srgbClr val="C2C2C2"/>
+                </a:solidFill>
+                <a:latin typeface="Arial"/>
+              </a:rPr>
+              <a:t>Trilhas, templates e playbooks por especialidade e fase.</a:t>
+            </a:r>
+          </a:p>
+        </p:txBody>
+      </p:sp>
+      <p:sp>
+        <p:nvSpPr>
+          <p:cNvPr id="15" name="Rounded Rectangle 14"/>
+          <p:cNvSpPr/>
+          <p:nvPr/>
+        </p:nvSpPr>
+        <p:spPr>
+          <a:xfrm>
+            <a:off x="6217920" y="3566160"/>
+            <a:ext cx="5486400" cy="1920240"/>
+          </a:xfrm>
+          <a:prstGeom prst="roundRect">
+            <a:avLst/>
+          </a:prstGeom>
+          <a:solidFill>
+            <a:srgbClr val="1F1F1F"/>
+          </a:solidFill>
+          <a:ln>
+            <a:solidFill>
+              <a:srgbClr val="4A1010"/>
+            </a:solidFill>
+          </a:ln>
+        </p:spPr>
+        <p:style>
+          <a:lnRef idx="1">
+            <a:schemeClr val="accent1"/>
+          </a:lnRef>
+          <a:fillRef idx="3">
+            <a:schemeClr val="accent1"/>
+          </a:fillRef>
+          <a:effectRef idx="2">
+            <a:schemeClr val="accent1"/>
+          </a:effectRef>
+          <a:fontRef idx="minor">
+            <a:schemeClr val="lt1"/>
+          </a:fontRef>
+        </p:style>
+        <p:txBody>
+          <a:bodyPr rtlCol="0" anchor="ctr"/>
+          <a:lstStyle/>
+          <a:p>
+            <a:pPr algn="ctr"/>
+          </a:p>
+        </p:txBody>
+      </p:sp>
+      <p:sp>
+        <p:nvSpPr>
+          <p:cNvPr id="16" name="TextBox 15"/>
+          <p:cNvSpPr txBox="1"/>
+          <p:nvPr/>
+        </p:nvSpPr>
+        <p:spPr>
+          <a:xfrm>
+            <a:off x="6492240" y="3840480"/>
+            <a:ext cx="4937760" cy="365760"/>
+          </a:xfrm>
+          <a:prstGeom prst="rect">
+            <a:avLst/>
+          </a:prstGeom>
+          <a:noFill/>
+        </p:spPr>
+        <p:txBody>
+          <a:bodyPr wrap="square">
+            <a:spAutoFit/>
+          </a:bodyPr>
+          <a:lstStyle/>
+          <a:p>
+            <a:pPr algn="l"/>
+            <a:r>
+              <a:rPr sz="1400" b="1">
+                <a:solidFill>
+                  <a:srgbClr val="CC0000"/>
+                </a:solidFill>
+                <a:latin typeface="Arial"/>
+              </a:rPr>
+              <a:t>FÁBRICA DE RECEITA</a:t>
+            </a:r>
+          </a:p>
+        </p:txBody>
+      </p:sp>
+      <p:sp>
+        <p:nvSpPr>
+          <p:cNvPr id="17" name="TextBox 16"/>
+          <p:cNvSpPr txBox="1"/>
+          <p:nvPr/>
+        </p:nvSpPr>
+        <p:spPr>
+          <a:xfrm>
+            <a:off x="6492240" y="4389120"/>
+            <a:ext cx="4937760" cy="822960"/>
+          </a:xfrm>
+          <a:prstGeom prst="rect">
+            <a:avLst/>
+          </a:prstGeom>
+          <a:noFill/>
+        </p:spPr>
+        <p:txBody>
+          <a:bodyPr wrap="square">
+            <a:spAutoFit/>
+          </a:bodyPr>
+          <a:lstStyle/>
+          <a:p>
+            <a:pPr algn="l"/>
+            <a:r>
+              <a:rPr sz="1400" b="0">
+                <a:solidFill>
+                  <a:srgbClr val="C2C2C2"/>
+                </a:solidFill>
+                <a:latin typeface="Arial"/>
+              </a:rPr>
+              <a:t>Imersão presencial: hot seats, cases e workshops.</a:t>
+            </a:r>
+          </a:p>
+        </p:txBody>
+      </p:sp>
     </p:spTree>
   </p:cSld>
   <p:clrMapOvr>
